--- a/10 класс/urok3/Практика_Типы_данных_18задач.pptx
+++ b/10 класс/urok3/Практика_Типы_данных_18задач.pptx
@@ -4,6 +4,9 @@
   <p:sldMasterIdLst>
     <p:sldMasterId id="2147483648" r:id="rId1"/>
   </p:sldMasterIdLst>
+  <p:notesMasterIdLst>
+    <p:notesMasterId r:id="rId17"/>
+  </p:notesMasterIdLst>
   <p:sldIdLst>
     <p:sldId id="256" r:id="rId2"/>
     <p:sldId id="257" r:id="rId3"/>
@@ -21,9 +24,6 @@
     <p:sldId id="269" r:id="rId15"/>
     <p:sldId id="270" r:id="rId16"/>
   </p:sldIdLst>
-  <p:notesMasterIdLst>
-    <p:notesMasterId r:id="rId17"/>
-  </p:notesMasterIdLst>
   <p:sldSz cx="12192000" cy="6858000"/>
   <p:notesSz cx="6858000" cy="12192000"/>
   <p:defaultTextStyle>
@@ -118,6 +118,11 @@
       </a:defRPr>
     </a:lvl9pPr>
   </p:defaultTextStyle>
+  <p:extLst>
+    <p:ext uri="{EFAFB233-063F-42B5-8137-9DF3F51BA10A}">
+      <p15:sldGuideLst xmlns:p15="http://schemas.microsoft.com/office/powerpoint/2012/main"/>
+    </p:ext>
+  </p:extLst>
 </p:presentation>
 </file>
 
@@ -143,234 +148,10 @@
           <a:chExt cx="0" cy="0"/>
         </a:xfrm>
       </p:grpSpPr>
-      <p:sp>
-        <p:nvSpPr>
-          <p:cNvPr id="2" name="Header Placeholder 1"/>
-          <p:cNvSpPr>
-            <a:spLocks noGrp="1"/>
-          </p:cNvSpPr>
-          <p:nvPr>
-            <p:ph type="hdr" sz="quarter"/>
-          </p:nvPr>
-        </p:nvSpPr>
-        <p:spPr>
-          <a:xfrm>
-            <a:off x="0" y="0"/>
-            <a:ext cx="2971800" cy="458788"/>
-          </a:xfrm>
-          <a:prstGeom prst="rect">
-            <a:avLst/>
-          </a:prstGeom>
-        </p:spPr>
-        <p:txBody>
-          <a:bodyPr vert="horz" lIns="91440" tIns="45720" rIns="91440" bIns="45720" rtlCol="0"/>
-          <a:lstStyle>
-            <a:lvl1pPr algn="l">
-              <a:defRPr sz="1200"/>
-            </a:lvl1pPr>
-          </a:lstStyle>
-          <a:p>
-            <a:endParaRPr lang="en-US"/>
-          </a:p>
-        </p:txBody>
-      </p:sp>
-      <p:sp>
-        <p:nvSpPr>
-          <p:cNvPr id="3" name="Date Placeholder 2"/>
-          <p:cNvSpPr>
-            <a:spLocks noGrp="1"/>
-          </p:cNvSpPr>
-          <p:nvPr>
-            <p:ph type="dt" idx="1"/>
-          </p:nvPr>
-        </p:nvSpPr>
-        <p:spPr>
-          <a:xfrm>
-            <a:off x="3884613" y="0"/>
-            <a:ext cx="2971800" cy="458788"/>
-          </a:xfrm>
-          <a:prstGeom prst="rect">
-            <a:avLst/>
-          </a:prstGeom>
-        </p:spPr>
-        <p:txBody>
-          <a:bodyPr vert="horz" lIns="91440" tIns="45720" rIns="91440" bIns="45720" rtlCol="0"/>
-          <a:lstStyle>
-            <a:lvl1pPr algn="r">
-              <a:defRPr sz="1200"/>
-            </a:lvl1pPr>
-          </a:lstStyle>
-          <a:p>
-            <a:fld id="{5282F153-3F37-0F45-9E97-73ACFA13230C}" type="datetimeFigureOut">
-              <a:rPr lang="en-US"/>
-              <a:t>7/23/19</a:t>
-            </a:fld>
-            <a:endParaRPr lang="en-US"/>
-          </a:p>
-        </p:txBody>
-      </p:sp>
-      <p:sp>
-        <p:nvSpPr>
-          <p:cNvPr id="4" name="Slide Image Placeholder 3"/>
-          <p:cNvSpPr>
-            <a:spLocks noGrp="1" noRot="1" noChangeAspect="1"/>
-          </p:cNvSpPr>
-          <p:nvPr>
-            <p:ph type="sldImg" idx="2"/>
-          </p:nvPr>
-        </p:nvSpPr>
-        <p:spPr>
-          <a:xfrm>
-            <a:off x="685800" y="1143000"/>
-            <a:ext cx="5486400" cy="3086100"/>
-          </a:xfrm>
-          <a:prstGeom prst="rect">
-            <a:avLst/>
-          </a:prstGeom>
-          <a:noFill/>
-          <a:ln w="12700">
-            <a:solidFill>
-              <a:prstClr val="black"/>
-            </a:solidFill>
-          </a:ln>
-        </p:spPr>
-        <p:txBody>
-          <a:bodyPr vert="horz" lIns="91440" tIns="45720" rIns="91440" bIns="45720" rtlCol="0" anchor="ctr"/>
-          <a:lstStyle/>
-          <a:p>
-            <a:endParaRPr lang="en-US"/>
-          </a:p>
-        </p:txBody>
-      </p:sp>
-      <p:sp>
-        <p:nvSpPr>
-          <p:cNvPr id="5" name="Notes Placeholder 4"/>
-          <p:cNvSpPr>
-            <a:spLocks noGrp="1"/>
-          </p:cNvSpPr>
-          <p:nvPr>
-            <p:ph type="body" sz="quarter" idx="3"/>
-          </p:nvPr>
-        </p:nvSpPr>
-        <p:spPr>
-          <a:xfrm>
-            <a:off x="685800" y="4400550"/>
-            <a:ext cx="5486400" cy="3600450"/>
-          </a:xfrm>
-          <a:prstGeom prst="rect">
-            <a:avLst/>
-          </a:prstGeom>
-        </p:spPr>
-        <p:txBody>
-          <a:bodyPr vert="horz" lIns="91440" tIns="45720" rIns="91440" bIns="45720" rtlCol="0"/>
-          <a:lstStyle/>
-          <a:p>
-            <a:pPr lvl="0"/>
-            <a:r>
-              <a:rPr lang="en-US"/>
-              <a:t>Click to edit Master text styles</a:t>
-            </a:r>
-          </a:p>
-          <a:p>
-            <a:pPr lvl="1"/>
-            <a:r>
-              <a:rPr lang="en-US"/>
-              <a:t>Second level</a:t>
-            </a:r>
-          </a:p>
-          <a:p>
-            <a:pPr lvl="2"/>
-            <a:r>
-              <a:rPr lang="en-US"/>
-              <a:t>Third level</a:t>
-            </a:r>
-          </a:p>
-          <a:p>
-            <a:pPr lvl="3"/>
-            <a:r>
-              <a:rPr lang="en-US"/>
-              <a:t>Fourth level</a:t>
-            </a:r>
-          </a:p>
-          <a:p>
-            <a:pPr lvl="4"/>
-            <a:r>
-              <a:rPr lang="en-US"/>
-              <a:t>Fifth level</a:t>
-            </a:r>
-          </a:p>
-        </p:txBody>
-      </p:sp>
-      <p:sp>
-        <p:nvSpPr>
-          <p:cNvPr id="6" name="Footer Placeholder 5"/>
-          <p:cNvSpPr>
-            <a:spLocks noGrp="1"/>
-          </p:cNvSpPr>
-          <p:nvPr>
-            <p:ph type="ftr" sz="quarter" idx="4"/>
-          </p:nvPr>
-        </p:nvSpPr>
-        <p:spPr>
-          <a:xfrm>
-            <a:off x="0" y="8685213"/>
-            <a:ext cx="2971800" cy="458787"/>
-          </a:xfrm>
-          <a:prstGeom prst="rect">
-            <a:avLst/>
-          </a:prstGeom>
-        </p:spPr>
-        <p:txBody>
-          <a:bodyPr vert="horz" lIns="91440" tIns="45720" rIns="91440" bIns="45720" rtlCol="0" anchor="b"/>
-          <a:lstStyle>
-            <a:lvl1pPr algn="l">
-              <a:defRPr sz="1200"/>
-            </a:lvl1pPr>
-          </a:lstStyle>
-          <a:p>
-            <a:endParaRPr lang="en-US"/>
-          </a:p>
-        </p:txBody>
-      </p:sp>
-      <p:sp>
-        <p:nvSpPr>
-          <p:cNvPr id="7" name="Slide Number Placeholder 6"/>
-          <p:cNvSpPr>
-            <a:spLocks noGrp="1"/>
-          </p:cNvSpPr>
-          <p:nvPr>
-            <p:ph type="sldNum" sz="quarter" idx="5"/>
-          </p:nvPr>
-        </p:nvSpPr>
-        <p:spPr>
-          <a:xfrm>
-            <a:off x="3884613" y="8685213"/>
-            <a:ext cx="2971800" cy="458787"/>
-          </a:xfrm>
-          <a:prstGeom prst="rect">
-            <a:avLst/>
-          </a:prstGeom>
-        </p:spPr>
-        <p:txBody>
-          <a:bodyPr vert="horz" lIns="91440" tIns="45720" rIns="91440" bIns="45720" rtlCol="0" anchor="b"/>
-          <a:lstStyle>
-            <a:lvl1pPr algn="r">
-              <a:defRPr sz="1200"/>
-            </a:lvl1pPr>
-          </a:lstStyle>
-          <a:p>
-            <a:fld id="{CE5E9CC1-C706-0F49-92D6-E571CC5EEA8F}" type="slidenum">
-              <a:rPr lang="en-US"/>
-              <a:t>‹#›</a:t>
-            </a:fld>
-            <a:endParaRPr lang="en-US"/>
-          </a:p>
-        </p:txBody>
-      </p:sp>
     </p:spTree>
     <p:extLst>
       <p:ext uri="{BB962C8B-B14F-4D97-AF65-F5344CB8AC3E}">
-        <p14:creationId xmlns:p14="http://schemas.microsoft.com/office/powerpoint/2010/main" val="1024086991"/>
+        <p14:creationId xmlns:p14="http://schemas.microsoft.com/office/powerpoint/2010/main" val="1560640280"/>
       </p:ext>
     </p:extLst>
   </p:cSld>
@@ -518,7 +299,6 @@
               <a:rPr lang="en-US" dirty="0"/>
               <a:t>Работа опирается на тему занятия: типы данных, преобразование, логический тип.</a:t>
             </a:r>
-            <a:endParaRPr lang="en-US" dirty="0"/>
           </a:p>
         </p:txBody>
       </p:sp>
@@ -606,7 +386,6 @@
               <a:rPr lang="en-US" dirty="0"/>
               <a:t>Ответы: 1 ч 2 мин 5 с; True False True bool; 2, 1, 0.</a:t>
             </a:r>
-            <a:endParaRPr lang="en-US" dirty="0"/>
           </a:p>
         </p:txBody>
       </p:sp>
@@ -694,7 +473,6 @@
               <a:rPr lang="en-US" dirty="0"/>
               <a:t>Задача 14 — три близких результата с разными типами. Самая поучительная.</a:t>
             </a:r>
-            <a:endParaRPr lang="en-US" dirty="0"/>
           </a:p>
         </p:txBody>
       </p:sp>
@@ -782,7 +560,6 @@
               <a:rPr lang="en-US" dirty="0"/>
               <a:t>Ответы: 20, 4, 128; 7 int, 7.0 float, 8; 15 int и 3.0 float.</a:t>
             </a:r>
-            <a:endParaRPr lang="en-US" dirty="0"/>
           </a:p>
         </p:txBody>
       </p:sp>
@@ -870,7 +647,6 @@
               <a:rPr lang="en-US" dirty="0"/>
               <a:t>Задача 16 — классический приём округления. Разобрать обязательно.</a:t>
             </a:r>
-            <a:endParaRPr lang="en-US" dirty="0"/>
           </a:p>
         </p:txBody>
       </p:sp>
@@ -958,7 +734,6 @@
               <a:rPr lang="en-US" dirty="0"/>
               <a:t>Ответы: 4 и 3; False и True; 1 и False.</a:t>
             </a:r>
-            <a:endParaRPr lang="en-US" dirty="0"/>
           </a:p>
         </p:txBody>
       </p:sp>
@@ -1046,7 +821,6 @@
               <a:rPr lang="en-US" dirty="0"/>
               <a:t>Распечатать и раздать.</a:t>
             </a:r>
-            <a:endParaRPr lang="en-US" dirty="0"/>
           </a:p>
         </p:txBody>
       </p:sp>
@@ -1134,7 +908,6 @@
               <a:rPr lang="en-US" dirty="0"/>
               <a:t>Напомнить: print(type(10)) выводит &lt;class int&gt;.</a:t>
             </a:r>
-            <a:endParaRPr lang="en-US" dirty="0"/>
           </a:p>
         </p:txBody>
       </p:sp>
@@ -1222,7 +995,6 @@
               <a:rPr lang="en-US" dirty="0"/>
               <a:t>Ключевое: 7 и 7.0 выглядят похоже, но типы разные.</a:t>
             </a:r>
-            <a:endParaRPr lang="en-US" dirty="0"/>
           </a:p>
         </p:txBody>
       </p:sp>
@@ -1310,7 +1082,6 @@
               <a:rPr lang="en-US" dirty="0"/>
               <a:t>Ответы: int, float, str, bool.</a:t>
             </a:r>
-            <a:endParaRPr lang="en-US" dirty="0"/>
           </a:p>
         </p:txBody>
       </p:sp>
@@ -1398,7 +1169,6 @@
               <a:rPr lang="en-US" dirty="0"/>
               <a:t>Задача 6: оба числа целые, а результат дробный — это удивляет.</a:t>
             </a:r>
-            <a:endParaRPr lang="en-US" dirty="0"/>
           </a:p>
         </p:txBody>
       </p:sp>
@@ -1486,7 +1256,6 @@
               <a:rPr lang="en-US" dirty="0"/>
               <a:t>Ответы: 30; Год: 2025; 5.5 и float.</a:t>
             </a:r>
-            <a:endParaRPr lang="en-US" dirty="0"/>
           </a:p>
         </p:txBody>
       </p:sp>
@@ -1574,7 +1343,6 @@
               <a:rPr lang="en-US" dirty="0"/>
               <a:t>Задача 9: 10/5 даёт 2.0, а не 2. Это частый источник недоумения.</a:t>
             </a:r>
-            <a:endParaRPr lang="en-US" dirty="0"/>
           </a:p>
         </p:txBody>
       </p:sp>
@@ -1662,7 +1430,6 @@
               <a:rPr lang="en-US" dirty="0"/>
               <a:t>Ответы: 19 и 154; 4 и 5; 2.0 float и 2 int.</a:t>
             </a:r>
-            <a:endParaRPr lang="en-US" dirty="0"/>
           </a:p>
         </p:txBody>
       </p:sp>
@@ -1750,7 +1517,6 @@
               <a:rPr lang="en-US" dirty="0"/>
               <a:t>Задача 12 удивляет сильнее всего: True складывается как число.</a:t>
             </a:r>
-            <a:endParaRPr lang="en-US" dirty="0"/>
           </a:p>
         </p:txBody>
       </p:sp>
@@ -1823,6 +1589,11 @@
 <file path=ppt/slideMasters/slideMaster1.xml><?xml version="1.0" encoding="utf-8"?>
 <p:sldMaster xmlns:a="http://schemas.openxmlformats.org/drawingml/2006/main" xmlns:r="http://schemas.openxmlformats.org/officeDocument/2006/relationships" xmlns:p="http://schemas.openxmlformats.org/presentationml/2006/main">
   <p:cSld>
+    <p:bg>
+      <p:bgRef idx="1001">
+        <a:schemeClr val="bg1"/>
+      </p:bgRef>
+    </p:bg>
     <p:spTree>
       <p:nvGrpSpPr>
         <p:cNvPr id="1" name=""/>
@@ -2105,6 +1876,7 @@
         <a:solidFill>
           <a:srgbClr val="17132E"/>
         </a:solidFill>
+        <a:effectLst/>
       </p:bgPr>
     </p:bg>
     <p:spTree>
@@ -2186,11 +1958,11 @@
           <a:bodyPr wrap="square" lIns="0" tIns="0" rIns="0" bIns="0" rtlCol="0" anchor="ctr"/>
           <a:lstStyle/>
           <a:p>
-            <a:pPr indent="0" marL="0">
-              <a:buNone/>
-            </a:pPr>
-            <a:r>
-              <a:rPr lang="en-US" sz="1500" b="1" spc="200" kern="0" dirty="0">
+            <a:pPr marL="0" indent="0">
+              <a:buNone/>
+            </a:pPr>
+            <a:r>
+              <a:rPr lang="en-US" sz="1500" b="1" kern="0" spc="200" dirty="0">
                 <a:solidFill>
                   <a:srgbClr val="4FD1E0"/>
                 </a:solidFill>
@@ -2225,7 +1997,7 @@
           <a:bodyPr wrap="square" lIns="0" tIns="0" rIns="0" bIns="0" rtlCol="0" anchor="ctr"/>
           <a:lstStyle/>
           <a:p>
-            <a:pPr indent="0" marL="0">
+            <a:pPr marL="0" indent="0">
               <a:buNone/>
             </a:pPr>
             <a:r>
@@ -2264,7 +2036,7 @@
           <a:bodyPr wrap="square" lIns="0" tIns="0" rIns="0" bIns="0" rtlCol="0" anchor="ctr"/>
           <a:lstStyle/>
           <a:p>
-            <a:pPr indent="0" marL="0">
+            <a:pPr marL="0" indent="0">
               <a:buNone/>
             </a:pPr>
             <a:r>
@@ -2303,7 +2075,7 @@
           <a:bodyPr wrap="square" lIns="0" tIns="0" rIns="0" bIns="0" rtlCol="0" anchor="ctr"/>
           <a:lstStyle/>
           <a:p>
-            <a:pPr indent="0" marL="0">
+            <a:pPr marL="0" indent="0">
               <a:buNone/>
             </a:pPr>
             <a:r>
@@ -2342,7 +2114,7 @@
           <a:bodyPr wrap="square" lIns="0" tIns="0" rIns="0" bIns="0" rtlCol="0" anchor="ctr"/>
           <a:lstStyle/>
           <a:p>
-            <a:pPr indent="0" marL="0">
+            <a:pPr marL="0" indent="0">
               <a:buNone/>
             </a:pPr>
             <a:r>
@@ -2376,6 +2148,7 @@
         <a:solidFill>
           <a:srgbClr val="17132E"/>
         </a:solidFill>
+        <a:effectLst/>
       </p:bgPr>
     </p:bg>
     <p:spTree>
@@ -2435,7 +2208,7 @@
           <a:bodyPr wrap="square" lIns="0" tIns="0" rIns="0" bIns="0" rtlCol="0" anchor="ctr"/>
           <a:lstStyle/>
           <a:p>
-            <a:pPr algn="ctr" indent="0" marL="0">
+            <a:pPr marL="0" indent="0" algn="ctr">
               <a:buNone/>
             </a:pPr>
             <a:r>
@@ -2474,7 +2247,7 @@
           <a:bodyPr wrap="square" lIns="0" tIns="0" rIns="0" bIns="0" rtlCol="0" anchor="ctr"/>
           <a:lstStyle/>
           <a:p>
-            <a:pPr indent="0" marL="0">
+            <a:pPr marL="0" indent="0">
               <a:buNone/>
             </a:pPr>
             <a:r>
@@ -2540,7 +2313,7 @@
           <a:bodyPr wrap="square" lIns="0" tIns="0" rIns="0" bIns="0" rtlCol="0" anchor="ctr"/>
           <a:lstStyle/>
           <a:p>
-            <a:pPr algn="ctr" indent="0" marL="0">
+            <a:pPr marL="0" indent="0" algn="ctr">
               <a:buNone/>
             </a:pPr>
             <a:r>
@@ -2626,7 +2399,7 @@
           <a:bodyPr wrap="square" lIns="0" tIns="0" rIns="0" bIns="0" rtlCol="0" anchor="ctr"/>
           <a:lstStyle/>
           <a:p>
-            <a:pPr algn="ctr" indent="0" marL="0">
+            <a:pPr marL="0" indent="0" algn="ctr">
               <a:buNone/>
             </a:pPr>
             <a:r>
@@ -2665,7 +2438,7 @@
           <a:bodyPr wrap="square" lIns="0" tIns="0" rIns="0" bIns="0" rtlCol="0" anchor="ctr"/>
           <a:lstStyle/>
           <a:p>
-            <a:pPr indent="0" marL="0">
+            <a:pPr marL="0" indent="0">
               <a:buNone/>
             </a:pPr>
             <a:r>
@@ -2731,7 +2504,7 @@
           <a:bodyPr wrap="square" lIns="0" tIns="0" rIns="0" bIns="0" rtlCol="0" anchor="ctr"/>
           <a:lstStyle/>
           <a:p>
-            <a:pPr indent="0" marL="0">
+            <a:pPr marL="0" indent="0">
               <a:lnSpc>
                 <a:spcPct val="110000"/>
               </a:lnSpc>
@@ -2751,7 +2524,7 @@
             <a:endParaRPr lang="en-US" sz="1200" dirty="0"/>
           </a:p>
           <a:p>
-            <a:pPr indent="0" marL="0">
+            <a:pPr marL="0" indent="0">
               <a:lnSpc>
                 <a:spcPct val="110000"/>
               </a:lnSpc>
@@ -2771,7 +2544,7 @@
             <a:endParaRPr lang="en-US" sz="1200" dirty="0"/>
           </a:p>
           <a:p>
-            <a:pPr indent="0" marL="0">
+            <a:pPr marL="0" indent="0">
               <a:lnSpc>
                 <a:spcPct val="110000"/>
               </a:lnSpc>
@@ -2780,7 +2553,7 @@
             <a:endParaRPr lang="en-US" sz="1200" dirty="0"/>
           </a:p>
           <a:p>
-            <a:pPr indent="0" marL="0">
+            <a:pPr marL="0" indent="0">
               <a:lnSpc>
                 <a:spcPct val="110000"/>
               </a:lnSpc>
@@ -2800,7 +2573,7 @@
             <a:endParaRPr lang="en-US" sz="1200" dirty="0"/>
           </a:p>
           <a:p>
-            <a:pPr indent="0" marL="0">
+            <a:pPr marL="0" indent="0">
               <a:lnSpc>
                 <a:spcPct val="110000"/>
               </a:lnSpc>
@@ -2820,7 +2593,7 @@
             <a:endParaRPr lang="en-US" sz="1200" dirty="0"/>
           </a:p>
           <a:p>
-            <a:pPr indent="0" marL="0">
+            <a:pPr marL="0" indent="0">
               <a:lnSpc>
                 <a:spcPct val="110000"/>
               </a:lnSpc>
@@ -2840,7 +2613,7 @@
             <a:endParaRPr lang="en-US" sz="1200" dirty="0"/>
           </a:p>
           <a:p>
-            <a:pPr indent="0" marL="0">
+            <a:pPr marL="0" indent="0">
               <a:lnSpc>
                 <a:spcPct val="110000"/>
               </a:lnSpc>
@@ -2849,7 +2622,7 @@
             <a:endParaRPr lang="en-US" sz="1200" dirty="0"/>
           </a:p>
           <a:p>
-            <a:pPr indent="0" marL="0">
+            <a:pPr marL="0" indent="0">
               <a:lnSpc>
                 <a:spcPct val="110000"/>
               </a:lnSpc>
@@ -2891,7 +2664,7 @@
           <a:bodyPr wrap="square" lIns="0" tIns="0" rIns="0" bIns="0" rtlCol="0" anchor="ctr"/>
           <a:lstStyle/>
           <a:p>
-            <a:pPr indent="0" marL="0">
+            <a:pPr marL="0" indent="0">
               <a:buNone/>
             </a:pPr>
             <a:r>
@@ -2957,7 +2730,7 @@
           <a:bodyPr wrap="square" lIns="0" tIns="0" rIns="0" bIns="0" rtlCol="0" anchor="ctr"/>
           <a:lstStyle/>
           <a:p>
-            <a:pPr indent="0" marL="0">
+            <a:pPr marL="0" indent="0">
               <a:lnSpc>
                 <a:spcPct val="110000"/>
               </a:lnSpc>
@@ -2999,7 +2772,7 @@
           <a:bodyPr wrap="square" lIns="0" tIns="0" rIns="0" bIns="0" rtlCol="0" anchor="ctr"/>
           <a:lstStyle/>
           <a:p>
-            <a:pPr indent="0" marL="0">
+            <a:pPr marL="0" indent="0">
               <a:buNone/>
             </a:pPr>
             <a:r>
@@ -3085,7 +2858,7 @@
           <a:bodyPr wrap="square" lIns="0" tIns="0" rIns="0" bIns="0" rtlCol="0" anchor="ctr"/>
           <a:lstStyle/>
           <a:p>
-            <a:pPr algn="ctr" indent="0" marL="0">
+            <a:pPr marL="0" indent="0" algn="ctr">
               <a:buNone/>
             </a:pPr>
             <a:r>
@@ -3124,7 +2897,7 @@
           <a:bodyPr wrap="square" lIns="0" tIns="0" rIns="0" bIns="0" rtlCol="0" anchor="ctr"/>
           <a:lstStyle/>
           <a:p>
-            <a:pPr indent="0" marL="0">
+            <a:pPr marL="0" indent="0">
               <a:buNone/>
             </a:pPr>
             <a:r>
@@ -3190,7 +2963,7 @@
           <a:bodyPr wrap="square" lIns="0" tIns="0" rIns="0" bIns="0" rtlCol="0" anchor="ctr"/>
           <a:lstStyle/>
           <a:p>
-            <a:pPr indent="0" marL="0">
+            <a:pPr marL="0" indent="0">
               <a:lnSpc>
                 <a:spcPct val="110000"/>
               </a:lnSpc>
@@ -3210,7 +2983,7 @@
             <a:endParaRPr lang="en-US" sz="1300" dirty="0"/>
           </a:p>
           <a:p>
-            <a:pPr indent="0" marL="0">
+            <a:pPr marL="0" indent="0">
               <a:lnSpc>
                 <a:spcPct val="110000"/>
               </a:lnSpc>
@@ -3230,7 +3003,7 @@
             <a:endParaRPr lang="en-US" sz="1300" dirty="0"/>
           </a:p>
           <a:p>
-            <a:pPr indent="0" marL="0">
+            <a:pPr marL="0" indent="0">
               <a:lnSpc>
                 <a:spcPct val="110000"/>
               </a:lnSpc>
@@ -3239,7 +3012,7 @@
             <a:endParaRPr lang="en-US" sz="1300" dirty="0"/>
           </a:p>
           <a:p>
-            <a:pPr indent="0" marL="0">
+            <a:pPr marL="0" indent="0">
               <a:lnSpc>
                 <a:spcPct val="110000"/>
               </a:lnSpc>
@@ -3259,7 +3032,7 @@
             <a:endParaRPr lang="en-US" sz="1300" dirty="0"/>
           </a:p>
           <a:p>
-            <a:pPr indent="0" marL="0">
+            <a:pPr marL="0" indent="0">
               <a:lnSpc>
                 <a:spcPct val="110000"/>
               </a:lnSpc>
@@ -3279,7 +3052,7 @@
             <a:endParaRPr lang="en-US" sz="1300" dirty="0"/>
           </a:p>
           <a:p>
-            <a:pPr indent="0" marL="0">
+            <a:pPr marL="0" indent="0">
               <a:lnSpc>
                 <a:spcPct val="110000"/>
               </a:lnSpc>
@@ -3299,7 +3072,7 @@
             <a:endParaRPr lang="en-US" sz="1300" dirty="0"/>
           </a:p>
           <a:p>
-            <a:pPr indent="0" marL="0">
+            <a:pPr marL="0" indent="0">
               <a:lnSpc>
                 <a:spcPct val="110000"/>
               </a:lnSpc>
@@ -3341,7 +3114,7 @@
           <a:bodyPr wrap="square" lIns="0" tIns="0" rIns="0" bIns="0" rtlCol="0" anchor="ctr"/>
           <a:lstStyle/>
           <a:p>
-            <a:pPr indent="0" marL="0">
+            <a:pPr marL="0" indent="0">
               <a:buNone/>
             </a:pPr>
             <a:r>
@@ -3407,7 +3180,7 @@
           <a:bodyPr wrap="square" lIns="0" tIns="0" rIns="0" bIns="0" rtlCol="0" anchor="ctr"/>
           <a:lstStyle/>
           <a:p>
-            <a:pPr indent="0" marL="0">
+            <a:pPr marL="0" indent="0">
               <a:lnSpc>
                 <a:spcPct val="110000"/>
               </a:lnSpc>
@@ -3427,7 +3200,7 @@
             <a:endParaRPr lang="en-US" sz="1400" dirty="0"/>
           </a:p>
           <a:p>
-            <a:pPr indent="0" marL="0">
+            <a:pPr marL="0" indent="0">
               <a:lnSpc>
                 <a:spcPct val="110000"/>
               </a:lnSpc>
@@ -3447,7 +3220,7 @@
             <a:endParaRPr lang="en-US" sz="1400" dirty="0"/>
           </a:p>
           <a:p>
-            <a:pPr indent="0" marL="0">
+            <a:pPr marL="0" indent="0">
               <a:lnSpc>
                 <a:spcPct val="110000"/>
               </a:lnSpc>
@@ -3467,7 +3240,7 @@
             <a:endParaRPr lang="en-US" sz="1400" dirty="0"/>
           </a:p>
           <a:p>
-            <a:pPr indent="0" marL="0">
+            <a:pPr marL="0" indent="0">
               <a:lnSpc>
                 <a:spcPct val="110000"/>
               </a:lnSpc>
@@ -3509,7 +3282,7 @@
           <a:bodyPr wrap="square" lIns="0" tIns="0" rIns="0" bIns="0" rtlCol="0" anchor="ctr"/>
           <a:lstStyle/>
           <a:p>
-            <a:pPr indent="0" marL="0">
+            <a:pPr marL="0" indent="0">
               <a:buNone/>
             </a:pPr>
             <a:r>
@@ -3595,7 +3368,7 @@
           <a:bodyPr wrap="square" lIns="0" tIns="0" rIns="0" bIns="0" rtlCol="0" anchor="ctr"/>
           <a:lstStyle/>
           <a:p>
-            <a:pPr algn="ctr" indent="0" marL="0">
+            <a:pPr marL="0" indent="0" algn="ctr">
               <a:buNone/>
             </a:pPr>
             <a:r>
@@ -3634,7 +3407,7 @@
           <a:bodyPr wrap="square" lIns="0" tIns="0" rIns="0" bIns="0" rtlCol="0" anchor="ctr"/>
           <a:lstStyle/>
           <a:p>
-            <a:pPr indent="0" marL="0">
+            <a:pPr marL="0" indent="0">
               <a:buNone/>
             </a:pPr>
             <a:r>
@@ -3700,7 +3473,7 @@
           <a:bodyPr wrap="square" lIns="0" tIns="0" rIns="0" bIns="0" rtlCol="0" anchor="ctr"/>
           <a:lstStyle/>
           <a:p>
-            <a:pPr indent="0" marL="0">
+            <a:pPr marL="0" indent="0">
               <a:lnSpc>
                 <a:spcPct val="110000"/>
               </a:lnSpc>
@@ -3720,7 +3493,7 @@
             <a:endParaRPr lang="en-US" sz="1200" dirty="0"/>
           </a:p>
           <a:p>
-            <a:pPr indent="0" marL="0">
+            <a:pPr marL="0" indent="0">
               <a:lnSpc>
                 <a:spcPct val="110000"/>
               </a:lnSpc>
@@ -3740,7 +3513,7 @@
             <a:endParaRPr lang="en-US" sz="1200" dirty="0"/>
           </a:p>
           <a:p>
-            <a:pPr indent="0" marL="0">
+            <a:pPr marL="0" indent="0">
               <a:lnSpc>
                 <a:spcPct val="110000"/>
               </a:lnSpc>
@@ -3749,7 +3522,7 @@
             <a:endParaRPr lang="en-US" sz="1200" dirty="0"/>
           </a:p>
           <a:p>
-            <a:pPr indent="0" marL="0">
+            <a:pPr marL="0" indent="0">
               <a:lnSpc>
                 <a:spcPct val="110000"/>
               </a:lnSpc>
@@ -3769,7 +3542,7 @@
             <a:endParaRPr lang="en-US" sz="1200" dirty="0"/>
           </a:p>
           <a:p>
-            <a:pPr indent="0" marL="0">
+            <a:pPr marL="0" indent="0">
               <a:lnSpc>
                 <a:spcPct val="110000"/>
               </a:lnSpc>
@@ -3789,7 +3562,7 @@
             <a:endParaRPr lang="en-US" sz="1200" dirty="0"/>
           </a:p>
           <a:p>
-            <a:pPr indent="0" marL="0">
+            <a:pPr marL="0" indent="0">
               <a:lnSpc>
                 <a:spcPct val="110000"/>
               </a:lnSpc>
@@ -3831,7 +3604,7 @@
           <a:bodyPr wrap="square" lIns="0" tIns="0" rIns="0" bIns="0" rtlCol="0" anchor="ctr"/>
           <a:lstStyle/>
           <a:p>
-            <a:pPr indent="0" marL="0">
+            <a:pPr marL="0" indent="0">
               <a:buNone/>
             </a:pPr>
             <a:r>
@@ -3897,7 +3670,7 @@
           <a:bodyPr wrap="square" lIns="0" tIns="0" rIns="0" bIns="0" rtlCol="0" anchor="ctr"/>
           <a:lstStyle/>
           <a:p>
-            <a:pPr indent="0" marL="0">
+            <a:pPr marL="0" indent="0">
               <a:lnSpc>
                 <a:spcPct val="110000"/>
               </a:lnSpc>
@@ -3917,7 +3690,7 @@
             <a:endParaRPr lang="en-US" sz="1400" dirty="0"/>
           </a:p>
           <a:p>
-            <a:pPr indent="0" marL="0">
+            <a:pPr marL="0" indent="0">
               <a:lnSpc>
                 <a:spcPct val="110000"/>
               </a:lnSpc>
@@ -3937,7 +3710,7 @@
             <a:endParaRPr lang="en-US" sz="1400" dirty="0"/>
           </a:p>
           <a:p>
-            <a:pPr indent="0" marL="0">
+            <a:pPr marL="0" indent="0">
               <a:lnSpc>
                 <a:spcPct val="110000"/>
               </a:lnSpc>
@@ -3979,7 +3752,7 @@
           <a:bodyPr wrap="square" lIns="0" tIns="0" rIns="0" bIns="0" rtlCol="0" anchor="ctr"/>
           <a:lstStyle/>
           <a:p>
-            <a:pPr indent="0" marL="0">
+            <a:pPr marL="0" indent="0">
               <a:buNone/>
             </a:pPr>
             <a:r>
@@ -4013,6 +3786,7 @@
         <a:solidFill>
           <a:srgbClr val="17132E"/>
         </a:solidFill>
+        <a:effectLst/>
       </p:bgPr>
     </p:bg>
     <p:spTree>
@@ -4072,7 +3846,7 @@
           <a:bodyPr wrap="square" lIns="0" tIns="0" rIns="0" bIns="0" rtlCol="0" anchor="ctr"/>
           <a:lstStyle/>
           <a:p>
-            <a:pPr algn="ctr" indent="0" marL="0">
+            <a:pPr marL="0" indent="0" algn="ctr">
               <a:buNone/>
             </a:pPr>
             <a:r>
@@ -4111,7 +3885,7 @@
           <a:bodyPr wrap="square" lIns="0" tIns="0" rIns="0" bIns="0" rtlCol="0" anchor="ctr"/>
           <a:lstStyle/>
           <a:p>
-            <a:pPr indent="0" marL="0">
+            <a:pPr marL="0" indent="0">
               <a:buNone/>
             </a:pPr>
             <a:r>
@@ -4177,7 +3951,7 @@
           <a:bodyPr wrap="square" lIns="0" tIns="0" rIns="0" bIns="0" rtlCol="0" anchor="ctr"/>
           <a:lstStyle/>
           <a:p>
-            <a:pPr algn="ctr" indent="0" marL="0">
+            <a:pPr marL="0" indent="0" algn="ctr">
               <a:buNone/>
             </a:pPr>
             <a:r>
@@ -4263,7 +4037,7 @@
           <a:bodyPr wrap="square" lIns="0" tIns="0" rIns="0" bIns="0" rtlCol="0" anchor="ctr"/>
           <a:lstStyle/>
           <a:p>
-            <a:pPr algn="ctr" indent="0" marL="0">
+            <a:pPr marL="0" indent="0" algn="ctr">
               <a:buNone/>
             </a:pPr>
             <a:r>
@@ -4302,7 +4076,7 @@
           <a:bodyPr wrap="square" lIns="0" tIns="0" rIns="0" bIns="0" rtlCol="0" anchor="ctr"/>
           <a:lstStyle/>
           <a:p>
-            <a:pPr indent="0" marL="0">
+            <a:pPr marL="0" indent="0">
               <a:buNone/>
             </a:pPr>
             <a:r>
@@ -4341,7 +4115,7 @@
           <a:bodyPr wrap="square" lIns="0" tIns="0" rIns="0" bIns="0" rtlCol="0" anchor="ctr"/>
           <a:lstStyle/>
           <a:p>
-            <a:pPr indent="0" marL="0">
+            <a:pPr marL="0" indent="0">
               <a:buNone/>
             </a:pPr>
             <a:r>
@@ -4380,7 +4154,7 @@
           <a:bodyPr wrap="square" lIns="0" tIns="0" rIns="0" bIns="0" rtlCol="0" anchor="ctr"/>
           <a:lstStyle/>
           <a:p>
-            <a:pPr indent="0" marL="0">
+            <a:pPr marL="0" indent="0">
               <a:buNone/>
             </a:pPr>
             <a:r>
@@ -4446,7 +4220,7 @@
           <a:bodyPr wrap="square" lIns="0" tIns="0" rIns="0" bIns="0" rtlCol="0" anchor="ctr"/>
           <a:lstStyle/>
           <a:p>
-            <a:pPr indent="0" marL="0">
+            <a:pPr marL="0" indent="0">
               <a:lnSpc>
                 <a:spcPct val="110000"/>
               </a:lnSpc>
@@ -4466,7 +4240,7 @@
             <a:endParaRPr lang="en-US" sz="1400" dirty="0"/>
           </a:p>
           <a:p>
-            <a:pPr indent="0" marL="0">
+            <a:pPr marL="0" indent="0">
               <a:lnSpc>
                 <a:spcPct val="110000"/>
               </a:lnSpc>
@@ -4508,7 +4282,7 @@
           <a:bodyPr wrap="square" lIns="0" tIns="0" rIns="0" bIns="0" rtlCol="0" anchor="ctr"/>
           <a:lstStyle/>
           <a:p>
-            <a:pPr indent="0" marL="0">
+            <a:pPr marL="0" indent="0">
               <a:buNone/>
             </a:pPr>
             <a:r>
@@ -4574,7 +4348,7 @@
           <a:bodyPr wrap="square" lIns="0" tIns="0" rIns="0" bIns="0" rtlCol="0" anchor="ctr"/>
           <a:lstStyle/>
           <a:p>
-            <a:pPr indent="0" marL="0">
+            <a:pPr marL="0" indent="0">
               <a:lnSpc>
                 <a:spcPct val="110000"/>
               </a:lnSpc>
@@ -4594,7 +4368,7 @@
             <a:endParaRPr lang="en-US" sz="1400" dirty="0"/>
           </a:p>
           <a:p>
-            <a:pPr indent="0" marL="0">
+            <a:pPr marL="0" indent="0">
               <a:lnSpc>
                 <a:spcPct val="110000"/>
               </a:lnSpc>
@@ -4614,7 +4388,7 @@
             <a:endParaRPr lang="en-US" sz="1400" dirty="0"/>
           </a:p>
           <a:p>
-            <a:pPr indent="0" marL="0">
+            <a:pPr marL="0" indent="0">
               <a:lnSpc>
                 <a:spcPct val="110000"/>
               </a:lnSpc>
@@ -4703,7 +4477,7 @@
           <a:bodyPr wrap="square" lIns="0" tIns="0" rIns="0" bIns="0" rtlCol="0" anchor="ctr"/>
           <a:lstStyle/>
           <a:p>
-            <a:pPr algn="ctr" indent="0" marL="0">
+            <a:pPr marL="0" indent="0" algn="ctr">
               <a:buNone/>
             </a:pPr>
             <a:r>
@@ -4742,7 +4516,7 @@
           <a:bodyPr wrap="square" lIns="0" tIns="0" rIns="0" bIns="0" rtlCol="0" anchor="ctr"/>
           <a:lstStyle/>
           <a:p>
-            <a:pPr indent="0" marL="0">
+            <a:pPr marL="0" indent="0">
               <a:buNone/>
             </a:pPr>
             <a:r>
@@ -4781,7 +4555,7 @@
           <a:bodyPr wrap="square" lIns="0" tIns="0" rIns="0" bIns="0" rtlCol="0" anchor="ctr"/>
           <a:lstStyle/>
           <a:p>
-            <a:pPr indent="0" marL="0">
+            <a:pPr marL="0" indent="0">
               <a:buNone/>
             </a:pPr>
             <a:r>
@@ -4820,7 +4594,7 @@
           <a:bodyPr wrap="square" lIns="0" tIns="0" rIns="0" bIns="0" rtlCol="0" anchor="ctr"/>
           <a:lstStyle/>
           <a:p>
-            <a:pPr indent="0" marL="0">
+            <a:pPr marL="0" indent="0">
               <a:buNone/>
             </a:pPr>
             <a:r>
@@ -4886,7 +4660,7 @@
           <a:bodyPr wrap="square" lIns="0" tIns="0" rIns="0" bIns="0" rtlCol="0" anchor="ctr"/>
           <a:lstStyle/>
           <a:p>
-            <a:pPr indent="0" marL="0">
+            <a:pPr marL="0" indent="0">
               <a:lnSpc>
                 <a:spcPct val="110000"/>
               </a:lnSpc>
@@ -4928,7 +4702,7 @@
           <a:bodyPr wrap="square" lIns="0" tIns="0" rIns="0" bIns="0" rtlCol="0" anchor="ctr"/>
           <a:lstStyle/>
           <a:p>
-            <a:pPr indent="0" marL="0">
+            <a:pPr marL="0" indent="0">
               <a:buNone/>
             </a:pPr>
             <a:r>
@@ -4994,7 +4768,7 @@
           <a:bodyPr wrap="square" lIns="0" tIns="0" rIns="0" bIns="0" rtlCol="0" anchor="ctr"/>
           <a:lstStyle/>
           <a:p>
-            <a:pPr indent="0" marL="0">
+            <a:pPr marL="0" indent="0">
               <a:lnSpc>
                 <a:spcPct val="110000"/>
               </a:lnSpc>
@@ -5014,7 +4788,7 @@
             <a:endParaRPr lang="en-US" sz="1400" dirty="0"/>
           </a:p>
           <a:p>
-            <a:pPr indent="0" marL="0">
+            <a:pPr marL="0" indent="0">
               <a:lnSpc>
                 <a:spcPct val="110000"/>
               </a:lnSpc>
@@ -5034,7 +4808,7 @@
             <a:endParaRPr lang="en-US" sz="1400" dirty="0"/>
           </a:p>
           <a:p>
-            <a:pPr indent="0" marL="0">
+            <a:pPr marL="0" indent="0">
               <a:lnSpc>
                 <a:spcPct val="110000"/>
               </a:lnSpc>
@@ -5123,7 +4897,7 @@
           <a:bodyPr wrap="square" lIns="0" tIns="0" rIns="0" bIns="0" rtlCol="0" anchor="ctr"/>
           <a:lstStyle/>
           <a:p>
-            <a:pPr algn="ctr" indent="0" marL="0">
+            <a:pPr marL="0" indent="0" algn="ctr">
               <a:buNone/>
             </a:pPr>
             <a:r>
@@ -5162,7 +4936,7 @@
           <a:bodyPr wrap="square" lIns="0" tIns="0" rIns="0" bIns="0" rtlCol="0" anchor="ctr"/>
           <a:lstStyle/>
           <a:p>
-            <a:pPr indent="0" marL="0">
+            <a:pPr marL="0" indent="0">
               <a:buNone/>
             </a:pPr>
             <a:r>
@@ -5201,7 +4975,7 @@
           <a:bodyPr wrap="square" lIns="0" tIns="0" rIns="0" bIns="0" rtlCol="0" anchor="ctr"/>
           <a:lstStyle/>
           <a:p>
-            <a:pPr indent="0" marL="0">
+            <a:pPr marL="0" indent="0">
               <a:buNone/>
             </a:pPr>
             <a:r>
@@ -5240,7 +5014,7 @@
           <a:bodyPr wrap="square" lIns="0" tIns="0" rIns="0" bIns="0" rtlCol="0" anchor="ctr"/>
           <a:lstStyle/>
           <a:p>
-            <a:pPr indent="0" marL="0">
+            <a:pPr marL="0" indent="0">
               <a:buNone/>
             </a:pPr>
             <a:r>
@@ -5306,7 +5080,7 @@
           <a:bodyPr wrap="square" lIns="0" tIns="0" rIns="0" bIns="0" rtlCol="0" anchor="ctr"/>
           <a:lstStyle/>
           <a:p>
-            <a:pPr indent="0" marL="0">
+            <a:pPr marL="0" indent="0">
               <a:lnSpc>
                 <a:spcPct val="110000"/>
               </a:lnSpc>
@@ -5326,7 +5100,7 @@
             <a:endParaRPr lang="en-US" sz="1400" dirty="0"/>
           </a:p>
           <a:p>
-            <a:pPr indent="0" marL="0">
+            <a:pPr marL="0" indent="0">
               <a:lnSpc>
                 <a:spcPct val="110000"/>
               </a:lnSpc>
@@ -5363,6 +5137,7 @@
         <a:solidFill>
           <a:srgbClr val="17132E"/>
         </a:solidFill>
+        <a:effectLst/>
       </p:bgPr>
     </p:bg>
     <p:spTree>
@@ -5422,7 +5197,7 @@
           <a:bodyPr wrap="square" lIns="0" tIns="0" rIns="0" bIns="0" rtlCol="0" anchor="ctr"/>
           <a:lstStyle/>
           <a:p>
-            <a:pPr algn="ctr" indent="0" marL="0">
+            <a:pPr marL="0" indent="0" algn="ctr">
               <a:buNone/>
             </a:pPr>
             <a:r>
@@ -5461,7 +5236,7 @@
           <a:bodyPr wrap="square" lIns="0" tIns="0" rIns="0" bIns="0" rtlCol="0" anchor="ctr"/>
           <a:lstStyle/>
           <a:p>
-            <a:pPr indent="0" marL="0">
+            <a:pPr marL="0" indent="0">
               <a:buNone/>
             </a:pPr>
             <a:r>
@@ -5527,7 +5302,7 @@
           <a:bodyPr wrap="square" lIns="0" tIns="0" rIns="0" bIns="0" rtlCol="0" anchor="ctr"/>
           <a:lstStyle/>
           <a:p>
-            <a:pPr algn="ctr" indent="0" marL="0">
+            <a:pPr marL="0" indent="0" algn="ctr">
               <a:buNone/>
             </a:pPr>
             <a:r>
@@ -5613,7 +5388,7 @@
           <a:bodyPr wrap="square" lIns="0" tIns="0" rIns="0" bIns="0" rtlCol="0" anchor="ctr"/>
           <a:lstStyle/>
           <a:p>
-            <a:pPr algn="ctr" indent="0" marL="0">
+            <a:pPr marL="0" indent="0" algn="ctr">
               <a:buNone/>
             </a:pPr>
             <a:r>
@@ -5652,7 +5427,7 @@
           <a:bodyPr wrap="square" lIns="0" tIns="0" rIns="0" bIns="0" rtlCol="0" anchor="ctr"/>
           <a:lstStyle/>
           <a:p>
-            <a:pPr indent="0" marL="0">
+            <a:pPr marL="0" indent="0">
               <a:buNone/>
             </a:pPr>
             <a:r>
@@ -5718,7 +5493,7 @@
           <a:bodyPr wrap="square" lIns="0" tIns="0" rIns="0" bIns="0" rtlCol="0" anchor="ctr"/>
           <a:lstStyle/>
           <a:p>
-            <a:pPr indent="0" marL="0">
+            <a:pPr marL="0" indent="0">
               <a:lnSpc>
                 <a:spcPct val="110000"/>
               </a:lnSpc>
@@ -5738,7 +5513,7 @@
             <a:endParaRPr lang="en-US" sz="1300" dirty="0"/>
           </a:p>
           <a:p>
-            <a:pPr indent="0" marL="0">
+            <a:pPr marL="0" indent="0">
               <a:lnSpc>
                 <a:spcPct val="110000"/>
               </a:lnSpc>
@@ -5758,7 +5533,7 @@
             <a:endParaRPr lang="en-US" sz="1300" dirty="0"/>
           </a:p>
           <a:p>
-            <a:pPr indent="0" marL="0">
+            <a:pPr marL="0" indent="0">
               <a:lnSpc>
                 <a:spcPct val="110000"/>
               </a:lnSpc>
@@ -5767,7 +5542,7 @@
             <a:endParaRPr lang="en-US" sz="1300" dirty="0"/>
           </a:p>
           <a:p>
-            <a:pPr indent="0" marL="0">
+            <a:pPr marL="0" indent="0">
               <a:lnSpc>
                 <a:spcPct val="110000"/>
               </a:lnSpc>
@@ -5787,7 +5562,7 @@
             <a:endParaRPr lang="en-US" sz="1300" dirty="0"/>
           </a:p>
           <a:p>
-            <a:pPr indent="0" marL="0">
+            <a:pPr marL="0" indent="0">
               <a:lnSpc>
                 <a:spcPct val="110000"/>
               </a:lnSpc>
@@ -5807,7 +5582,7 @@
             <a:endParaRPr lang="en-US" sz="1300" dirty="0"/>
           </a:p>
           <a:p>
-            <a:pPr indent="0" marL="0">
+            <a:pPr marL="0" indent="0">
               <a:lnSpc>
                 <a:spcPct val="110000"/>
               </a:lnSpc>
@@ -5849,7 +5624,7 @@
           <a:bodyPr wrap="square" lIns="0" tIns="0" rIns="0" bIns="0" rtlCol="0" anchor="ctr"/>
           <a:lstStyle/>
           <a:p>
-            <a:pPr indent="0" marL="0">
+            <a:pPr marL="0" indent="0">
               <a:buNone/>
             </a:pPr>
             <a:r>
@@ -5915,7 +5690,7 @@
           <a:bodyPr wrap="square" lIns="0" tIns="0" rIns="0" bIns="0" rtlCol="0" anchor="ctr"/>
           <a:lstStyle/>
           <a:p>
-            <a:pPr indent="0" marL="0">
+            <a:pPr marL="0" indent="0">
               <a:lnSpc>
                 <a:spcPct val="110000"/>
               </a:lnSpc>
@@ -5935,7 +5710,7 @@
             <a:endParaRPr lang="en-US" sz="1400" dirty="0"/>
           </a:p>
           <a:p>
-            <a:pPr indent="0" marL="0">
+            <a:pPr marL="0" indent="0">
               <a:lnSpc>
                 <a:spcPct val="110000"/>
               </a:lnSpc>
@@ -5955,7 +5730,7 @@
             <a:endParaRPr lang="en-US" sz="1400" dirty="0"/>
           </a:p>
           <a:p>
-            <a:pPr indent="0" marL="0">
+            <a:pPr marL="0" indent="0">
               <a:lnSpc>
                 <a:spcPct val="110000"/>
               </a:lnSpc>
@@ -5997,7 +5772,7 @@
           <a:bodyPr wrap="square" lIns="0" tIns="0" rIns="0" bIns="0" rtlCol="0" anchor="ctr"/>
           <a:lstStyle/>
           <a:p>
-            <a:pPr indent="0" marL="0">
+            <a:pPr marL="0" indent="0">
               <a:buNone/>
             </a:pPr>
             <a:r>
@@ -6083,7 +5858,7 @@
           <a:bodyPr wrap="square" lIns="0" tIns="0" rIns="0" bIns="0" rtlCol="0" anchor="ctr"/>
           <a:lstStyle/>
           <a:p>
-            <a:pPr algn="ctr" indent="0" marL="0">
+            <a:pPr marL="0" indent="0" algn="ctr">
               <a:buNone/>
             </a:pPr>
             <a:r>
@@ -6122,7 +5897,7 @@
           <a:bodyPr wrap="square" lIns="0" tIns="0" rIns="0" bIns="0" rtlCol="0" anchor="ctr"/>
           <a:lstStyle/>
           <a:p>
-            <a:pPr indent="0" marL="0">
+            <a:pPr marL="0" indent="0">
               <a:buNone/>
             </a:pPr>
             <a:r>
@@ -6188,7 +5963,7 @@
           <a:bodyPr wrap="square" lIns="0" tIns="0" rIns="0" bIns="0" rtlCol="0" anchor="ctr"/>
           <a:lstStyle/>
           <a:p>
-            <a:pPr indent="0" marL="0">
+            <a:pPr marL="0" indent="0">
               <a:lnSpc>
                 <a:spcPct val="110000"/>
               </a:lnSpc>
@@ -6208,7 +5983,7 @@
             <a:endParaRPr lang="en-US" sz="1200" dirty="0"/>
           </a:p>
           <a:p>
-            <a:pPr indent="0" marL="0">
+            <a:pPr marL="0" indent="0">
               <a:lnSpc>
                 <a:spcPct val="110000"/>
               </a:lnSpc>
@@ -6217,7 +5992,7 @@
             <a:endParaRPr lang="en-US" sz="1200" dirty="0"/>
           </a:p>
           <a:p>
-            <a:pPr indent="0" marL="0">
+            <a:pPr marL="0" indent="0">
               <a:lnSpc>
                 <a:spcPct val="110000"/>
               </a:lnSpc>
@@ -6237,7 +6012,7 @@
             <a:endParaRPr lang="en-US" sz="1200" dirty="0"/>
           </a:p>
           <a:p>
-            <a:pPr indent="0" marL="0">
+            <a:pPr marL="0" indent="0">
               <a:lnSpc>
                 <a:spcPct val="110000"/>
               </a:lnSpc>
@@ -6257,7 +6032,7 @@
             <a:endParaRPr lang="en-US" sz="1200" dirty="0"/>
           </a:p>
           <a:p>
-            <a:pPr indent="0" marL="0">
+            <a:pPr marL="0" indent="0">
               <a:lnSpc>
                 <a:spcPct val="110000"/>
               </a:lnSpc>
@@ -6299,7 +6074,7 @@
           <a:bodyPr wrap="square" lIns="0" tIns="0" rIns="0" bIns="0" rtlCol="0" anchor="ctr"/>
           <a:lstStyle/>
           <a:p>
-            <a:pPr indent="0" marL="0">
+            <a:pPr marL="0" indent="0">
               <a:buNone/>
             </a:pPr>
             <a:r>
@@ -6365,7 +6140,7 @@
           <a:bodyPr wrap="square" lIns="0" tIns="0" rIns="0" bIns="0" rtlCol="0" anchor="ctr"/>
           <a:lstStyle/>
           <a:p>
-            <a:pPr indent="0" marL="0">
+            <a:pPr marL="0" indent="0">
               <a:lnSpc>
                 <a:spcPct val="110000"/>
               </a:lnSpc>
@@ -6385,7 +6160,7 @@
             <a:endParaRPr lang="en-US" sz="1400" dirty="0"/>
           </a:p>
           <a:p>
-            <a:pPr indent="0" marL="0">
+            <a:pPr marL="0" indent="0">
               <a:lnSpc>
                 <a:spcPct val="110000"/>
               </a:lnSpc>
@@ -6405,7 +6180,7 @@
             <a:endParaRPr lang="en-US" sz="1400" dirty="0"/>
           </a:p>
           <a:p>
-            <a:pPr indent="0" marL="0">
+            <a:pPr marL="0" indent="0">
               <a:lnSpc>
                 <a:spcPct val="110000"/>
               </a:lnSpc>
@@ -6447,7 +6222,7 @@
           <a:bodyPr wrap="square" lIns="0" tIns="0" rIns="0" bIns="0" rtlCol="0" anchor="ctr"/>
           <a:lstStyle/>
           <a:p>
-            <a:pPr indent="0" marL="0">
+            <a:pPr marL="0" indent="0">
               <a:buNone/>
             </a:pPr>
             <a:r>
@@ -6533,7 +6308,7 @@
           <a:bodyPr wrap="square" lIns="0" tIns="0" rIns="0" bIns="0" rtlCol="0" anchor="ctr"/>
           <a:lstStyle/>
           <a:p>
-            <a:pPr algn="ctr" indent="0" marL="0">
+            <a:pPr marL="0" indent="0" algn="ctr">
               <a:buNone/>
             </a:pPr>
             <a:r>
@@ -6572,7 +6347,7 @@
           <a:bodyPr wrap="square" lIns="0" tIns="0" rIns="0" bIns="0" rtlCol="0" anchor="ctr"/>
           <a:lstStyle/>
           <a:p>
-            <a:pPr indent="0" marL="0">
+            <a:pPr marL="0" indent="0">
               <a:buNone/>
             </a:pPr>
             <a:r>
@@ -6638,7 +6413,7 @@
           <a:bodyPr wrap="square" lIns="0" tIns="0" rIns="0" bIns="0" rtlCol="0" anchor="ctr"/>
           <a:lstStyle/>
           <a:p>
-            <a:pPr indent="0" marL="0">
+            <a:pPr marL="0" indent="0">
               <a:lnSpc>
                 <a:spcPct val="110000"/>
               </a:lnSpc>
@@ -6658,7 +6433,7 @@
             <a:endParaRPr lang="en-US" sz="1200" dirty="0"/>
           </a:p>
           <a:p>
-            <a:pPr indent="0" marL="0">
+            <a:pPr marL="0" indent="0">
               <a:lnSpc>
                 <a:spcPct val="110000"/>
               </a:lnSpc>
@@ -6678,7 +6453,7 @@
             <a:endParaRPr lang="en-US" sz="1200" dirty="0"/>
           </a:p>
           <a:p>
-            <a:pPr indent="0" marL="0">
+            <a:pPr marL="0" indent="0">
               <a:lnSpc>
                 <a:spcPct val="110000"/>
               </a:lnSpc>
@@ -6698,7 +6473,7 @@
             <a:endParaRPr lang="en-US" sz="1200" dirty="0"/>
           </a:p>
           <a:p>
-            <a:pPr indent="0" marL="0">
+            <a:pPr marL="0" indent="0">
               <a:lnSpc>
                 <a:spcPct val="110000"/>
               </a:lnSpc>
@@ -6707,7 +6482,7 @@
             <a:endParaRPr lang="en-US" sz="1200" dirty="0"/>
           </a:p>
           <a:p>
-            <a:pPr indent="0" marL="0">
+            <a:pPr marL="0" indent="0">
               <a:lnSpc>
                 <a:spcPct val="110000"/>
               </a:lnSpc>
@@ -6727,7 +6502,7 @@
             <a:endParaRPr lang="en-US" sz="1200" dirty="0"/>
           </a:p>
           <a:p>
-            <a:pPr indent="0" marL="0">
+            <a:pPr marL="0" indent="0">
               <a:lnSpc>
                 <a:spcPct val="110000"/>
               </a:lnSpc>
@@ -6747,7 +6522,7 @@
             <a:endParaRPr lang="en-US" sz="1200" dirty="0"/>
           </a:p>
           <a:p>
-            <a:pPr indent="0" marL="0">
+            <a:pPr marL="0" indent="0">
               <a:lnSpc>
                 <a:spcPct val="110000"/>
               </a:lnSpc>
@@ -6789,7 +6564,7 @@
           <a:bodyPr wrap="square" lIns="0" tIns="0" rIns="0" bIns="0" rtlCol="0" anchor="ctr"/>
           <a:lstStyle/>
           <a:p>
-            <a:pPr indent="0" marL="0">
+            <a:pPr marL="0" indent="0">
               <a:buNone/>
             </a:pPr>
             <a:r>
@@ -6855,7 +6630,7 @@
           <a:bodyPr wrap="square" lIns="0" tIns="0" rIns="0" bIns="0" rtlCol="0" anchor="ctr"/>
           <a:lstStyle/>
           <a:p>
-            <a:pPr indent="0" marL="0">
+            <a:pPr marL="0" indent="0">
               <a:lnSpc>
                 <a:spcPct val="110000"/>
               </a:lnSpc>
@@ -6875,7 +6650,7 @@
             <a:endParaRPr lang="en-US" sz="1400" dirty="0"/>
           </a:p>
           <a:p>
-            <a:pPr indent="0" marL="0">
+            <a:pPr marL="0" indent="0">
               <a:lnSpc>
                 <a:spcPct val="110000"/>
               </a:lnSpc>
@@ -6917,7 +6692,7 @@
           <a:bodyPr wrap="square" lIns="0" tIns="0" rIns="0" bIns="0" rtlCol="0" anchor="ctr"/>
           <a:lstStyle/>
           <a:p>
-            <a:pPr indent="0" marL="0">
+            <a:pPr marL="0" indent="0">
               <a:buNone/>
             </a:pPr>
             <a:r>
@@ -6951,6 +6726,7 @@
         <a:solidFill>
           <a:srgbClr val="17132E"/>
         </a:solidFill>
+        <a:effectLst/>
       </p:bgPr>
     </p:bg>
     <p:spTree>
@@ -7010,7 +6786,7 @@
           <a:bodyPr wrap="square" lIns="0" tIns="0" rIns="0" bIns="0" rtlCol="0" anchor="ctr"/>
           <a:lstStyle/>
           <a:p>
-            <a:pPr algn="ctr" indent="0" marL="0">
+            <a:pPr marL="0" indent="0" algn="ctr">
               <a:buNone/>
             </a:pPr>
             <a:r>
@@ -7049,7 +6825,7 @@
           <a:bodyPr wrap="square" lIns="0" tIns="0" rIns="0" bIns="0" rtlCol="0" anchor="ctr"/>
           <a:lstStyle/>
           <a:p>
-            <a:pPr indent="0" marL="0">
+            <a:pPr marL="0" indent="0">
               <a:buNone/>
             </a:pPr>
             <a:r>
@@ -7115,7 +6891,7 @@
           <a:bodyPr wrap="square" lIns="0" tIns="0" rIns="0" bIns="0" rtlCol="0" anchor="ctr"/>
           <a:lstStyle/>
           <a:p>
-            <a:pPr algn="ctr" indent="0" marL="0">
+            <a:pPr marL="0" indent="0" algn="ctr">
               <a:buNone/>
             </a:pPr>
             <a:r>
@@ -7201,7 +6977,7 @@
           <a:bodyPr wrap="square" lIns="0" tIns="0" rIns="0" bIns="0" rtlCol="0" anchor="ctr"/>
           <a:lstStyle/>
           <a:p>
-            <a:pPr algn="ctr" indent="0" marL="0">
+            <a:pPr marL="0" indent="0" algn="ctr">
               <a:buNone/>
             </a:pPr>
             <a:r>
@@ -7240,7 +7016,7 @@
           <a:bodyPr wrap="square" lIns="0" tIns="0" rIns="0" bIns="0" rtlCol="0" anchor="ctr"/>
           <a:lstStyle/>
           <a:p>
-            <a:pPr indent="0" marL="0">
+            <a:pPr marL="0" indent="0">
               <a:buNone/>
             </a:pPr>
             <a:r>
@@ -7279,7 +7055,7 @@
           <a:bodyPr wrap="square" lIns="0" tIns="0" rIns="0" bIns="0" rtlCol="0" anchor="ctr"/>
           <a:lstStyle/>
           <a:p>
-            <a:pPr indent="0" marL="0">
+            <a:pPr marL="0" indent="0">
               <a:buNone/>
             </a:pPr>
             <a:r>
@@ -7318,7 +7094,7 @@
           <a:bodyPr wrap="square" lIns="0" tIns="0" rIns="0" bIns="0" rtlCol="0" anchor="ctr"/>
           <a:lstStyle/>
           <a:p>
-            <a:pPr indent="0" marL="0">
+            <a:pPr marL="0" indent="0">
               <a:buNone/>
             </a:pPr>
             <a:r>
@@ -7384,7 +7160,7 @@
           <a:bodyPr wrap="square" lIns="0" tIns="0" rIns="0" bIns="0" rtlCol="0" anchor="ctr"/>
           <a:lstStyle/>
           <a:p>
-            <a:pPr indent="0" marL="0">
+            <a:pPr marL="0" indent="0">
               <a:lnSpc>
                 <a:spcPct val="110000"/>
               </a:lnSpc>
@@ -7404,7 +7180,7 @@
             <a:endParaRPr lang="en-US" sz="1400" dirty="0"/>
           </a:p>
           <a:p>
-            <a:pPr indent="0" marL="0">
+            <a:pPr marL="0" indent="0">
               <a:lnSpc>
                 <a:spcPct val="110000"/>
               </a:lnSpc>
@@ -7446,7 +7222,7 @@
           <a:bodyPr wrap="square" lIns="0" tIns="0" rIns="0" bIns="0" rtlCol="0" anchor="ctr"/>
           <a:lstStyle/>
           <a:p>
-            <a:pPr indent="0" marL="0">
+            <a:pPr marL="0" indent="0">
               <a:buNone/>
             </a:pPr>
             <a:r>
@@ -7512,7 +7288,7 @@
           <a:bodyPr wrap="square" lIns="0" tIns="0" rIns="0" bIns="0" rtlCol="0" anchor="ctr"/>
           <a:lstStyle/>
           <a:p>
-            <a:pPr indent="0" marL="0">
+            <a:pPr marL="0" indent="0">
               <a:lnSpc>
                 <a:spcPct val="110000"/>
               </a:lnSpc>
@@ -7532,7 +7308,7 @@
             <a:endParaRPr lang="en-US" sz="1400" dirty="0"/>
           </a:p>
           <a:p>
-            <a:pPr indent="0" marL="0">
+            <a:pPr marL="0" indent="0">
               <a:lnSpc>
                 <a:spcPct val="110000"/>
               </a:lnSpc>
@@ -7621,7 +7397,7 @@
           <a:bodyPr wrap="square" lIns="0" tIns="0" rIns="0" bIns="0" rtlCol="0" anchor="ctr"/>
           <a:lstStyle/>
           <a:p>
-            <a:pPr algn="ctr" indent="0" marL="0">
+            <a:pPr marL="0" indent="0" algn="ctr">
               <a:buNone/>
             </a:pPr>
             <a:r>
@@ -7660,7 +7436,7 @@
           <a:bodyPr wrap="square" lIns="0" tIns="0" rIns="0" bIns="0" rtlCol="0" anchor="ctr"/>
           <a:lstStyle/>
           <a:p>
-            <a:pPr indent="0" marL="0">
+            <a:pPr marL="0" indent="0">
               <a:buNone/>
             </a:pPr>
             <a:r>
@@ -7699,7 +7475,7 @@
           <a:bodyPr wrap="square" lIns="0" tIns="0" rIns="0" bIns="0" rtlCol="0" anchor="ctr"/>
           <a:lstStyle/>
           <a:p>
-            <a:pPr indent="0" marL="0">
+            <a:pPr marL="0" indent="0">
               <a:buNone/>
             </a:pPr>
             <a:r>
@@ -7738,7 +7514,7 @@
           <a:bodyPr wrap="square" lIns="0" tIns="0" rIns="0" bIns="0" rtlCol="0" anchor="ctr"/>
           <a:lstStyle/>
           <a:p>
-            <a:pPr indent="0" marL="0">
+            <a:pPr marL="0" indent="0">
               <a:buNone/>
             </a:pPr>
             <a:r>
@@ -7804,7 +7580,7 @@
           <a:bodyPr wrap="square" lIns="0" tIns="0" rIns="0" bIns="0" rtlCol="0" anchor="ctr"/>
           <a:lstStyle/>
           <a:p>
-            <a:pPr indent="0" marL="0">
+            <a:pPr marL="0" indent="0">
               <a:lnSpc>
                 <a:spcPct val="110000"/>
               </a:lnSpc>
@@ -7824,7 +7600,7 @@
             <a:endParaRPr lang="en-US" sz="1400" dirty="0"/>
           </a:p>
           <a:p>
-            <a:pPr indent="0" marL="0">
+            <a:pPr marL="0" indent="0">
               <a:lnSpc>
                 <a:spcPct val="110000"/>
               </a:lnSpc>
@@ -7866,7 +7642,7 @@
           <a:bodyPr wrap="square" lIns="0" tIns="0" rIns="0" bIns="0" rtlCol="0" anchor="ctr"/>
           <a:lstStyle/>
           <a:p>
-            <a:pPr indent="0" marL="0">
+            <a:pPr marL="0" indent="0">
               <a:buNone/>
             </a:pPr>
             <a:r>
@@ -7932,7 +7708,7 @@
           <a:bodyPr wrap="square" lIns="0" tIns="0" rIns="0" bIns="0" rtlCol="0" anchor="ctr"/>
           <a:lstStyle/>
           <a:p>
-            <a:pPr indent="0" marL="0">
+            <a:pPr marL="0" indent="0">
               <a:lnSpc>
                 <a:spcPct val="110000"/>
               </a:lnSpc>
@@ -7952,7 +7728,7 @@
             <a:endParaRPr lang="en-US" sz="1400" dirty="0"/>
           </a:p>
           <a:p>
-            <a:pPr indent="0" marL="0">
+            <a:pPr marL="0" indent="0">
               <a:lnSpc>
                 <a:spcPct val="110000"/>
               </a:lnSpc>
@@ -8041,7 +7817,7 @@
           <a:bodyPr wrap="square" lIns="0" tIns="0" rIns="0" bIns="0" rtlCol="0" anchor="ctr"/>
           <a:lstStyle/>
           <a:p>
-            <a:pPr algn="ctr" indent="0" marL="0">
+            <a:pPr marL="0" indent="0" algn="ctr">
               <a:buNone/>
             </a:pPr>
             <a:r>
@@ -8080,7 +7856,7 @@
           <a:bodyPr wrap="square" lIns="0" tIns="0" rIns="0" bIns="0" rtlCol="0" anchor="ctr"/>
           <a:lstStyle/>
           <a:p>
-            <a:pPr indent="0" marL="0">
+            <a:pPr marL="0" indent="0">
               <a:buNone/>
             </a:pPr>
             <a:r>
@@ -8119,7 +7895,7 @@
           <a:bodyPr wrap="square" lIns="0" tIns="0" rIns="0" bIns="0" rtlCol="0" anchor="ctr"/>
           <a:lstStyle/>
           <a:p>
-            <a:pPr indent="0" marL="0">
+            <a:pPr marL="0" indent="0">
               <a:buNone/>
             </a:pPr>
             <a:r>
@@ -8158,7 +7934,7 @@
           <a:bodyPr wrap="square" lIns="0" tIns="0" rIns="0" bIns="0" rtlCol="0" anchor="ctr"/>
           <a:lstStyle/>
           <a:p>
-            <a:pPr indent="0" marL="0">
+            <a:pPr marL="0" indent="0">
               <a:buNone/>
             </a:pPr>
             <a:r>
@@ -8224,7 +8000,7 @@
           <a:bodyPr wrap="square" lIns="0" tIns="0" rIns="0" bIns="0" rtlCol="0" anchor="ctr"/>
           <a:lstStyle/>
           <a:p>
-            <a:pPr indent="0" marL="0">
+            <a:pPr marL="0" indent="0">
               <a:lnSpc>
                 <a:spcPct val="110000"/>
               </a:lnSpc>
@@ -8244,7 +8020,7 @@
             <a:endParaRPr lang="en-US" sz="1400" dirty="0"/>
           </a:p>
           <a:p>
-            <a:pPr indent="0" marL="0">
+            <a:pPr marL="0" indent="0">
               <a:lnSpc>
                 <a:spcPct val="110000"/>
               </a:lnSpc>
@@ -8286,7 +8062,7 @@
           <a:bodyPr wrap="square" lIns="0" tIns="0" rIns="0" bIns="0" rtlCol="0" anchor="ctr"/>
           <a:lstStyle/>
           <a:p>
-            <a:pPr indent="0" marL="0">
+            <a:pPr marL="0" indent="0">
               <a:buNone/>
             </a:pPr>
             <a:r>
@@ -8352,7 +8128,7 @@
           <a:bodyPr wrap="square" lIns="0" tIns="0" rIns="0" bIns="0" rtlCol="0" anchor="ctr"/>
           <a:lstStyle/>
           <a:p>
-            <a:pPr indent="0" marL="0">
+            <a:pPr marL="0" indent="0">
               <a:lnSpc>
                 <a:spcPct val="110000"/>
               </a:lnSpc>
@@ -8372,7 +8148,7 @@
             <a:endParaRPr lang="en-US" sz="1400" dirty="0"/>
           </a:p>
           <a:p>
-            <a:pPr indent="0" marL="0">
+            <a:pPr marL="0" indent="0">
               <a:lnSpc>
                 <a:spcPct val="110000"/>
               </a:lnSpc>
@@ -8409,6 +8185,7 @@
         <a:solidFill>
           <a:srgbClr val="17132E"/>
         </a:solidFill>
+        <a:effectLst/>
       </p:bgPr>
     </p:bg>
     <p:spTree>
@@ -8468,7 +8245,7 @@
           <a:bodyPr wrap="square" lIns="0" tIns="0" rIns="0" bIns="0" rtlCol="0" anchor="ctr"/>
           <a:lstStyle/>
           <a:p>
-            <a:pPr algn="ctr" indent="0" marL="0">
+            <a:pPr marL="0" indent="0" algn="ctr">
               <a:buNone/>
             </a:pPr>
             <a:r>
@@ -8507,7 +8284,7 @@
           <a:bodyPr wrap="square" lIns="0" tIns="0" rIns="0" bIns="0" rtlCol="0" anchor="ctr"/>
           <a:lstStyle/>
           <a:p>
-            <a:pPr indent="0" marL="0">
+            <a:pPr marL="0" indent="0">
               <a:buNone/>
             </a:pPr>
             <a:r>
@@ -8573,7 +8350,7 @@
           <a:bodyPr wrap="square" lIns="0" tIns="0" rIns="0" bIns="0" rtlCol="0" anchor="ctr"/>
           <a:lstStyle/>
           <a:p>
-            <a:pPr algn="ctr" indent="0" marL="0">
+            <a:pPr marL="0" indent="0" algn="ctr">
               <a:buNone/>
             </a:pPr>
             <a:r>
@@ -8659,7 +8436,7 @@
           <a:bodyPr wrap="square" lIns="0" tIns="0" rIns="0" bIns="0" rtlCol="0" anchor="ctr"/>
           <a:lstStyle/>
           <a:p>
-            <a:pPr algn="ctr" indent="0" marL="0">
+            <a:pPr marL="0" indent="0" algn="ctr">
               <a:buNone/>
             </a:pPr>
             <a:r>
@@ -8698,7 +8475,7 @@
           <a:bodyPr wrap="square" lIns="0" tIns="0" rIns="0" bIns="0" rtlCol="0" anchor="ctr"/>
           <a:lstStyle/>
           <a:p>
-            <a:pPr indent="0" marL="0">
+            <a:pPr marL="0" indent="0">
               <a:buNone/>
             </a:pPr>
             <a:r>
@@ -8764,7 +8541,7 @@
           <a:bodyPr wrap="square" lIns="0" tIns="0" rIns="0" bIns="0" rtlCol="0" anchor="ctr"/>
           <a:lstStyle/>
           <a:p>
-            <a:pPr indent="0" marL="0">
+            <a:pPr marL="0" indent="0">
               <a:lnSpc>
                 <a:spcPct val="110000"/>
               </a:lnSpc>
@@ -8784,7 +8561,7 @@
             <a:endParaRPr lang="en-US" sz="1400" dirty="0"/>
           </a:p>
           <a:p>
-            <a:pPr indent="0" marL="0">
+            <a:pPr marL="0" indent="0">
               <a:lnSpc>
                 <a:spcPct val="110000"/>
               </a:lnSpc>
@@ -8804,7 +8581,7 @@
             <a:endParaRPr lang="en-US" sz="1400" dirty="0"/>
           </a:p>
           <a:p>
-            <a:pPr indent="0" marL="0">
+            <a:pPr marL="0" indent="0">
               <a:lnSpc>
                 <a:spcPct val="110000"/>
               </a:lnSpc>
@@ -8813,7 +8590,7 @@
             <a:endParaRPr lang="en-US" sz="1400" dirty="0"/>
           </a:p>
           <a:p>
-            <a:pPr indent="0" marL="0">
+            <a:pPr marL="0" indent="0">
               <a:lnSpc>
                 <a:spcPct val="110000"/>
               </a:lnSpc>
@@ -8833,7 +8610,7 @@
             <a:endParaRPr lang="en-US" sz="1400" dirty="0"/>
           </a:p>
           <a:p>
-            <a:pPr indent="0" marL="0">
+            <a:pPr marL="0" indent="0">
               <a:lnSpc>
                 <a:spcPct val="110000"/>
               </a:lnSpc>
@@ -8875,7 +8652,7 @@
           <a:bodyPr wrap="square" lIns="0" tIns="0" rIns="0" bIns="0" rtlCol="0" anchor="ctr"/>
           <a:lstStyle/>
           <a:p>
-            <a:pPr indent="0" marL="0">
+            <a:pPr marL="0" indent="0">
               <a:buNone/>
             </a:pPr>
             <a:r>
@@ -8941,7 +8718,7 @@
           <a:bodyPr wrap="square" lIns="0" tIns="0" rIns="0" bIns="0" rtlCol="0" anchor="ctr"/>
           <a:lstStyle/>
           <a:p>
-            <a:pPr indent="0" marL="0">
+            <a:pPr marL="0" indent="0">
               <a:lnSpc>
                 <a:spcPct val="110000"/>
               </a:lnSpc>
@@ -8961,7 +8738,7 @@
             <a:endParaRPr lang="en-US" sz="1400" dirty="0"/>
           </a:p>
           <a:p>
-            <a:pPr indent="0" marL="0">
+            <a:pPr marL="0" indent="0">
               <a:lnSpc>
                 <a:spcPct val="110000"/>
               </a:lnSpc>
@@ -9003,7 +8780,7 @@
           <a:bodyPr wrap="square" lIns="0" tIns="0" rIns="0" bIns="0" rtlCol="0" anchor="ctr"/>
           <a:lstStyle/>
           <a:p>
-            <a:pPr indent="0" marL="0">
+            <a:pPr marL="0" indent="0">
               <a:buNone/>
             </a:pPr>
             <a:r>
@@ -9089,7 +8866,7 @@
           <a:bodyPr wrap="square" lIns="0" tIns="0" rIns="0" bIns="0" rtlCol="0" anchor="ctr"/>
           <a:lstStyle/>
           <a:p>
-            <a:pPr algn="ctr" indent="0" marL="0">
+            <a:pPr marL="0" indent="0" algn="ctr">
               <a:buNone/>
             </a:pPr>
             <a:r>
@@ -9128,7 +8905,7 @@
           <a:bodyPr wrap="square" lIns="0" tIns="0" rIns="0" bIns="0" rtlCol="0" anchor="ctr"/>
           <a:lstStyle/>
           <a:p>
-            <a:pPr indent="0" marL="0">
+            <a:pPr marL="0" indent="0">
               <a:buNone/>
             </a:pPr>
             <a:r>
@@ -9194,7 +8971,7 @@
           <a:bodyPr wrap="square" lIns="0" tIns="0" rIns="0" bIns="0" rtlCol="0" anchor="ctr"/>
           <a:lstStyle/>
           <a:p>
-            <a:pPr indent="0" marL="0">
+            <a:pPr marL="0" indent="0">
               <a:lnSpc>
                 <a:spcPct val="110000"/>
               </a:lnSpc>
@@ -9214,7 +8991,7 @@
             <a:endParaRPr lang="en-US" sz="1400" dirty="0"/>
           </a:p>
           <a:p>
-            <a:pPr indent="0" marL="0">
+            <a:pPr marL="0" indent="0">
               <a:lnSpc>
                 <a:spcPct val="110000"/>
               </a:lnSpc>
@@ -9234,7 +9011,7 @@
             <a:endParaRPr lang="en-US" sz="1400" dirty="0"/>
           </a:p>
           <a:p>
-            <a:pPr indent="0" marL="0">
+            <a:pPr marL="0" indent="0">
               <a:lnSpc>
                 <a:spcPct val="110000"/>
               </a:lnSpc>
@@ -9243,7 +9020,7 @@
             <a:endParaRPr lang="en-US" sz="1400" dirty="0"/>
           </a:p>
           <a:p>
-            <a:pPr indent="0" marL="0">
+            <a:pPr marL="0" indent="0">
               <a:lnSpc>
                 <a:spcPct val="110000"/>
               </a:lnSpc>
@@ -9263,7 +9040,7 @@
             <a:endParaRPr lang="en-US" sz="1400" dirty="0"/>
           </a:p>
           <a:p>
-            <a:pPr indent="0" marL="0">
+            <a:pPr marL="0" indent="0">
               <a:lnSpc>
                 <a:spcPct val="110000"/>
               </a:lnSpc>
@@ -9305,7 +9082,7 @@
           <a:bodyPr wrap="square" lIns="0" tIns="0" rIns="0" bIns="0" rtlCol="0" anchor="ctr"/>
           <a:lstStyle/>
           <a:p>
-            <a:pPr indent="0" marL="0">
+            <a:pPr marL="0" indent="0">
               <a:buNone/>
             </a:pPr>
             <a:r>
@@ -9371,7 +9148,7 @@
           <a:bodyPr wrap="square" lIns="0" tIns="0" rIns="0" bIns="0" rtlCol="0" anchor="ctr"/>
           <a:lstStyle/>
           <a:p>
-            <a:pPr indent="0" marL="0">
+            <a:pPr marL="0" indent="0">
               <a:lnSpc>
                 <a:spcPct val="110000"/>
               </a:lnSpc>
@@ -9391,7 +9168,7 @@
             <a:endParaRPr lang="en-US" sz="1400" dirty="0"/>
           </a:p>
           <a:p>
-            <a:pPr indent="0" marL="0">
+            <a:pPr marL="0" indent="0">
               <a:lnSpc>
                 <a:spcPct val="110000"/>
               </a:lnSpc>
@@ -9433,7 +9210,7 @@
           <a:bodyPr wrap="square" lIns="0" tIns="0" rIns="0" bIns="0" rtlCol="0" anchor="ctr"/>
           <a:lstStyle/>
           <a:p>
-            <a:pPr indent="0" marL="0">
+            <a:pPr marL="0" indent="0">
               <a:buNone/>
             </a:pPr>
             <a:r>
@@ -9519,7 +9296,7 @@
           <a:bodyPr wrap="square" lIns="0" tIns="0" rIns="0" bIns="0" rtlCol="0" anchor="ctr"/>
           <a:lstStyle/>
           <a:p>
-            <a:pPr algn="ctr" indent="0" marL="0">
+            <a:pPr marL="0" indent="0" algn="ctr">
               <a:buNone/>
             </a:pPr>
             <a:r>
@@ -9558,7 +9335,7 @@
           <a:bodyPr wrap="square" lIns="0" tIns="0" rIns="0" bIns="0" rtlCol="0" anchor="ctr"/>
           <a:lstStyle/>
           <a:p>
-            <a:pPr indent="0" marL="0">
+            <a:pPr marL="0" indent="0">
               <a:buNone/>
             </a:pPr>
             <a:r>
@@ -9624,7 +9401,7 @@
           <a:bodyPr wrap="square" lIns="0" tIns="0" rIns="0" bIns="0" rtlCol="0" anchor="ctr"/>
           <a:lstStyle/>
           <a:p>
-            <a:pPr indent="0" marL="0">
+            <a:pPr marL="0" indent="0">
               <a:lnSpc>
                 <a:spcPct val="110000"/>
               </a:lnSpc>
@@ -9644,7 +9421,7 @@
             <a:endParaRPr lang="en-US" sz="1400" dirty="0"/>
           </a:p>
           <a:p>
-            <a:pPr indent="0" marL="0">
+            <a:pPr marL="0" indent="0">
               <a:lnSpc>
                 <a:spcPct val="110000"/>
               </a:lnSpc>
@@ -9664,7 +9441,7 @@
             <a:endParaRPr lang="en-US" sz="1400" dirty="0"/>
           </a:p>
           <a:p>
-            <a:pPr indent="0" marL="0">
+            <a:pPr marL="0" indent="0">
               <a:lnSpc>
                 <a:spcPct val="110000"/>
               </a:lnSpc>
@@ -9673,7 +9450,7 @@
             <a:endParaRPr lang="en-US" sz="1400" dirty="0"/>
           </a:p>
           <a:p>
-            <a:pPr indent="0" marL="0">
+            <a:pPr marL="0" indent="0">
               <a:lnSpc>
                 <a:spcPct val="110000"/>
               </a:lnSpc>
@@ -9693,7 +9470,7 @@
             <a:endParaRPr lang="en-US" sz="1400" dirty="0"/>
           </a:p>
           <a:p>
-            <a:pPr indent="0" marL="0">
+            <a:pPr marL="0" indent="0">
               <a:lnSpc>
                 <a:spcPct val="110000"/>
               </a:lnSpc>
@@ -9735,7 +9512,7 @@
           <a:bodyPr wrap="square" lIns="0" tIns="0" rIns="0" bIns="0" rtlCol="0" anchor="ctr"/>
           <a:lstStyle/>
           <a:p>
-            <a:pPr indent="0" marL="0">
+            <a:pPr marL="0" indent="0">
               <a:buNone/>
             </a:pPr>
             <a:r>
@@ -9801,7 +9578,7 @@
           <a:bodyPr wrap="square" lIns="0" tIns="0" rIns="0" bIns="0" rtlCol="0" anchor="ctr"/>
           <a:lstStyle/>
           <a:p>
-            <a:pPr indent="0" marL="0">
+            <a:pPr marL="0" indent="0">
               <a:lnSpc>
                 <a:spcPct val="110000"/>
               </a:lnSpc>
@@ -9821,7 +9598,7 @@
             <a:endParaRPr lang="en-US" sz="1400" dirty="0"/>
           </a:p>
           <a:p>
-            <a:pPr indent="0" marL="0">
+            <a:pPr marL="0" indent="0">
               <a:lnSpc>
                 <a:spcPct val="110000"/>
               </a:lnSpc>
@@ -9863,7 +9640,7 @@
           <a:bodyPr wrap="square" lIns="0" tIns="0" rIns="0" bIns="0" rtlCol="0" anchor="ctr"/>
           <a:lstStyle/>
           <a:p>
-            <a:pPr indent="0" marL="0">
+            <a:pPr marL="0" indent="0">
               <a:buNone/>
             </a:pPr>
             <a:r>
@@ -9897,6 +9674,7 @@
         <a:solidFill>
           <a:srgbClr val="17132E"/>
         </a:solidFill>
+        <a:effectLst/>
       </p:bgPr>
     </p:bg>
     <p:spTree>
@@ -9934,7 +9712,7 @@
           <a:bodyPr wrap="square" lIns="0" tIns="0" rIns="0" bIns="0" rtlCol="0" anchor="ctr"/>
           <a:lstStyle/>
           <a:p>
-            <a:pPr indent="0" marL="0">
+            <a:pPr marL="0" indent="0">
               <a:buNone/>
             </a:pPr>
             <a:r>
@@ -9973,7 +9751,7 @@
           <a:bodyPr wrap="square" lIns="0" tIns="0" rIns="0" bIns="0" rtlCol="0" anchor="ctr"/>
           <a:lstStyle/>
           <a:p>
-            <a:pPr indent="0" marL="0">
+            <a:pPr marL="0" indent="0">
               <a:buNone/>
             </a:pPr>
             <a:r>
@@ -10012,13 +9790,13 @@
           <a:bodyPr wrap="square" lIns="0" tIns="0" rIns="0" bIns="0" rtlCol="0" anchor="ctr"/>
           <a:lstStyle/>
           <a:p>
-            <a:pPr indent="0" marL="0">
-              <a:buNone/>
-            </a:pPr>
-            <a:r>
-              <a:rPr lang="en-US" sz="2000" b="1" dirty="0">
-                <a:solidFill>
-                  <a:srgbClr val="3DD6A0"/>
+            <a:pPr marL="0" indent="0">
+              <a:buNone/>
+            </a:pPr>
+            <a:r>
+              <a:rPr lang="en-US" sz="2400" b="1" dirty="0">
+                <a:solidFill>
+                  <a:schemeClr val="bg1"/>
                 </a:solidFill>
                 <a:latin typeface="Calibri" pitchFamily="34" charset="0"/>
                 <a:ea typeface="Calibri" pitchFamily="34" charset="-122"/>
@@ -10026,7 +9804,11 @@
               </a:rPr>
               <a:t>Четыре типа</a:t>
             </a:r>
-            <a:endParaRPr lang="en-US" sz="2000" dirty="0"/>
+            <a:endParaRPr lang="en-US" sz="2400" dirty="0">
+              <a:solidFill>
+                <a:schemeClr val="bg1"/>
+              </a:solidFill>
+            </a:endParaRPr>
           </a:p>
         </p:txBody>
       </p:sp>
@@ -10078,16 +9860,16 @@
           <a:bodyPr wrap="square" lIns="0" tIns="0" rIns="0" bIns="0" rtlCol="0" anchor="ctr"/>
           <a:lstStyle/>
           <a:p>
-            <a:pPr indent="0" marL="0">
+            <a:pPr marL="0" indent="0">
               <a:lnSpc>
                 <a:spcPct val="110000"/>
               </a:lnSpc>
               <a:buNone/>
             </a:pPr>
             <a:r>
-              <a:rPr lang="en-US" sz="1500" dirty="0">
-                <a:solidFill>
-                  <a:srgbClr val="4FD1E0"/>
+              <a:rPr lang="en-US" sz="2000" b="1" dirty="0">
+                <a:solidFill>
+                  <a:schemeClr val="bg1"/>
                 </a:solidFill>
                 <a:latin typeface="Consolas" pitchFamily="34" charset="0"/>
                 <a:ea typeface="Consolas" pitchFamily="34" charset="-122"/>
@@ -10095,19 +9877,23 @@
               </a:rPr>
               <a:t>a = 10        # int    целое</a:t>
             </a:r>
-            <a:endParaRPr lang="en-US" sz="1500" dirty="0"/>
-          </a:p>
-          <a:p>
-            <a:pPr indent="0" marL="0">
+            <a:endParaRPr lang="en-US" sz="2000" b="1" dirty="0">
+              <a:solidFill>
+                <a:schemeClr val="bg1"/>
+              </a:solidFill>
+            </a:endParaRPr>
+          </a:p>
+          <a:p>
+            <a:pPr marL="0" indent="0">
               <a:lnSpc>
                 <a:spcPct val="110000"/>
               </a:lnSpc>
               <a:buNone/>
             </a:pPr>
             <a:r>
-              <a:rPr lang="en-US" sz="1500" dirty="0">
-                <a:solidFill>
-                  <a:srgbClr val="4FD1E0"/>
+              <a:rPr lang="en-US" sz="2000" b="1" dirty="0">
+                <a:solidFill>
+                  <a:schemeClr val="bg1"/>
                 </a:solidFill>
                 <a:latin typeface="Consolas" pitchFamily="34" charset="0"/>
                 <a:ea typeface="Consolas" pitchFamily="34" charset="-122"/>
@@ -10115,19 +9901,23 @@
               </a:rPr>
               <a:t>b = 4.5       # float  дробное</a:t>
             </a:r>
-            <a:endParaRPr lang="en-US" sz="1500" dirty="0"/>
-          </a:p>
-          <a:p>
-            <a:pPr indent="0" marL="0">
+            <a:endParaRPr lang="en-US" sz="2000" b="1" dirty="0">
+              <a:solidFill>
+                <a:schemeClr val="bg1"/>
+              </a:solidFill>
+            </a:endParaRPr>
+          </a:p>
+          <a:p>
+            <a:pPr marL="0" indent="0">
               <a:lnSpc>
                 <a:spcPct val="110000"/>
               </a:lnSpc>
               <a:buNone/>
             </a:pPr>
             <a:r>
-              <a:rPr lang="en-US" sz="1500" dirty="0">
-                <a:solidFill>
-                  <a:srgbClr val="4FD1E0"/>
+              <a:rPr lang="en-US" sz="2000" b="1" dirty="0">
+                <a:solidFill>
+                  <a:schemeClr val="bg1"/>
                 </a:solidFill>
                 <a:latin typeface="Consolas" pitchFamily="34" charset="0"/>
                 <a:ea typeface="Consolas" pitchFamily="34" charset="-122"/>
@@ -10135,19 +9925,23 @@
               </a:rPr>
               <a:t>c = "текст"   # str    строка</a:t>
             </a:r>
-            <a:endParaRPr lang="en-US" sz="1500" dirty="0"/>
-          </a:p>
-          <a:p>
-            <a:pPr indent="0" marL="0">
+            <a:endParaRPr lang="en-US" sz="2000" b="1" dirty="0">
+              <a:solidFill>
+                <a:schemeClr val="bg1"/>
+              </a:solidFill>
+            </a:endParaRPr>
+          </a:p>
+          <a:p>
+            <a:pPr marL="0" indent="0">
               <a:lnSpc>
                 <a:spcPct val="110000"/>
               </a:lnSpc>
               <a:buNone/>
             </a:pPr>
             <a:r>
-              <a:rPr lang="en-US" sz="1500" dirty="0">
-                <a:solidFill>
-                  <a:srgbClr val="4FD1E0"/>
+              <a:rPr lang="en-US" sz="2000" b="1" dirty="0">
+                <a:solidFill>
+                  <a:schemeClr val="bg1"/>
                 </a:solidFill>
                 <a:latin typeface="Consolas" pitchFamily="34" charset="0"/>
                 <a:ea typeface="Consolas" pitchFamily="34" charset="-122"/>
@@ -10155,7 +9949,11 @@
               </a:rPr>
               <a:t>d = True      # bool   логическое</a:t>
             </a:r>
-            <a:endParaRPr lang="en-US" sz="1500" dirty="0"/>
+            <a:endParaRPr lang="en-US" sz="2000" b="1" dirty="0">
+              <a:solidFill>
+                <a:schemeClr val="bg1"/>
+              </a:solidFill>
+            </a:endParaRPr>
           </a:p>
         </p:txBody>
       </p:sp>
@@ -10180,13 +9978,13 @@
           <a:bodyPr wrap="square" lIns="0" tIns="0" rIns="0" bIns="0" rtlCol="0" anchor="ctr"/>
           <a:lstStyle/>
           <a:p>
-            <a:pPr indent="0" marL="0">
+            <a:pPr marL="0" indent="0">
               <a:buNone/>
             </a:pPr>
             <a:r>
               <a:rPr lang="en-US" sz="2000" b="1" dirty="0">
                 <a:solidFill>
-                  <a:srgbClr val="8B7CF6"/>
+                  <a:schemeClr val="bg1"/>
                 </a:solidFill>
                 <a:latin typeface="Calibri" pitchFamily="34" charset="0"/>
                 <a:ea typeface="Calibri" pitchFamily="34" charset="-122"/>
@@ -10194,7 +9992,11 @@
               </a:rPr>
               <a:t>Узнать тип</a:t>
             </a:r>
-            <a:endParaRPr lang="en-US" sz="2000" dirty="0"/>
+            <a:endParaRPr lang="en-US" sz="2000" dirty="0">
+              <a:solidFill>
+                <a:schemeClr val="bg1"/>
+              </a:solidFill>
+            </a:endParaRPr>
           </a:p>
         </p:txBody>
       </p:sp>
@@ -10246,16 +10048,16 @@
           <a:bodyPr wrap="square" lIns="0" tIns="0" rIns="0" bIns="0" rtlCol="0" anchor="ctr"/>
           <a:lstStyle/>
           <a:p>
-            <a:pPr indent="0" marL="0">
+            <a:pPr marL="0" indent="0">
               <a:lnSpc>
                 <a:spcPct val="110000"/>
               </a:lnSpc>
               <a:buNone/>
             </a:pPr>
             <a:r>
-              <a:rPr lang="en-US" sz="1600" dirty="0">
-                <a:solidFill>
-                  <a:srgbClr val="4FD1E0"/>
+              <a:rPr lang="en-US" sz="2000" b="1" dirty="0">
+                <a:solidFill>
+                  <a:schemeClr val="bg1"/>
                 </a:solidFill>
                 <a:latin typeface="Consolas" pitchFamily="34" charset="0"/>
                 <a:ea typeface="Consolas" pitchFamily="34" charset="-122"/>
@@ -10263,7 +10065,11 @@
               </a:rPr>
               <a:t>print(type(10))   # int</a:t>
             </a:r>
-            <a:endParaRPr lang="en-US" sz="1600" dirty="0"/>
+            <a:endParaRPr lang="en-US" sz="2000" b="1" dirty="0">
+              <a:solidFill>
+                <a:schemeClr val="bg1"/>
+              </a:solidFill>
+            </a:endParaRPr>
           </a:p>
         </p:txBody>
       </p:sp>
@@ -10288,13 +10094,13 @@
           <a:bodyPr wrap="square" lIns="0" tIns="0" rIns="0" bIns="0" rtlCol="0" anchor="ctr"/>
           <a:lstStyle/>
           <a:p>
-            <a:pPr indent="0" marL="0">
+            <a:pPr marL="0" indent="0">
               <a:buNone/>
             </a:pPr>
             <a:r>
               <a:rPr lang="en-US" sz="2000" b="1" dirty="0">
                 <a:solidFill>
-                  <a:srgbClr val="4FD1E0"/>
+                  <a:schemeClr val="bg1"/>
                 </a:solidFill>
                 <a:latin typeface="Calibri" pitchFamily="34" charset="0"/>
                 <a:ea typeface="Calibri" pitchFamily="34" charset="-122"/>
@@ -10302,7 +10108,11 @@
               </a:rPr>
               <a:t>Преобразование</a:t>
             </a:r>
-            <a:endParaRPr lang="en-US" sz="2000" dirty="0"/>
+            <a:endParaRPr lang="en-US" sz="2000" dirty="0">
+              <a:solidFill>
+                <a:schemeClr val="bg1"/>
+              </a:solidFill>
+            </a:endParaRPr>
           </a:p>
         </p:txBody>
       </p:sp>
@@ -10354,16 +10164,16 @@
           <a:bodyPr wrap="square" lIns="0" tIns="0" rIns="0" bIns="0" rtlCol="0" anchor="ctr"/>
           <a:lstStyle/>
           <a:p>
-            <a:pPr indent="0" marL="0">
+            <a:pPr marL="0" indent="0">
               <a:lnSpc>
                 <a:spcPct val="110000"/>
               </a:lnSpc>
               <a:buNone/>
             </a:pPr>
             <a:r>
-              <a:rPr lang="en-US" sz="1500" dirty="0">
-                <a:solidFill>
-                  <a:srgbClr val="4FD1E0"/>
+              <a:rPr lang="en-US" sz="2000" b="1" dirty="0">
+                <a:solidFill>
+                  <a:schemeClr val="bg1"/>
                 </a:solidFill>
                 <a:latin typeface="Consolas" pitchFamily="34" charset="0"/>
                 <a:ea typeface="Consolas" pitchFamily="34" charset="-122"/>
@@ -10371,19 +10181,23 @@
               </a:rPr>
               <a:t>int("25")    # 25</a:t>
             </a:r>
-            <a:endParaRPr lang="en-US" sz="1500" dirty="0"/>
-          </a:p>
-          <a:p>
-            <a:pPr indent="0" marL="0">
+            <a:endParaRPr lang="en-US" sz="2000" b="1" dirty="0">
+              <a:solidFill>
+                <a:schemeClr val="bg1"/>
+              </a:solidFill>
+            </a:endParaRPr>
+          </a:p>
+          <a:p>
+            <a:pPr marL="0" indent="0">
               <a:lnSpc>
                 <a:spcPct val="110000"/>
               </a:lnSpc>
               <a:buNone/>
             </a:pPr>
             <a:r>
-              <a:rPr lang="en-US" sz="1500" dirty="0">
-                <a:solidFill>
-                  <a:srgbClr val="4FD1E0"/>
+              <a:rPr lang="en-US" sz="2000" b="1" dirty="0">
+                <a:solidFill>
+                  <a:schemeClr val="bg1"/>
                 </a:solidFill>
                 <a:latin typeface="Consolas" pitchFamily="34" charset="0"/>
                 <a:ea typeface="Consolas" pitchFamily="34" charset="-122"/>
@@ -10391,19 +10205,23 @@
               </a:rPr>
               <a:t>float("4.5") # 4.5</a:t>
             </a:r>
-            <a:endParaRPr lang="en-US" sz="1500" dirty="0"/>
-          </a:p>
-          <a:p>
-            <a:pPr indent="0" marL="0">
+            <a:endParaRPr lang="en-US" sz="2000" b="1" dirty="0">
+              <a:solidFill>
+                <a:schemeClr val="bg1"/>
+              </a:solidFill>
+            </a:endParaRPr>
+          </a:p>
+          <a:p>
+            <a:pPr marL="0" indent="0">
               <a:lnSpc>
                 <a:spcPct val="110000"/>
               </a:lnSpc>
               <a:buNone/>
             </a:pPr>
             <a:r>
-              <a:rPr lang="en-US" sz="1500" dirty="0">
-                <a:solidFill>
-                  <a:srgbClr val="4FD1E0"/>
+              <a:rPr lang="en-US" sz="2000" b="1" dirty="0">
+                <a:solidFill>
+                  <a:schemeClr val="bg1"/>
                 </a:solidFill>
                 <a:latin typeface="Consolas" pitchFamily="34" charset="0"/>
                 <a:ea typeface="Consolas" pitchFamily="34" charset="-122"/>
@@ -10411,7 +10229,11 @@
               </a:rPr>
               <a:t>str(25)      # "25"</a:t>
             </a:r>
-            <a:endParaRPr lang="en-US" sz="1500" dirty="0"/>
+            <a:endParaRPr lang="en-US" sz="2000" b="1" dirty="0">
+              <a:solidFill>
+                <a:schemeClr val="bg1"/>
+              </a:solidFill>
+            </a:endParaRPr>
           </a:p>
         </p:txBody>
       </p:sp>
@@ -10436,13 +10258,13 @@
           <a:bodyPr wrap="square" lIns="0" tIns="0" rIns="0" bIns="0" rtlCol="0" anchor="ctr"/>
           <a:lstStyle/>
           <a:p>
-            <a:pPr indent="0" marL="0">
+            <a:pPr marL="0" indent="0">
               <a:buNone/>
             </a:pPr>
             <a:r>
               <a:rPr lang="en-US" sz="2000" b="1" dirty="0">
                 <a:solidFill>
-                  <a:srgbClr val="F2789F"/>
+                  <a:schemeClr val="bg1"/>
                 </a:solidFill>
                 <a:latin typeface="Calibri" pitchFamily="34" charset="0"/>
                 <a:ea typeface="Calibri" pitchFamily="34" charset="-122"/>
@@ -10450,7 +10272,11 @@
               </a:rPr>
               <a:t>Что важно помнить</a:t>
             </a:r>
-            <a:endParaRPr lang="en-US" sz="2000" dirty="0"/>
+            <a:endParaRPr lang="en-US" sz="2000" dirty="0">
+              <a:solidFill>
+                <a:schemeClr val="bg1"/>
+              </a:solidFill>
+            </a:endParaRPr>
           </a:p>
         </p:txBody>
       </p:sp>
@@ -10502,13 +10328,13 @@
           <a:bodyPr wrap="square" lIns="0" tIns="0" rIns="0" bIns="0" rtlCol="0" anchor="ctr"/>
           <a:lstStyle/>
           <a:p>
-            <a:pPr indent="0" marL="0">
-              <a:buNone/>
-            </a:pPr>
-            <a:r>
-              <a:rPr lang="en-US" sz="1500" dirty="0">
-                <a:solidFill>
-                  <a:srgbClr val="4FD1E0"/>
+            <a:pPr marL="0" indent="0">
+              <a:buNone/>
+            </a:pPr>
+            <a:r>
+              <a:rPr lang="en-US" sz="2000" dirty="0">
+                <a:solidFill>
+                  <a:schemeClr val="bg1"/>
                 </a:solidFill>
                 <a:latin typeface="Consolas" pitchFamily="34" charset="0"/>
                 <a:ea typeface="Consolas" pitchFamily="34" charset="-122"/>
@@ -10516,7 +10342,11 @@
               </a:rPr>
               <a:t>10 / 5</a:t>
             </a:r>
-            <a:endParaRPr lang="en-US" sz="1500" dirty="0"/>
+            <a:endParaRPr lang="en-US" sz="2000" dirty="0">
+              <a:solidFill>
+                <a:schemeClr val="bg1"/>
+              </a:solidFill>
+            </a:endParaRPr>
           </a:p>
         </p:txBody>
       </p:sp>
@@ -10541,13 +10371,13 @@
           <a:bodyPr wrap="square" lIns="0" tIns="0" rIns="0" bIns="0" rtlCol="0" anchor="ctr"/>
           <a:lstStyle/>
           <a:p>
-            <a:pPr indent="0" marL="0">
-              <a:buNone/>
-            </a:pPr>
-            <a:r>
-              <a:rPr lang="en-US" sz="1400" dirty="0">
-                <a:solidFill>
-                  <a:srgbClr val="FFFFFF"/>
+            <a:pPr marL="0" indent="0">
+              <a:buNone/>
+            </a:pPr>
+            <a:r>
+              <a:rPr lang="en-US" sz="2000" dirty="0">
+                <a:solidFill>
+                  <a:schemeClr val="bg1"/>
                 </a:solidFill>
                 <a:latin typeface="Calibri" pitchFamily="34" charset="0"/>
                 <a:ea typeface="Calibri" pitchFamily="34" charset="-122"/>
@@ -10555,7 +10385,11 @@
               </a:rPr>
               <a:t>даёт 2.0 — всегда float</a:t>
             </a:r>
-            <a:endParaRPr lang="en-US" sz="1400" dirty="0"/>
+            <a:endParaRPr lang="en-US" sz="2000" dirty="0">
+              <a:solidFill>
+                <a:schemeClr val="bg1"/>
+              </a:solidFill>
+            </a:endParaRPr>
           </a:p>
         </p:txBody>
       </p:sp>
@@ -10607,13 +10441,13 @@
           <a:bodyPr wrap="square" lIns="0" tIns="0" rIns="0" bIns="0" rtlCol="0" anchor="ctr"/>
           <a:lstStyle/>
           <a:p>
-            <a:pPr indent="0" marL="0">
-              <a:buNone/>
-            </a:pPr>
-            <a:r>
-              <a:rPr lang="en-US" sz="1500" dirty="0">
-                <a:solidFill>
-                  <a:srgbClr val="4FD1E0"/>
+            <a:pPr marL="0" indent="0">
+              <a:buNone/>
+            </a:pPr>
+            <a:r>
+              <a:rPr lang="en-US" sz="2000" b="1" dirty="0">
+                <a:solidFill>
+                  <a:schemeClr val="bg1"/>
                 </a:solidFill>
                 <a:latin typeface="Consolas" pitchFamily="34" charset="0"/>
                 <a:ea typeface="Consolas" pitchFamily="34" charset="-122"/>
@@ -10621,7 +10455,11 @@
               </a:rPr>
               <a:t>10 // 5</a:t>
             </a:r>
-            <a:endParaRPr lang="en-US" sz="1500" dirty="0"/>
+            <a:endParaRPr lang="en-US" sz="2000" b="1" dirty="0">
+              <a:solidFill>
+                <a:schemeClr val="bg1"/>
+              </a:solidFill>
+            </a:endParaRPr>
           </a:p>
         </p:txBody>
       </p:sp>
@@ -10646,13 +10484,13 @@
           <a:bodyPr wrap="square" lIns="0" tIns="0" rIns="0" bIns="0" rtlCol="0" anchor="ctr"/>
           <a:lstStyle/>
           <a:p>
-            <a:pPr indent="0" marL="0">
-              <a:buNone/>
-            </a:pPr>
-            <a:r>
-              <a:rPr lang="en-US" sz="1400" dirty="0">
-                <a:solidFill>
-                  <a:srgbClr val="FFFFFF"/>
+            <a:pPr marL="0" indent="0">
+              <a:buNone/>
+            </a:pPr>
+            <a:r>
+              <a:rPr lang="en-US" sz="2000" b="1" dirty="0">
+                <a:solidFill>
+                  <a:schemeClr val="bg1"/>
                 </a:solidFill>
                 <a:latin typeface="Calibri" pitchFamily="34" charset="0"/>
                 <a:ea typeface="Calibri" pitchFamily="34" charset="-122"/>
@@ -10660,7 +10498,11 @@
               </a:rPr>
               <a:t>даёт 2 — целое</a:t>
             </a:r>
-            <a:endParaRPr lang="en-US" sz="1400" dirty="0"/>
+            <a:endParaRPr lang="en-US" sz="2000" b="1" dirty="0">
+              <a:solidFill>
+                <a:schemeClr val="bg1"/>
+              </a:solidFill>
+            </a:endParaRPr>
           </a:p>
         </p:txBody>
       </p:sp>
@@ -10712,13 +10554,13 @@
           <a:bodyPr wrap="square" lIns="0" tIns="0" rIns="0" bIns="0" rtlCol="0" anchor="ctr"/>
           <a:lstStyle/>
           <a:p>
-            <a:pPr indent="0" marL="0">
-              <a:buNone/>
-            </a:pPr>
-            <a:r>
-              <a:rPr lang="en-US" sz="1500" dirty="0">
-                <a:solidFill>
-                  <a:srgbClr val="4FD1E0"/>
+            <a:pPr marL="0" indent="0">
+              <a:buNone/>
+            </a:pPr>
+            <a:r>
+              <a:rPr lang="en-US" sz="2000" b="1" dirty="0">
+                <a:solidFill>
+                  <a:schemeClr val="bg1"/>
                 </a:solidFill>
                 <a:latin typeface="Consolas" pitchFamily="34" charset="0"/>
                 <a:ea typeface="Consolas" pitchFamily="34" charset="-122"/>
@@ -10726,7 +10568,11 @@
               </a:rPr>
               <a:t>int(4.7)</a:t>
             </a:r>
-            <a:endParaRPr lang="en-US" sz="1500" dirty="0"/>
+            <a:endParaRPr lang="en-US" sz="2000" b="1" dirty="0">
+              <a:solidFill>
+                <a:schemeClr val="bg1"/>
+              </a:solidFill>
+            </a:endParaRPr>
           </a:p>
         </p:txBody>
       </p:sp>
@@ -10751,13 +10597,13 @@
           <a:bodyPr wrap="square" lIns="0" tIns="0" rIns="0" bIns="0" rtlCol="0" anchor="ctr"/>
           <a:lstStyle/>
           <a:p>
-            <a:pPr indent="0" marL="0">
-              <a:buNone/>
-            </a:pPr>
-            <a:r>
-              <a:rPr lang="en-US" sz="1400" dirty="0">
-                <a:solidFill>
-                  <a:srgbClr val="FFFFFF"/>
+            <a:pPr marL="0" indent="0">
+              <a:buNone/>
+            </a:pPr>
+            <a:r>
+              <a:rPr lang="en-US" sz="2000" b="1" dirty="0">
+                <a:solidFill>
+                  <a:schemeClr val="bg1"/>
                 </a:solidFill>
                 <a:latin typeface="Calibri" pitchFamily="34" charset="0"/>
                 <a:ea typeface="Calibri" pitchFamily="34" charset="-122"/>
@@ -10765,7 +10611,11 @@
               </a:rPr>
               <a:t>даёт 4 — отбрасывает</a:t>
             </a:r>
-            <a:endParaRPr lang="en-US" sz="1400" dirty="0"/>
+            <a:endParaRPr lang="en-US" sz="2000" b="1" dirty="0">
+              <a:solidFill>
+                <a:schemeClr val="bg1"/>
+              </a:solidFill>
+            </a:endParaRPr>
           </a:p>
         </p:txBody>
       </p:sp>
@@ -10817,13 +10667,13 @@
           <a:bodyPr wrap="square" lIns="0" tIns="0" rIns="0" bIns="0" rtlCol="0" anchor="ctr"/>
           <a:lstStyle/>
           <a:p>
-            <a:pPr indent="0" marL="0">
-              <a:buNone/>
-            </a:pPr>
-            <a:r>
-              <a:rPr lang="en-US" sz="1500" dirty="0">
-                <a:solidFill>
-                  <a:srgbClr val="4FD1E0"/>
+            <a:pPr marL="0" indent="0">
+              <a:buNone/>
+            </a:pPr>
+            <a:r>
+              <a:rPr lang="en-US" sz="2000" b="1" dirty="0">
+                <a:solidFill>
+                  <a:schemeClr val="bg1"/>
                 </a:solidFill>
                 <a:latin typeface="Consolas" pitchFamily="34" charset="0"/>
                 <a:ea typeface="Consolas" pitchFamily="34" charset="-122"/>
@@ -10831,7 +10681,11 @@
               </a:rPr>
               <a:t>round(4.7)</a:t>
             </a:r>
-            <a:endParaRPr lang="en-US" sz="1500" dirty="0"/>
+            <a:endParaRPr lang="en-US" sz="2000" b="1" dirty="0">
+              <a:solidFill>
+                <a:schemeClr val="bg1"/>
+              </a:solidFill>
+            </a:endParaRPr>
           </a:p>
         </p:txBody>
       </p:sp>
@@ -10856,13 +10710,13 @@
           <a:bodyPr wrap="square" lIns="0" tIns="0" rIns="0" bIns="0" rtlCol="0" anchor="ctr"/>
           <a:lstStyle/>
           <a:p>
-            <a:pPr indent="0" marL="0">
-              <a:buNone/>
-            </a:pPr>
-            <a:r>
-              <a:rPr lang="en-US" sz="1400" dirty="0">
-                <a:solidFill>
-                  <a:srgbClr val="FFFFFF"/>
+            <a:pPr marL="0" indent="0">
+              <a:buNone/>
+            </a:pPr>
+            <a:r>
+              <a:rPr lang="en-US" sz="2000" b="1" dirty="0">
+                <a:solidFill>
+                  <a:schemeClr val="bg1"/>
                 </a:solidFill>
                 <a:latin typeface="Calibri" pitchFamily="34" charset="0"/>
                 <a:ea typeface="Calibri" pitchFamily="34" charset="-122"/>
@@ -10870,7 +10724,11 @@
               </a:rPr>
               <a:t>даёт 5 — округляет</a:t>
             </a:r>
-            <a:endParaRPr lang="en-US" sz="1400" dirty="0"/>
+            <a:endParaRPr lang="en-US" sz="2000" b="1" dirty="0">
+              <a:solidFill>
+                <a:schemeClr val="bg1"/>
+              </a:solidFill>
+            </a:endParaRPr>
           </a:p>
         </p:txBody>
       </p:sp>
@@ -10922,13 +10780,13 @@
           <a:bodyPr wrap="square" lIns="0" tIns="0" rIns="0" bIns="0" rtlCol="0" anchor="ctr"/>
           <a:lstStyle/>
           <a:p>
-            <a:pPr indent="0" marL="0">
-              <a:buNone/>
-            </a:pPr>
-            <a:r>
-              <a:rPr lang="en-US" sz="1500" dirty="0">
-                <a:solidFill>
-                  <a:srgbClr val="4FD1E0"/>
+            <a:pPr marL="0" indent="0">
+              <a:buNone/>
+            </a:pPr>
+            <a:r>
+              <a:rPr lang="en-US" sz="2000" b="1" dirty="0">
+                <a:solidFill>
+                  <a:schemeClr val="bg1"/>
                 </a:solidFill>
                 <a:latin typeface="Consolas" pitchFamily="34" charset="0"/>
                 <a:ea typeface="Consolas" pitchFamily="34" charset="-122"/>
@@ -10936,7 +10794,11 @@
               </a:rPr>
               <a:t>"15" + "4"</a:t>
             </a:r>
-            <a:endParaRPr lang="en-US" sz="1500" dirty="0"/>
+            <a:endParaRPr lang="en-US" sz="2000" b="1" dirty="0">
+              <a:solidFill>
+                <a:schemeClr val="bg1"/>
+              </a:solidFill>
+            </a:endParaRPr>
           </a:p>
         </p:txBody>
       </p:sp>
@@ -10961,13 +10823,13 @@
           <a:bodyPr wrap="square" lIns="0" tIns="0" rIns="0" bIns="0" rtlCol="0" anchor="ctr"/>
           <a:lstStyle/>
           <a:p>
-            <a:pPr indent="0" marL="0">
-              <a:buNone/>
-            </a:pPr>
-            <a:r>
-              <a:rPr lang="en-US" sz="1400" dirty="0">
-                <a:solidFill>
-                  <a:srgbClr val="FFFFFF"/>
+            <a:pPr marL="0" indent="0">
+              <a:buNone/>
+            </a:pPr>
+            <a:r>
+              <a:rPr lang="en-US" sz="2000" b="1" dirty="0">
+                <a:solidFill>
+                  <a:schemeClr val="bg1"/>
                 </a:solidFill>
                 <a:latin typeface="Calibri" pitchFamily="34" charset="0"/>
                 <a:ea typeface="Calibri" pitchFamily="34" charset="-122"/>
@@ -10975,7 +10837,11 @@
               </a:rPr>
               <a:t>даёт "154" — склейка</a:t>
             </a:r>
-            <a:endParaRPr lang="en-US" sz="1400" dirty="0"/>
+            <a:endParaRPr lang="en-US" sz="2000" b="1" dirty="0">
+              <a:solidFill>
+                <a:schemeClr val="bg1"/>
+              </a:solidFill>
+            </a:endParaRPr>
           </a:p>
         </p:txBody>
       </p:sp>
@@ -11027,13 +10893,13 @@
           <a:bodyPr wrap="square" lIns="0" tIns="0" rIns="0" bIns="0" rtlCol="0" anchor="ctr"/>
           <a:lstStyle/>
           <a:p>
-            <a:pPr indent="0" marL="0">
-              <a:buNone/>
-            </a:pPr>
-            <a:r>
-              <a:rPr lang="en-US" sz="1500" dirty="0">
-                <a:solidFill>
-                  <a:srgbClr val="4FD1E0"/>
+            <a:pPr marL="0" indent="0">
+              <a:buNone/>
+            </a:pPr>
+            <a:r>
+              <a:rPr lang="en-US" sz="2000" b="1" dirty="0">
+                <a:solidFill>
+                  <a:schemeClr val="bg1"/>
                 </a:solidFill>
                 <a:latin typeface="Consolas" pitchFamily="34" charset="0"/>
                 <a:ea typeface="Consolas" pitchFamily="34" charset="-122"/>
@@ -11041,7 +10907,11 @@
               </a:rPr>
               <a:t>int(True)</a:t>
             </a:r>
-            <a:endParaRPr lang="en-US" sz="1500" dirty="0"/>
+            <a:endParaRPr lang="en-US" sz="2000" b="1" dirty="0">
+              <a:solidFill>
+                <a:schemeClr val="bg1"/>
+              </a:solidFill>
+            </a:endParaRPr>
           </a:p>
         </p:txBody>
       </p:sp>
@@ -11066,13 +10936,13 @@
           <a:bodyPr wrap="square" lIns="0" tIns="0" rIns="0" bIns="0" rtlCol="0" anchor="ctr"/>
           <a:lstStyle/>
           <a:p>
-            <a:pPr indent="0" marL="0">
-              <a:buNone/>
-            </a:pPr>
-            <a:r>
-              <a:rPr lang="en-US" sz="1400" dirty="0">
-                <a:solidFill>
-                  <a:srgbClr val="FFFFFF"/>
+            <a:pPr marL="0" indent="0">
+              <a:buNone/>
+            </a:pPr>
+            <a:r>
+              <a:rPr lang="en-US" sz="2000" b="1" dirty="0">
+                <a:solidFill>
+                  <a:schemeClr val="bg1"/>
                 </a:solidFill>
                 <a:latin typeface="Calibri" pitchFamily="34" charset="0"/>
                 <a:ea typeface="Calibri" pitchFamily="34" charset="-122"/>
@@ -11080,7 +10950,11 @@
               </a:rPr>
               <a:t>даёт 1, int(False) даёт 0</a:t>
             </a:r>
-            <a:endParaRPr lang="en-US" sz="1400" dirty="0"/>
+            <a:endParaRPr lang="en-US" sz="2000" b="1" dirty="0">
+              <a:solidFill>
+                <a:schemeClr val="bg1"/>
+              </a:solidFill>
+            </a:endParaRPr>
           </a:p>
         </p:txBody>
       </p:sp>
@@ -11132,13 +11006,13 @@
           <a:bodyPr wrap="square" lIns="0" tIns="0" rIns="0" bIns="0" rtlCol="0" anchor="ctr"/>
           <a:lstStyle/>
           <a:p>
-            <a:pPr indent="0" marL="0">
-              <a:buNone/>
-            </a:pPr>
-            <a:r>
-              <a:rPr lang="en-US" sz="1500" dirty="0">
-                <a:solidFill>
-                  <a:srgbClr val="4FD1E0"/>
+            <a:pPr marL="0" indent="0">
+              <a:buNone/>
+            </a:pPr>
+            <a:r>
+              <a:rPr lang="en-US" sz="2000" b="1" dirty="0">
+                <a:solidFill>
+                  <a:schemeClr val="bg1"/>
                 </a:solidFill>
                 <a:latin typeface="Consolas" pitchFamily="34" charset="0"/>
                 <a:ea typeface="Consolas" pitchFamily="34" charset="-122"/>
@@ -11146,7 +11020,11 @@
               </a:rPr>
               <a:t>"25" + 5</a:t>
             </a:r>
-            <a:endParaRPr lang="en-US" sz="1500" dirty="0"/>
+            <a:endParaRPr lang="en-US" sz="2000" b="1" dirty="0">
+              <a:solidFill>
+                <a:schemeClr val="bg1"/>
+              </a:solidFill>
+            </a:endParaRPr>
           </a:p>
         </p:txBody>
       </p:sp>
@@ -11171,11 +11049,11 @@
           <a:bodyPr wrap="square" lIns="0" tIns="0" rIns="0" bIns="0" rtlCol="0" anchor="ctr"/>
           <a:lstStyle/>
           <a:p>
-            <a:pPr indent="0" marL="0">
-              <a:buNone/>
-            </a:pPr>
-            <a:r>
-              <a:rPr lang="en-US" sz="1400" dirty="0">
+            <a:pPr marL="0" indent="0">
+              <a:buNone/>
+            </a:pPr>
+            <a:r>
+              <a:rPr lang="en-US" sz="2000" b="1" dirty="0">
                 <a:solidFill>
                   <a:srgbClr val="FFFFFF"/>
                 </a:solidFill>
@@ -11185,7 +11063,7 @@
               </a:rPr>
               <a:t>ошибка TypeError</a:t>
             </a:r>
-            <a:endParaRPr lang="en-US" sz="1400" dirty="0"/>
+            <a:endParaRPr lang="en-US" sz="2000" b="1" dirty="0"/>
           </a:p>
         </p:txBody>
       </p:sp>
@@ -11205,6 +11083,7 @@
         <a:solidFill>
           <a:srgbClr val="17132E"/>
         </a:solidFill>
+        <a:effectLst/>
       </p:bgPr>
     </p:bg>
     <p:spTree>
@@ -11242,7 +11121,7 @@
           <a:bodyPr wrap="square" lIns="0" tIns="0" rIns="0" bIns="0" rtlCol="0" anchor="ctr"/>
           <a:lstStyle/>
           <a:p>
-            <a:pPr indent="0" marL="0">
+            <a:pPr marL="0" indent="0">
               <a:buNone/>
             </a:pPr>
             <a:r>
@@ -11281,7 +11160,7 @@
           <a:bodyPr wrap="square" lIns="0" tIns="0" rIns="0" bIns="0" rtlCol="0" anchor="ctr"/>
           <a:lstStyle/>
           <a:p>
-            <a:pPr indent="0" marL="0">
+            <a:pPr marL="0" indent="0">
               <a:buNone/>
             </a:pPr>
             <a:r>
@@ -11347,7 +11226,7 @@
           <a:bodyPr wrap="square" lIns="0" tIns="0" rIns="0" bIns="0" rtlCol="0" anchor="ctr"/>
           <a:lstStyle/>
           <a:p>
-            <a:pPr indent="0" marL="0">
+            <a:pPr marL="0" indent="0">
               <a:buNone/>
             </a:pPr>
             <a:r>
@@ -11386,7 +11265,7 @@
           <a:bodyPr wrap="square" lIns="0" tIns="0" rIns="0" bIns="0" rtlCol="0" anchor="ctr"/>
           <a:lstStyle/>
           <a:p>
-            <a:pPr indent="0" marL="0">
+            <a:pPr marL="0" indent="0">
               <a:buNone/>
             </a:pPr>
             <a:r>
@@ -11425,7 +11304,7 @@
           <a:bodyPr wrap="square" lIns="0" tIns="0" rIns="0" bIns="0" rtlCol="0" anchor="ctr"/>
           <a:lstStyle/>
           <a:p>
-            <a:pPr indent="0" marL="0">
+            <a:pPr marL="0" indent="0">
               <a:buNone/>
             </a:pPr>
             <a:r>
@@ -11491,7 +11370,7 @@
           <a:bodyPr wrap="square" lIns="0" tIns="0" rIns="0" bIns="0" rtlCol="0" anchor="ctr"/>
           <a:lstStyle/>
           <a:p>
-            <a:pPr indent="0" marL="0">
+            <a:pPr marL="0" indent="0">
               <a:buNone/>
             </a:pPr>
             <a:r>
@@ -11530,7 +11409,7 @@
           <a:bodyPr wrap="square" lIns="0" tIns="0" rIns="0" bIns="0" rtlCol="0" anchor="ctr"/>
           <a:lstStyle/>
           <a:p>
-            <a:pPr indent="0" marL="0">
+            <a:pPr marL="0" indent="0">
               <a:buNone/>
             </a:pPr>
             <a:r>
@@ -11569,7 +11448,7 @@
           <a:bodyPr wrap="square" lIns="0" tIns="0" rIns="0" bIns="0" rtlCol="0" anchor="ctr"/>
           <a:lstStyle/>
           <a:p>
-            <a:pPr indent="0" marL="0">
+            <a:pPr marL="0" indent="0">
               <a:buNone/>
             </a:pPr>
             <a:r>
@@ -11635,7 +11514,7 @@
           <a:bodyPr wrap="square" lIns="0" tIns="0" rIns="0" bIns="0" rtlCol="0" anchor="ctr"/>
           <a:lstStyle/>
           <a:p>
-            <a:pPr indent="0" marL="0">
+            <a:pPr marL="0" indent="0">
               <a:buNone/>
             </a:pPr>
             <a:r>
@@ -11674,7 +11553,7 @@
           <a:bodyPr wrap="square" lIns="0" tIns="0" rIns="0" bIns="0" rtlCol="0" anchor="ctr"/>
           <a:lstStyle/>
           <a:p>
-            <a:pPr indent="0" marL="0">
+            <a:pPr marL="0" indent="0">
               <a:buNone/>
             </a:pPr>
             <a:r>
@@ -11713,7 +11592,7 @@
           <a:bodyPr wrap="square" lIns="0" tIns="0" rIns="0" bIns="0" rtlCol="0" anchor="ctr"/>
           <a:lstStyle/>
           <a:p>
-            <a:pPr indent="0" marL="0">
+            <a:pPr marL="0" indent="0">
               <a:buNone/>
             </a:pPr>
             <a:r>
@@ -11779,7 +11658,7 @@
           <a:bodyPr wrap="square" lIns="0" tIns="0" rIns="0" bIns="0" rtlCol="0" anchor="ctr"/>
           <a:lstStyle/>
           <a:p>
-            <a:pPr indent="0" marL="0">
+            <a:pPr marL="0" indent="0">
               <a:buNone/>
             </a:pPr>
             <a:r>
@@ -11818,7 +11697,7 @@
           <a:bodyPr wrap="square" lIns="0" tIns="0" rIns="0" bIns="0" rtlCol="0" anchor="ctr"/>
           <a:lstStyle/>
           <a:p>
-            <a:pPr indent="0" marL="0">
+            <a:pPr marL="0" indent="0">
               <a:buNone/>
             </a:pPr>
             <a:r>
@@ -11857,7 +11736,7 @@
           <a:bodyPr wrap="square" lIns="0" tIns="0" rIns="0" bIns="0" rtlCol="0" anchor="ctr"/>
           <a:lstStyle/>
           <a:p>
-            <a:pPr indent="0" marL="0">
+            <a:pPr marL="0" indent="0">
               <a:buNone/>
             </a:pPr>
             <a:r>
@@ -11923,7 +11802,7 @@
           <a:bodyPr wrap="square" lIns="0" tIns="0" rIns="0" bIns="0" rtlCol="0" anchor="ctr"/>
           <a:lstStyle/>
           <a:p>
-            <a:pPr indent="0" marL="0">
+            <a:pPr marL="0" indent="0">
               <a:buNone/>
             </a:pPr>
             <a:r>
@@ -11957,6 +11836,7 @@
         <a:solidFill>
           <a:srgbClr val="17132E"/>
         </a:solidFill>
+        <a:effectLst/>
       </p:bgPr>
     </p:bg>
     <p:spTree>
@@ -12016,7 +11896,7 @@
           <a:bodyPr wrap="square" lIns="0" tIns="0" rIns="0" bIns="0" rtlCol="0" anchor="ctr"/>
           <a:lstStyle/>
           <a:p>
-            <a:pPr algn="ctr" indent="0" marL="0">
+            <a:pPr marL="0" indent="0" algn="ctr">
               <a:buNone/>
             </a:pPr>
             <a:r>
@@ -12055,7 +11935,7 @@
           <a:bodyPr wrap="square" lIns="0" tIns="0" rIns="0" bIns="0" rtlCol="0" anchor="ctr"/>
           <a:lstStyle/>
           <a:p>
-            <a:pPr indent="0" marL="0">
+            <a:pPr marL="0" indent="0">
               <a:buNone/>
             </a:pPr>
             <a:r>
@@ -12121,7 +12001,7 @@
           <a:bodyPr wrap="square" lIns="0" tIns="0" rIns="0" bIns="0" rtlCol="0" anchor="ctr"/>
           <a:lstStyle/>
           <a:p>
-            <a:pPr algn="ctr" indent="0" marL="0">
+            <a:pPr marL="0" indent="0" algn="ctr">
               <a:buNone/>
             </a:pPr>
             <a:r>
@@ -12207,7 +12087,7 @@
           <a:bodyPr wrap="square" lIns="0" tIns="0" rIns="0" bIns="0" rtlCol="0" anchor="ctr"/>
           <a:lstStyle/>
           <a:p>
-            <a:pPr algn="ctr" indent="0" marL="0">
+            <a:pPr marL="0" indent="0" algn="ctr">
               <a:buNone/>
             </a:pPr>
             <a:r>
@@ -12246,7 +12126,7 @@
           <a:bodyPr wrap="square" lIns="0" tIns="0" rIns="0" bIns="0" rtlCol="0" anchor="ctr"/>
           <a:lstStyle/>
           <a:p>
-            <a:pPr indent="0" marL="0">
+            <a:pPr marL="0" indent="0">
               <a:buNone/>
             </a:pPr>
             <a:r>
@@ -12285,7 +12165,7 @@
           <a:bodyPr wrap="square" lIns="0" tIns="0" rIns="0" bIns="0" rtlCol="0" anchor="ctr"/>
           <a:lstStyle/>
           <a:p>
-            <a:pPr indent="0" marL="0">
+            <a:pPr marL="0" indent="0">
               <a:buNone/>
             </a:pPr>
             <a:r>
@@ -12324,7 +12204,7 @@
           <a:bodyPr wrap="square" lIns="0" tIns="0" rIns="0" bIns="0" rtlCol="0" anchor="ctr"/>
           <a:lstStyle/>
           <a:p>
-            <a:pPr indent="0" marL="0">
+            <a:pPr marL="0" indent="0">
               <a:buNone/>
             </a:pPr>
             <a:r>
@@ -12390,7 +12270,7 @@
           <a:bodyPr wrap="square" lIns="0" tIns="0" rIns="0" bIns="0" rtlCol="0" anchor="ctr"/>
           <a:lstStyle/>
           <a:p>
-            <a:pPr indent="0" marL="0">
+            <a:pPr marL="0" indent="0">
               <a:lnSpc>
                 <a:spcPct val="110000"/>
               </a:lnSpc>
@@ -12410,7 +12290,7 @@
             <a:endParaRPr lang="en-US" sz="1400" dirty="0"/>
           </a:p>
           <a:p>
-            <a:pPr indent="0" marL="0">
+            <a:pPr marL="0" indent="0">
               <a:lnSpc>
                 <a:spcPct val="110000"/>
               </a:lnSpc>
@@ -12430,7 +12310,7 @@
             <a:endParaRPr lang="en-US" sz="1400" dirty="0"/>
           </a:p>
           <a:p>
-            <a:pPr indent="0" marL="0">
+            <a:pPr marL="0" indent="0">
               <a:lnSpc>
                 <a:spcPct val="110000"/>
               </a:lnSpc>
@@ -12450,7 +12330,7 @@
             <a:endParaRPr lang="en-US" sz="1400" dirty="0"/>
           </a:p>
           <a:p>
-            <a:pPr indent="0" marL="0">
+            <a:pPr marL="0" indent="0">
               <a:lnSpc>
                 <a:spcPct val="110000"/>
               </a:lnSpc>
@@ -12539,7 +12419,7 @@
           <a:bodyPr wrap="square" lIns="0" tIns="0" rIns="0" bIns="0" rtlCol="0" anchor="ctr"/>
           <a:lstStyle/>
           <a:p>
-            <a:pPr algn="ctr" indent="0" marL="0">
+            <a:pPr marL="0" indent="0" algn="ctr">
               <a:buNone/>
             </a:pPr>
             <a:r>
@@ -12578,7 +12458,7 @@
           <a:bodyPr wrap="square" lIns="0" tIns="0" rIns="0" bIns="0" rtlCol="0" anchor="ctr"/>
           <a:lstStyle/>
           <a:p>
-            <a:pPr indent="0" marL="0">
+            <a:pPr marL="0" indent="0">
               <a:buNone/>
             </a:pPr>
             <a:r>
@@ -12617,7 +12497,7 @@
           <a:bodyPr wrap="square" lIns="0" tIns="0" rIns="0" bIns="0" rtlCol="0" anchor="ctr"/>
           <a:lstStyle/>
           <a:p>
-            <a:pPr indent="0" marL="0">
+            <a:pPr marL="0" indent="0">
               <a:buNone/>
             </a:pPr>
             <a:r>
@@ -12656,7 +12536,7 @@
           <a:bodyPr wrap="square" lIns="0" tIns="0" rIns="0" bIns="0" rtlCol="0" anchor="ctr"/>
           <a:lstStyle/>
           <a:p>
-            <a:pPr indent="0" marL="0">
+            <a:pPr marL="0" indent="0">
               <a:buNone/>
             </a:pPr>
             <a:r>
@@ -12722,7 +12602,7 @@
           <a:bodyPr wrap="square" lIns="0" tIns="0" rIns="0" bIns="0" rtlCol="0" anchor="ctr"/>
           <a:lstStyle/>
           <a:p>
-            <a:pPr indent="0" marL="0">
+            <a:pPr marL="0" indent="0">
               <a:lnSpc>
                 <a:spcPct val="110000"/>
               </a:lnSpc>
@@ -12742,7 +12622,7 @@
             <a:endParaRPr lang="en-US" sz="1400" dirty="0"/>
           </a:p>
           <a:p>
-            <a:pPr indent="0" marL="0">
+            <a:pPr marL="0" indent="0">
               <a:lnSpc>
                 <a:spcPct val="110000"/>
               </a:lnSpc>
@@ -12784,7 +12664,7 @@
           <a:bodyPr wrap="square" lIns="0" tIns="0" rIns="0" bIns="0" rtlCol="0" anchor="ctr"/>
           <a:lstStyle/>
           <a:p>
-            <a:pPr indent="0" marL="0">
+            <a:pPr marL="0" indent="0">
               <a:buNone/>
             </a:pPr>
             <a:r>
@@ -12850,7 +12730,7 @@
           <a:bodyPr wrap="square" lIns="0" tIns="0" rIns="0" bIns="0" rtlCol="0" anchor="ctr"/>
           <a:lstStyle/>
           <a:p>
-            <a:pPr indent="0" marL="0">
+            <a:pPr marL="0" indent="0">
               <a:lnSpc>
                 <a:spcPct val="110000"/>
               </a:lnSpc>
@@ -12870,7 +12750,7 @@
             <a:endParaRPr lang="en-US" sz="1400" dirty="0"/>
           </a:p>
           <a:p>
-            <a:pPr indent="0" marL="0">
+            <a:pPr marL="0" indent="0">
               <a:lnSpc>
                 <a:spcPct val="110000"/>
               </a:lnSpc>
@@ -12959,7 +12839,7 @@
           <a:bodyPr wrap="square" lIns="0" tIns="0" rIns="0" bIns="0" rtlCol="0" anchor="ctr"/>
           <a:lstStyle/>
           <a:p>
-            <a:pPr algn="ctr" indent="0" marL="0">
+            <a:pPr marL="0" indent="0" algn="ctr">
               <a:buNone/>
             </a:pPr>
             <a:r>
@@ -12998,7 +12878,7 @@
           <a:bodyPr wrap="square" lIns="0" tIns="0" rIns="0" bIns="0" rtlCol="0" anchor="ctr"/>
           <a:lstStyle/>
           <a:p>
-            <a:pPr indent="0" marL="0">
+            <a:pPr marL="0" indent="0">
               <a:buNone/>
             </a:pPr>
             <a:r>
@@ -13037,7 +12917,7 @@
           <a:bodyPr wrap="square" lIns="0" tIns="0" rIns="0" bIns="0" rtlCol="0" anchor="ctr"/>
           <a:lstStyle/>
           <a:p>
-            <a:pPr indent="0" marL="0">
+            <a:pPr marL="0" indent="0">
               <a:buNone/>
             </a:pPr>
             <a:r>
@@ -13076,7 +12956,7 @@
           <a:bodyPr wrap="square" lIns="0" tIns="0" rIns="0" bIns="0" rtlCol="0" anchor="ctr"/>
           <a:lstStyle/>
           <a:p>
-            <a:pPr indent="0" marL="0">
+            <a:pPr marL="0" indent="0">
               <a:buNone/>
             </a:pPr>
             <a:r>
@@ -13142,7 +13022,7 @@
           <a:bodyPr wrap="square" lIns="0" tIns="0" rIns="0" bIns="0" rtlCol="0" anchor="ctr"/>
           <a:lstStyle/>
           <a:p>
-            <a:pPr indent="0" marL="0">
+            <a:pPr marL="0" indent="0">
               <a:lnSpc>
                 <a:spcPct val="110000"/>
               </a:lnSpc>
@@ -13162,7 +13042,7 @@
             <a:endParaRPr lang="en-US" sz="1400" dirty="0"/>
           </a:p>
           <a:p>
-            <a:pPr indent="0" marL="0">
+            <a:pPr marL="0" indent="0">
               <a:lnSpc>
                 <a:spcPct val="110000"/>
               </a:lnSpc>
@@ -13182,7 +13062,7 @@
             <a:endParaRPr lang="en-US" sz="1400" dirty="0"/>
           </a:p>
           <a:p>
-            <a:pPr indent="0" marL="0">
+            <a:pPr marL="0" indent="0">
               <a:lnSpc>
                 <a:spcPct val="110000"/>
               </a:lnSpc>
@@ -13202,7 +13082,7 @@
             <a:endParaRPr lang="en-US" sz="1400" dirty="0"/>
           </a:p>
           <a:p>
-            <a:pPr indent="0" marL="0">
+            <a:pPr marL="0" indent="0">
               <a:lnSpc>
                 <a:spcPct val="110000"/>
               </a:lnSpc>
@@ -13244,7 +13124,7 @@
           <a:bodyPr wrap="square" lIns="0" tIns="0" rIns="0" bIns="0" rtlCol="0" anchor="ctr"/>
           <a:lstStyle/>
           <a:p>
-            <a:pPr indent="0" marL="0">
+            <a:pPr marL="0" indent="0">
               <a:buNone/>
             </a:pPr>
             <a:r>
@@ -13310,7 +13190,7 @@
           <a:bodyPr wrap="square" lIns="0" tIns="0" rIns="0" bIns="0" rtlCol="0" anchor="ctr"/>
           <a:lstStyle/>
           <a:p>
-            <a:pPr indent="0" marL="0">
+            <a:pPr marL="0" indent="0">
               <a:lnSpc>
                 <a:spcPct val="110000"/>
               </a:lnSpc>
@@ -13330,7 +13210,7 @@
             <a:endParaRPr lang="en-US" sz="1400" dirty="0"/>
           </a:p>
           <a:p>
-            <a:pPr indent="0" marL="0">
+            <a:pPr marL="0" indent="0">
               <a:lnSpc>
                 <a:spcPct val="110000"/>
               </a:lnSpc>
@@ -13350,7 +13230,7 @@
             <a:endParaRPr lang="en-US" sz="1400" dirty="0"/>
           </a:p>
           <a:p>
-            <a:pPr indent="0" marL="0">
+            <a:pPr marL="0" indent="0">
               <a:lnSpc>
                 <a:spcPct val="110000"/>
               </a:lnSpc>
@@ -13370,7 +13250,7 @@
             <a:endParaRPr lang="en-US" sz="1400" dirty="0"/>
           </a:p>
           <a:p>
-            <a:pPr indent="0" marL="0">
+            <a:pPr marL="0" indent="0">
               <a:lnSpc>
                 <a:spcPct val="110000"/>
               </a:lnSpc>
@@ -13407,6 +13287,7 @@
         <a:solidFill>
           <a:srgbClr val="17132E"/>
         </a:solidFill>
+        <a:effectLst/>
       </p:bgPr>
     </p:bg>
     <p:spTree>
@@ -13466,7 +13347,7 @@
           <a:bodyPr wrap="square" lIns="0" tIns="0" rIns="0" bIns="0" rtlCol="0" anchor="ctr"/>
           <a:lstStyle/>
           <a:p>
-            <a:pPr algn="ctr" indent="0" marL="0">
+            <a:pPr marL="0" indent="0" algn="ctr">
               <a:buNone/>
             </a:pPr>
             <a:r>
@@ -13505,7 +13386,7 @@
           <a:bodyPr wrap="square" lIns="0" tIns="0" rIns="0" bIns="0" rtlCol="0" anchor="ctr"/>
           <a:lstStyle/>
           <a:p>
-            <a:pPr indent="0" marL="0">
+            <a:pPr marL="0" indent="0">
               <a:buNone/>
             </a:pPr>
             <a:r>
@@ -13571,7 +13452,7 @@
           <a:bodyPr wrap="square" lIns="0" tIns="0" rIns="0" bIns="0" rtlCol="0" anchor="ctr"/>
           <a:lstStyle/>
           <a:p>
-            <a:pPr algn="ctr" indent="0" marL="0">
+            <a:pPr marL="0" indent="0" algn="ctr">
               <a:buNone/>
             </a:pPr>
             <a:r>
@@ -13657,7 +13538,7 @@
           <a:bodyPr wrap="square" lIns="0" tIns="0" rIns="0" bIns="0" rtlCol="0" anchor="ctr"/>
           <a:lstStyle/>
           <a:p>
-            <a:pPr algn="ctr" indent="0" marL="0">
+            <a:pPr marL="0" indent="0" algn="ctr">
               <a:buNone/>
             </a:pPr>
             <a:r>
@@ -13696,7 +13577,7 @@
           <a:bodyPr wrap="square" lIns="0" tIns="0" rIns="0" bIns="0" rtlCol="0" anchor="ctr"/>
           <a:lstStyle/>
           <a:p>
-            <a:pPr indent="0" marL="0">
+            <a:pPr marL="0" indent="0">
               <a:buNone/>
             </a:pPr>
             <a:r>
@@ -13762,7 +13643,7 @@
           <a:bodyPr wrap="square" lIns="0" tIns="0" rIns="0" bIns="0" rtlCol="0" anchor="ctr"/>
           <a:lstStyle/>
           <a:p>
-            <a:pPr indent="0" marL="0">
+            <a:pPr marL="0" indent="0">
               <a:lnSpc>
                 <a:spcPct val="110000"/>
               </a:lnSpc>
@@ -13782,7 +13663,7 @@
             <a:endParaRPr lang="en-US" sz="1300" dirty="0"/>
           </a:p>
           <a:p>
-            <a:pPr indent="0" marL="0">
+            <a:pPr marL="0" indent="0">
               <a:lnSpc>
                 <a:spcPct val="110000"/>
               </a:lnSpc>
@@ -13802,7 +13683,7 @@
             <a:endParaRPr lang="en-US" sz="1300" dirty="0"/>
           </a:p>
           <a:p>
-            <a:pPr indent="0" marL="0">
+            <a:pPr marL="0" indent="0">
               <a:lnSpc>
                 <a:spcPct val="110000"/>
               </a:lnSpc>
@@ -13822,7 +13703,7 @@
             <a:endParaRPr lang="en-US" sz="1300" dirty="0"/>
           </a:p>
           <a:p>
-            <a:pPr indent="0" marL="0">
+            <a:pPr marL="0" indent="0">
               <a:lnSpc>
                 <a:spcPct val="110000"/>
               </a:lnSpc>
@@ -13842,7 +13723,7 @@
             <a:endParaRPr lang="en-US" sz="1300" dirty="0"/>
           </a:p>
           <a:p>
-            <a:pPr indent="0" marL="0">
+            <a:pPr marL="0" indent="0">
               <a:lnSpc>
                 <a:spcPct val="110000"/>
               </a:lnSpc>
@@ -13851,7 +13732,7 @@
             <a:endParaRPr lang="en-US" sz="1300" dirty="0"/>
           </a:p>
           <a:p>
-            <a:pPr indent="0" marL="0">
+            <a:pPr marL="0" indent="0">
               <a:lnSpc>
                 <a:spcPct val="110000"/>
               </a:lnSpc>
@@ -13871,7 +13752,7 @@
             <a:endParaRPr lang="en-US" sz="1300" dirty="0"/>
           </a:p>
           <a:p>
-            <a:pPr indent="0" marL="0">
+            <a:pPr marL="0" indent="0">
               <a:lnSpc>
                 <a:spcPct val="110000"/>
               </a:lnSpc>
@@ -13891,7 +13772,7 @@
             <a:endParaRPr lang="en-US" sz="1300" dirty="0"/>
           </a:p>
           <a:p>
-            <a:pPr indent="0" marL="0">
+            <a:pPr marL="0" indent="0">
               <a:lnSpc>
                 <a:spcPct val="110000"/>
               </a:lnSpc>
@@ -13911,7 +13792,7 @@
             <a:endParaRPr lang="en-US" sz="1300" dirty="0"/>
           </a:p>
           <a:p>
-            <a:pPr indent="0" marL="0">
+            <a:pPr marL="0" indent="0">
               <a:lnSpc>
                 <a:spcPct val="110000"/>
               </a:lnSpc>
@@ -13953,7 +13834,7 @@
           <a:bodyPr wrap="square" lIns="0" tIns="0" rIns="0" bIns="0" rtlCol="0" anchor="ctr"/>
           <a:lstStyle/>
           <a:p>
-            <a:pPr indent="0" marL="0">
+            <a:pPr marL="0" indent="0">
               <a:buNone/>
             </a:pPr>
             <a:r>
@@ -14019,7 +13900,7 @@
           <a:bodyPr wrap="square" lIns="0" tIns="0" rIns="0" bIns="0" rtlCol="0" anchor="ctr"/>
           <a:lstStyle/>
           <a:p>
-            <a:pPr indent="0" marL="0">
+            <a:pPr marL="0" indent="0">
               <a:lnSpc>
                 <a:spcPct val="110000"/>
               </a:lnSpc>
@@ -14039,7 +13920,7 @@
             <a:endParaRPr lang="en-US" sz="1400" dirty="0"/>
           </a:p>
           <a:p>
-            <a:pPr indent="0" marL="0">
+            <a:pPr marL="0" indent="0">
               <a:lnSpc>
                 <a:spcPct val="110000"/>
               </a:lnSpc>
@@ -14059,7 +13940,7 @@
             <a:endParaRPr lang="en-US" sz="1400" dirty="0"/>
           </a:p>
           <a:p>
-            <a:pPr indent="0" marL="0">
+            <a:pPr marL="0" indent="0">
               <a:lnSpc>
                 <a:spcPct val="110000"/>
               </a:lnSpc>
@@ -14079,7 +13960,7 @@
             <a:endParaRPr lang="en-US" sz="1400" dirty="0"/>
           </a:p>
           <a:p>
-            <a:pPr indent="0" marL="0">
+            <a:pPr marL="0" indent="0">
               <a:lnSpc>
                 <a:spcPct val="110000"/>
               </a:lnSpc>
@@ -14121,7 +14002,7 @@
           <a:bodyPr wrap="square" lIns="0" tIns="0" rIns="0" bIns="0" rtlCol="0" anchor="ctr"/>
           <a:lstStyle/>
           <a:p>
-            <a:pPr indent="0" marL="0">
+            <a:pPr marL="0" indent="0">
               <a:buNone/>
             </a:pPr>
             <a:r>
@@ -14207,7 +14088,7 @@
           <a:bodyPr wrap="square" lIns="0" tIns="0" rIns="0" bIns="0" rtlCol="0" anchor="ctr"/>
           <a:lstStyle/>
           <a:p>
-            <a:pPr algn="ctr" indent="0" marL="0">
+            <a:pPr marL="0" indent="0" algn="ctr">
               <a:buNone/>
             </a:pPr>
             <a:r>
@@ -14246,7 +14127,7 @@
           <a:bodyPr wrap="square" lIns="0" tIns="0" rIns="0" bIns="0" rtlCol="0" anchor="ctr"/>
           <a:lstStyle/>
           <a:p>
-            <a:pPr indent="0" marL="0">
+            <a:pPr marL="0" indent="0">
               <a:buNone/>
             </a:pPr>
             <a:r>
@@ -14312,7 +14193,7 @@
           <a:bodyPr wrap="square" lIns="0" tIns="0" rIns="0" bIns="0" rtlCol="0" anchor="ctr"/>
           <a:lstStyle/>
           <a:p>
-            <a:pPr indent="0" marL="0">
+            <a:pPr marL="0" indent="0">
               <a:lnSpc>
                 <a:spcPct val="110000"/>
               </a:lnSpc>
@@ -14332,7 +14213,7 @@
             <a:endParaRPr lang="en-US" sz="1400" dirty="0"/>
           </a:p>
           <a:p>
-            <a:pPr indent="0" marL="0">
+            <a:pPr marL="0" indent="0">
               <a:lnSpc>
                 <a:spcPct val="110000"/>
               </a:lnSpc>
@@ -14352,7 +14233,7 @@
             <a:endParaRPr lang="en-US" sz="1400" dirty="0"/>
           </a:p>
           <a:p>
-            <a:pPr indent="0" marL="0">
+            <a:pPr marL="0" indent="0">
               <a:lnSpc>
                 <a:spcPct val="110000"/>
               </a:lnSpc>
@@ -14361,7 +14242,7 @@
             <a:endParaRPr lang="en-US" sz="1400" dirty="0"/>
           </a:p>
           <a:p>
-            <a:pPr indent="0" marL="0">
+            <a:pPr marL="0" indent="0">
               <a:lnSpc>
                 <a:spcPct val="110000"/>
               </a:lnSpc>
@@ -14381,7 +14262,7 @@
             <a:endParaRPr lang="en-US" sz="1400" dirty="0"/>
           </a:p>
           <a:p>
-            <a:pPr indent="0" marL="0">
+            <a:pPr marL="0" indent="0">
               <a:lnSpc>
                 <a:spcPct val="110000"/>
               </a:lnSpc>
@@ -14423,7 +14304,7 @@
           <a:bodyPr wrap="square" lIns="0" tIns="0" rIns="0" bIns="0" rtlCol="0" anchor="ctr"/>
           <a:lstStyle/>
           <a:p>
-            <a:pPr indent="0" marL="0">
+            <a:pPr marL="0" indent="0">
               <a:buNone/>
             </a:pPr>
             <a:r>
@@ -14489,7 +14370,7 @@
           <a:bodyPr wrap="square" lIns="0" tIns="0" rIns="0" bIns="0" rtlCol="0" anchor="ctr"/>
           <a:lstStyle/>
           <a:p>
-            <a:pPr indent="0" marL="0">
+            <a:pPr marL="0" indent="0">
               <a:lnSpc>
                 <a:spcPct val="110000"/>
               </a:lnSpc>
@@ -14509,7 +14390,7 @@
             <a:endParaRPr lang="en-US" sz="1400" dirty="0"/>
           </a:p>
           <a:p>
-            <a:pPr indent="0" marL="0">
+            <a:pPr marL="0" indent="0">
               <a:lnSpc>
                 <a:spcPct val="110000"/>
               </a:lnSpc>
@@ -14551,7 +14432,7 @@
           <a:bodyPr wrap="square" lIns="0" tIns="0" rIns="0" bIns="0" rtlCol="0" anchor="ctr"/>
           <a:lstStyle/>
           <a:p>
-            <a:pPr indent="0" marL="0">
+            <a:pPr marL="0" indent="0">
               <a:buNone/>
             </a:pPr>
             <a:r>
@@ -14637,7 +14518,7 @@
           <a:bodyPr wrap="square" lIns="0" tIns="0" rIns="0" bIns="0" rtlCol="0" anchor="ctr"/>
           <a:lstStyle/>
           <a:p>
-            <a:pPr algn="ctr" indent="0" marL="0">
+            <a:pPr marL="0" indent="0" algn="ctr">
               <a:buNone/>
             </a:pPr>
             <a:r>
@@ -14676,7 +14557,7 @@
           <a:bodyPr wrap="square" lIns="0" tIns="0" rIns="0" bIns="0" rtlCol="0" anchor="ctr"/>
           <a:lstStyle/>
           <a:p>
-            <a:pPr indent="0" marL="0">
+            <a:pPr marL="0" indent="0">
               <a:buNone/>
             </a:pPr>
             <a:r>
@@ -14742,7 +14623,7 @@
           <a:bodyPr wrap="square" lIns="0" tIns="0" rIns="0" bIns="0" rtlCol="0" anchor="ctr"/>
           <a:lstStyle/>
           <a:p>
-            <a:pPr indent="0" marL="0">
+            <a:pPr marL="0" indent="0">
               <a:lnSpc>
                 <a:spcPct val="110000"/>
               </a:lnSpc>
@@ -14762,7 +14643,7 @@
             <a:endParaRPr lang="en-US" sz="1300" dirty="0"/>
           </a:p>
           <a:p>
-            <a:pPr indent="0" marL="0">
+            <a:pPr marL="0" indent="0">
               <a:lnSpc>
                 <a:spcPct val="110000"/>
               </a:lnSpc>
@@ -14782,7 +14663,7 @@
             <a:endParaRPr lang="en-US" sz="1300" dirty="0"/>
           </a:p>
           <a:p>
-            <a:pPr indent="0" marL="0">
+            <a:pPr marL="0" indent="0">
               <a:lnSpc>
                 <a:spcPct val="110000"/>
               </a:lnSpc>
@@ -14802,7 +14683,7 @@
             <a:endParaRPr lang="en-US" sz="1300" dirty="0"/>
           </a:p>
           <a:p>
-            <a:pPr indent="0" marL="0">
+            <a:pPr marL="0" indent="0">
               <a:lnSpc>
                 <a:spcPct val="110000"/>
               </a:lnSpc>
@@ -14844,7 +14725,7 @@
           <a:bodyPr wrap="square" lIns="0" tIns="0" rIns="0" bIns="0" rtlCol="0" anchor="ctr"/>
           <a:lstStyle/>
           <a:p>
-            <a:pPr indent="0" marL="0">
+            <a:pPr marL="0" indent="0">
               <a:buNone/>
             </a:pPr>
             <a:r>
@@ -14910,7 +14791,7 @@
           <a:bodyPr wrap="square" lIns="0" tIns="0" rIns="0" bIns="0" rtlCol="0" anchor="ctr"/>
           <a:lstStyle/>
           <a:p>
-            <a:pPr indent="0" marL="0">
+            <a:pPr marL="0" indent="0">
               <a:lnSpc>
                 <a:spcPct val="110000"/>
               </a:lnSpc>
@@ -14930,7 +14811,7 @@
             <a:endParaRPr lang="en-US" sz="1400" dirty="0"/>
           </a:p>
           <a:p>
-            <a:pPr indent="0" marL="0">
+            <a:pPr marL="0" indent="0">
               <a:lnSpc>
                 <a:spcPct val="110000"/>
               </a:lnSpc>
@@ -14950,7 +14831,7 @@
             <a:endParaRPr lang="en-US" sz="1400" dirty="0"/>
           </a:p>
           <a:p>
-            <a:pPr indent="0" marL="0">
+            <a:pPr marL="0" indent="0">
               <a:lnSpc>
                 <a:spcPct val="110000"/>
               </a:lnSpc>
@@ -14970,7 +14851,7 @@
             <a:endParaRPr lang="en-US" sz="1400" dirty="0"/>
           </a:p>
           <a:p>
-            <a:pPr indent="0" marL="0">
+            <a:pPr marL="0" indent="0">
               <a:lnSpc>
                 <a:spcPct val="110000"/>
               </a:lnSpc>
@@ -15012,7 +14893,7 @@
           <a:bodyPr wrap="square" lIns="0" tIns="0" rIns="0" bIns="0" rtlCol="0" anchor="ctr"/>
           <a:lstStyle/>
           <a:p>
-            <a:pPr indent="0" marL="0">
+            <a:pPr marL="0" indent="0">
               <a:buNone/>
             </a:pPr>
             <a:r>
@@ -15046,6 +14927,7 @@
         <a:solidFill>
           <a:srgbClr val="17132E"/>
         </a:solidFill>
+        <a:effectLst/>
       </p:bgPr>
     </p:bg>
     <p:spTree>
@@ -15105,7 +14987,7 @@
           <a:bodyPr wrap="square" lIns="0" tIns="0" rIns="0" bIns="0" rtlCol="0" anchor="ctr"/>
           <a:lstStyle/>
           <a:p>
-            <a:pPr algn="ctr" indent="0" marL="0">
+            <a:pPr marL="0" indent="0" algn="ctr">
               <a:buNone/>
             </a:pPr>
             <a:r>
@@ -15144,7 +15026,7 @@
           <a:bodyPr wrap="square" lIns="0" tIns="0" rIns="0" bIns="0" rtlCol="0" anchor="ctr"/>
           <a:lstStyle/>
           <a:p>
-            <a:pPr indent="0" marL="0">
+            <a:pPr marL="0" indent="0">
               <a:buNone/>
             </a:pPr>
             <a:r>
@@ -15210,7 +15092,7 @@
           <a:bodyPr wrap="square" lIns="0" tIns="0" rIns="0" bIns="0" rtlCol="0" anchor="ctr"/>
           <a:lstStyle/>
           <a:p>
-            <a:pPr algn="ctr" indent="0" marL="0">
+            <a:pPr marL="0" indent="0" algn="ctr">
               <a:buNone/>
             </a:pPr>
             <a:r>
@@ -15296,7 +15178,7 @@
           <a:bodyPr wrap="square" lIns="0" tIns="0" rIns="0" bIns="0" rtlCol="0" anchor="ctr"/>
           <a:lstStyle/>
           <a:p>
-            <a:pPr algn="ctr" indent="0" marL="0">
+            <a:pPr marL="0" indent="0" algn="ctr">
               <a:buNone/>
             </a:pPr>
             <a:r>
@@ -15335,7 +15217,7 @@
           <a:bodyPr wrap="square" lIns="0" tIns="0" rIns="0" bIns="0" rtlCol="0" anchor="ctr"/>
           <a:lstStyle/>
           <a:p>
-            <a:pPr indent="0" marL="0">
+            <a:pPr marL="0" indent="0">
               <a:buNone/>
             </a:pPr>
             <a:r>
@@ -15374,7 +15256,7 @@
           <a:bodyPr wrap="square" lIns="0" tIns="0" rIns="0" bIns="0" rtlCol="0" anchor="ctr"/>
           <a:lstStyle/>
           <a:p>
-            <a:pPr indent="0" marL="0">
+            <a:pPr marL="0" indent="0">
               <a:buNone/>
             </a:pPr>
             <a:r>
@@ -15413,7 +15295,7 @@
           <a:bodyPr wrap="square" lIns="0" tIns="0" rIns="0" bIns="0" rtlCol="0" anchor="ctr"/>
           <a:lstStyle/>
           <a:p>
-            <a:pPr indent="0" marL="0">
+            <a:pPr marL="0" indent="0">
               <a:buNone/>
             </a:pPr>
             <a:r>
@@ -15479,7 +15361,7 @@
           <a:bodyPr wrap="square" lIns="0" tIns="0" rIns="0" bIns="0" rtlCol="0" anchor="ctr"/>
           <a:lstStyle/>
           <a:p>
-            <a:pPr indent="0" marL="0">
+            <a:pPr marL="0" indent="0">
               <a:lnSpc>
                 <a:spcPct val="110000"/>
               </a:lnSpc>
@@ -15521,7 +15403,7 @@
           <a:bodyPr wrap="square" lIns="0" tIns="0" rIns="0" bIns="0" rtlCol="0" anchor="ctr"/>
           <a:lstStyle/>
           <a:p>
-            <a:pPr indent="0" marL="0">
+            <a:pPr marL="0" indent="0">
               <a:buNone/>
             </a:pPr>
             <a:r>
@@ -15587,7 +15469,7 @@
           <a:bodyPr wrap="square" lIns="0" tIns="0" rIns="0" bIns="0" rtlCol="0" anchor="ctr"/>
           <a:lstStyle/>
           <a:p>
-            <a:pPr indent="0" marL="0">
+            <a:pPr marL="0" indent="0">
               <a:lnSpc>
                 <a:spcPct val="110000"/>
               </a:lnSpc>
@@ -15676,7 +15558,7 @@
           <a:bodyPr wrap="square" lIns="0" tIns="0" rIns="0" bIns="0" rtlCol="0" anchor="ctr"/>
           <a:lstStyle/>
           <a:p>
-            <a:pPr algn="ctr" indent="0" marL="0">
+            <a:pPr marL="0" indent="0" algn="ctr">
               <a:buNone/>
             </a:pPr>
             <a:r>
@@ -15715,7 +15597,7 @@
           <a:bodyPr wrap="square" lIns="0" tIns="0" rIns="0" bIns="0" rtlCol="0" anchor="ctr"/>
           <a:lstStyle/>
           <a:p>
-            <a:pPr indent="0" marL="0">
+            <a:pPr marL="0" indent="0">
               <a:buNone/>
             </a:pPr>
             <a:r>
@@ -15754,7 +15636,7 @@
           <a:bodyPr wrap="square" lIns="0" tIns="0" rIns="0" bIns="0" rtlCol="0" anchor="ctr"/>
           <a:lstStyle/>
           <a:p>
-            <a:pPr indent="0" marL="0">
+            <a:pPr marL="0" indent="0">
               <a:buNone/>
             </a:pPr>
             <a:r>
@@ -15793,7 +15675,7 @@
           <a:bodyPr wrap="square" lIns="0" tIns="0" rIns="0" bIns="0" rtlCol="0" anchor="ctr"/>
           <a:lstStyle/>
           <a:p>
-            <a:pPr indent="0" marL="0">
+            <a:pPr marL="0" indent="0">
               <a:buNone/>
             </a:pPr>
             <a:r>
@@ -15859,7 +15741,7 @@
           <a:bodyPr wrap="square" lIns="0" tIns="0" rIns="0" bIns="0" rtlCol="0" anchor="ctr"/>
           <a:lstStyle/>
           <a:p>
-            <a:pPr indent="0" marL="0">
+            <a:pPr marL="0" indent="0">
               <a:lnSpc>
                 <a:spcPct val="110000"/>
               </a:lnSpc>
@@ -15901,7 +15783,7 @@
           <a:bodyPr wrap="square" lIns="0" tIns="0" rIns="0" bIns="0" rtlCol="0" anchor="ctr"/>
           <a:lstStyle/>
           <a:p>
-            <a:pPr indent="0" marL="0">
+            <a:pPr marL="0" indent="0">
               <a:buNone/>
             </a:pPr>
             <a:r>
@@ -15967,7 +15849,7 @@
           <a:bodyPr wrap="square" lIns="0" tIns="0" rIns="0" bIns="0" rtlCol="0" anchor="ctr"/>
           <a:lstStyle/>
           <a:p>
-            <a:pPr indent="0" marL="0">
+            <a:pPr marL="0" indent="0">
               <a:lnSpc>
                 <a:spcPct val="110000"/>
               </a:lnSpc>
@@ -16056,7 +15938,7 @@
           <a:bodyPr wrap="square" lIns="0" tIns="0" rIns="0" bIns="0" rtlCol="0" anchor="ctr"/>
           <a:lstStyle/>
           <a:p>
-            <a:pPr algn="ctr" indent="0" marL="0">
+            <a:pPr marL="0" indent="0" algn="ctr">
               <a:buNone/>
             </a:pPr>
             <a:r>
@@ -16095,7 +15977,7 @@
           <a:bodyPr wrap="square" lIns="0" tIns="0" rIns="0" bIns="0" rtlCol="0" anchor="ctr"/>
           <a:lstStyle/>
           <a:p>
-            <a:pPr indent="0" marL="0">
+            <a:pPr marL="0" indent="0">
               <a:buNone/>
             </a:pPr>
             <a:r>
@@ -16134,7 +16016,7 @@
           <a:bodyPr wrap="square" lIns="0" tIns="0" rIns="0" bIns="0" rtlCol="0" anchor="ctr"/>
           <a:lstStyle/>
           <a:p>
-            <a:pPr indent="0" marL="0">
+            <a:pPr marL="0" indent="0">
               <a:buNone/>
             </a:pPr>
             <a:r>
@@ -16173,7 +16055,7 @@
           <a:bodyPr wrap="square" lIns="0" tIns="0" rIns="0" bIns="0" rtlCol="0" anchor="ctr"/>
           <a:lstStyle/>
           <a:p>
-            <a:pPr indent="0" marL="0">
+            <a:pPr marL="0" indent="0">
               <a:buNone/>
             </a:pPr>
             <a:r>
@@ -16239,7 +16121,7 @@
           <a:bodyPr wrap="square" lIns="0" tIns="0" rIns="0" bIns="0" rtlCol="0" anchor="ctr"/>
           <a:lstStyle/>
           <a:p>
-            <a:pPr indent="0" marL="0">
+            <a:pPr marL="0" indent="0">
               <a:lnSpc>
                 <a:spcPct val="110000"/>
               </a:lnSpc>
@@ -16259,7 +16141,7 @@
             <a:endParaRPr lang="en-US" sz="1400" dirty="0"/>
           </a:p>
           <a:p>
-            <a:pPr indent="0" marL="0">
+            <a:pPr marL="0" indent="0">
               <a:lnSpc>
                 <a:spcPct val="110000"/>
               </a:lnSpc>
@@ -16301,7 +16183,7 @@
           <a:bodyPr wrap="square" lIns="0" tIns="0" rIns="0" bIns="0" rtlCol="0" anchor="ctr"/>
           <a:lstStyle/>
           <a:p>
-            <a:pPr indent="0" marL="0">
+            <a:pPr marL="0" indent="0">
               <a:buNone/>
             </a:pPr>
             <a:r>
@@ -16367,7 +16249,7 @@
           <a:bodyPr wrap="square" lIns="0" tIns="0" rIns="0" bIns="0" rtlCol="0" anchor="ctr"/>
           <a:lstStyle/>
           <a:p>
-            <a:pPr indent="0" marL="0">
+            <a:pPr marL="0" indent="0">
               <a:lnSpc>
                 <a:spcPct val="110000"/>
               </a:lnSpc>
@@ -16387,7 +16269,7 @@
             <a:endParaRPr lang="en-US" sz="1400" dirty="0"/>
           </a:p>
           <a:p>
-            <a:pPr indent="0" marL="0">
+            <a:pPr marL="0" indent="0">
               <a:lnSpc>
                 <a:spcPct val="110000"/>
               </a:lnSpc>
@@ -16424,6 +16306,7 @@
         <a:solidFill>
           <a:srgbClr val="17132E"/>
         </a:solidFill>
+        <a:effectLst/>
       </p:bgPr>
     </p:bg>
     <p:spTree>
@@ -16483,7 +16366,7 @@
           <a:bodyPr wrap="square" lIns="0" tIns="0" rIns="0" bIns="0" rtlCol="0" anchor="ctr"/>
           <a:lstStyle/>
           <a:p>
-            <a:pPr algn="ctr" indent="0" marL="0">
+            <a:pPr marL="0" indent="0" algn="ctr">
               <a:buNone/>
             </a:pPr>
             <a:r>
@@ -16522,7 +16405,7 @@
           <a:bodyPr wrap="square" lIns="0" tIns="0" rIns="0" bIns="0" rtlCol="0" anchor="ctr"/>
           <a:lstStyle/>
           <a:p>
-            <a:pPr indent="0" marL="0">
+            <a:pPr marL="0" indent="0">
               <a:buNone/>
             </a:pPr>
             <a:r>
@@ -16588,7 +16471,7 @@
           <a:bodyPr wrap="square" lIns="0" tIns="0" rIns="0" bIns="0" rtlCol="0" anchor="ctr"/>
           <a:lstStyle/>
           <a:p>
-            <a:pPr algn="ctr" indent="0" marL="0">
+            <a:pPr marL="0" indent="0" algn="ctr">
               <a:buNone/>
             </a:pPr>
             <a:r>
@@ -16674,7 +16557,7 @@
           <a:bodyPr wrap="square" lIns="0" tIns="0" rIns="0" bIns="0" rtlCol="0" anchor="ctr"/>
           <a:lstStyle/>
           <a:p>
-            <a:pPr algn="ctr" indent="0" marL="0">
+            <a:pPr marL="0" indent="0" algn="ctr">
               <a:buNone/>
             </a:pPr>
             <a:r>
@@ -16713,7 +16596,7 @@
           <a:bodyPr wrap="square" lIns="0" tIns="0" rIns="0" bIns="0" rtlCol="0" anchor="ctr"/>
           <a:lstStyle/>
           <a:p>
-            <a:pPr indent="0" marL="0">
+            <a:pPr marL="0" indent="0">
               <a:buNone/>
             </a:pPr>
             <a:r>
@@ -16779,7 +16662,7 @@
           <a:bodyPr wrap="square" lIns="0" tIns="0" rIns="0" bIns="0" rtlCol="0" anchor="ctr"/>
           <a:lstStyle/>
           <a:p>
-            <a:pPr indent="0" marL="0">
+            <a:pPr marL="0" indent="0">
               <a:lnSpc>
                 <a:spcPct val="110000"/>
               </a:lnSpc>
@@ -16799,7 +16682,7 @@
             <a:endParaRPr lang="en-US" sz="1500" dirty="0"/>
           </a:p>
           <a:p>
-            <a:pPr indent="0" marL="0">
+            <a:pPr marL="0" indent="0">
               <a:lnSpc>
                 <a:spcPct val="110000"/>
               </a:lnSpc>
@@ -16808,7 +16691,7 @@
             <a:endParaRPr lang="en-US" sz="1500" dirty="0"/>
           </a:p>
           <a:p>
-            <a:pPr indent="0" marL="0">
+            <a:pPr marL="0" indent="0">
               <a:lnSpc>
                 <a:spcPct val="110000"/>
               </a:lnSpc>
@@ -16828,7 +16711,7 @@
             <a:endParaRPr lang="en-US" sz="1500" dirty="0"/>
           </a:p>
           <a:p>
-            <a:pPr indent="0" marL="0">
+            <a:pPr marL="0" indent="0">
               <a:lnSpc>
                 <a:spcPct val="110000"/>
               </a:lnSpc>
@@ -16870,7 +16753,7 @@
           <a:bodyPr wrap="square" lIns="0" tIns="0" rIns="0" bIns="0" rtlCol="0" anchor="ctr"/>
           <a:lstStyle/>
           <a:p>
-            <a:pPr indent="0" marL="0">
+            <a:pPr marL="0" indent="0">
               <a:buNone/>
             </a:pPr>
             <a:r>
@@ -16936,7 +16819,7 @@
           <a:bodyPr wrap="square" lIns="0" tIns="0" rIns="0" bIns="0" rtlCol="0" anchor="ctr"/>
           <a:lstStyle/>
           <a:p>
-            <a:pPr indent="0" marL="0">
+            <a:pPr marL="0" indent="0">
               <a:lnSpc>
                 <a:spcPct val="110000"/>
               </a:lnSpc>
@@ -16978,7 +16861,7 @@
           <a:bodyPr wrap="square" lIns="0" tIns="0" rIns="0" bIns="0" rtlCol="0" anchor="ctr"/>
           <a:lstStyle/>
           <a:p>
-            <a:pPr indent="0" marL="0">
+            <a:pPr marL="0" indent="0">
               <a:buNone/>
             </a:pPr>
             <a:r>
@@ -17064,7 +16947,7 @@
           <a:bodyPr wrap="square" lIns="0" tIns="0" rIns="0" bIns="0" rtlCol="0" anchor="ctr"/>
           <a:lstStyle/>
           <a:p>
-            <a:pPr algn="ctr" indent="0" marL="0">
+            <a:pPr marL="0" indent="0" algn="ctr">
               <a:buNone/>
             </a:pPr>
             <a:r>
@@ -17103,7 +16986,7 @@
           <a:bodyPr wrap="square" lIns="0" tIns="0" rIns="0" bIns="0" rtlCol="0" anchor="ctr"/>
           <a:lstStyle/>
           <a:p>
-            <a:pPr indent="0" marL="0">
+            <a:pPr marL="0" indent="0">
               <a:buNone/>
             </a:pPr>
             <a:r>
@@ -17169,7 +17052,7 @@
           <a:bodyPr wrap="square" lIns="0" tIns="0" rIns="0" bIns="0" rtlCol="0" anchor="ctr"/>
           <a:lstStyle/>
           <a:p>
-            <a:pPr indent="0" marL="0">
+            <a:pPr marL="0" indent="0">
               <a:lnSpc>
                 <a:spcPct val="110000"/>
               </a:lnSpc>
@@ -17189,7 +17072,7 @@
             <a:endParaRPr lang="en-US" sz="1400" dirty="0"/>
           </a:p>
           <a:p>
-            <a:pPr indent="0" marL="0">
+            <a:pPr marL="0" indent="0">
               <a:lnSpc>
                 <a:spcPct val="110000"/>
               </a:lnSpc>
@@ -17198,7 +17081,7 @@
             <a:endParaRPr lang="en-US" sz="1400" dirty="0"/>
           </a:p>
           <a:p>
-            <a:pPr indent="0" marL="0">
+            <a:pPr marL="0" indent="0">
               <a:lnSpc>
                 <a:spcPct val="110000"/>
               </a:lnSpc>
@@ -17240,7 +17123,7 @@
           <a:bodyPr wrap="square" lIns="0" tIns="0" rIns="0" bIns="0" rtlCol="0" anchor="ctr"/>
           <a:lstStyle/>
           <a:p>
-            <a:pPr indent="0" marL="0">
+            <a:pPr marL="0" indent="0">
               <a:buNone/>
             </a:pPr>
             <a:r>
@@ -17306,7 +17189,7 @@
           <a:bodyPr wrap="square" lIns="0" tIns="0" rIns="0" bIns="0" rtlCol="0" anchor="ctr"/>
           <a:lstStyle/>
           <a:p>
-            <a:pPr indent="0" marL="0">
+            <a:pPr marL="0" indent="0">
               <a:lnSpc>
                 <a:spcPct val="110000"/>
               </a:lnSpc>
@@ -17348,7 +17231,7 @@
           <a:bodyPr wrap="square" lIns="0" tIns="0" rIns="0" bIns="0" rtlCol="0" anchor="ctr"/>
           <a:lstStyle/>
           <a:p>
-            <a:pPr indent="0" marL="0">
+            <a:pPr marL="0" indent="0">
               <a:buNone/>
             </a:pPr>
             <a:r>
@@ -17434,7 +17317,7 @@
           <a:bodyPr wrap="square" lIns="0" tIns="0" rIns="0" bIns="0" rtlCol="0" anchor="ctr"/>
           <a:lstStyle/>
           <a:p>
-            <a:pPr algn="ctr" indent="0" marL="0">
+            <a:pPr marL="0" indent="0" algn="ctr">
               <a:buNone/>
             </a:pPr>
             <a:r>
@@ -17473,7 +17356,7 @@
           <a:bodyPr wrap="square" lIns="0" tIns="0" rIns="0" bIns="0" rtlCol="0" anchor="ctr"/>
           <a:lstStyle/>
           <a:p>
-            <a:pPr indent="0" marL="0">
+            <a:pPr marL="0" indent="0">
               <a:buNone/>
             </a:pPr>
             <a:r>
@@ -17539,7 +17422,7 @@
           <a:bodyPr wrap="square" lIns="0" tIns="0" rIns="0" bIns="0" rtlCol="0" anchor="ctr"/>
           <a:lstStyle/>
           <a:p>
-            <a:pPr indent="0" marL="0">
+            <a:pPr marL="0" indent="0">
               <a:lnSpc>
                 <a:spcPct val="110000"/>
               </a:lnSpc>
@@ -17559,7 +17442,7 @@
             <a:endParaRPr lang="en-US" sz="1400" dirty="0"/>
           </a:p>
           <a:p>
-            <a:pPr indent="0" marL="0">
+            <a:pPr marL="0" indent="0">
               <a:lnSpc>
                 <a:spcPct val="110000"/>
               </a:lnSpc>
@@ -17579,7 +17462,7 @@
             <a:endParaRPr lang="en-US" sz="1400" dirty="0"/>
           </a:p>
           <a:p>
-            <a:pPr indent="0" marL="0">
+            <a:pPr marL="0" indent="0">
               <a:lnSpc>
                 <a:spcPct val="110000"/>
               </a:lnSpc>
@@ -17588,7 +17471,7 @@
             <a:endParaRPr lang="en-US" sz="1400" dirty="0"/>
           </a:p>
           <a:p>
-            <a:pPr indent="0" marL="0">
+            <a:pPr marL="0" indent="0">
               <a:lnSpc>
                 <a:spcPct val="110000"/>
               </a:lnSpc>
@@ -17608,7 +17491,7 @@
             <a:endParaRPr lang="en-US" sz="1400" dirty="0"/>
           </a:p>
           <a:p>
-            <a:pPr indent="0" marL="0">
+            <a:pPr marL="0" indent="0">
               <a:lnSpc>
                 <a:spcPct val="110000"/>
               </a:lnSpc>
@@ -17628,7 +17511,7 @@
             <a:endParaRPr lang="en-US" sz="1400" dirty="0"/>
           </a:p>
           <a:p>
-            <a:pPr indent="0" marL="0">
+            <a:pPr marL="0" indent="0">
               <a:lnSpc>
                 <a:spcPct val="110000"/>
               </a:lnSpc>
@@ -17670,7 +17553,7 @@
           <a:bodyPr wrap="square" lIns="0" tIns="0" rIns="0" bIns="0" rtlCol="0" anchor="ctr"/>
           <a:lstStyle/>
           <a:p>
-            <a:pPr indent="0" marL="0">
+            <a:pPr marL="0" indent="0">
               <a:buNone/>
             </a:pPr>
             <a:r>
@@ -17736,7 +17619,7 @@
           <a:bodyPr wrap="square" lIns="0" tIns="0" rIns="0" bIns="0" rtlCol="0" anchor="ctr"/>
           <a:lstStyle/>
           <a:p>
-            <a:pPr indent="0" marL="0">
+            <a:pPr marL="0" indent="0">
               <a:lnSpc>
                 <a:spcPct val="110000"/>
               </a:lnSpc>
@@ -17756,7 +17639,7 @@
             <a:endParaRPr lang="en-US" sz="1400" dirty="0"/>
           </a:p>
           <a:p>
-            <a:pPr indent="0" marL="0">
+            <a:pPr marL="0" indent="0">
               <a:lnSpc>
                 <a:spcPct val="110000"/>
               </a:lnSpc>
@@ -17798,7 +17681,7 @@
           <a:bodyPr wrap="square" lIns="0" tIns="0" rIns="0" bIns="0" rtlCol="0" anchor="ctr"/>
           <a:lstStyle/>
           <a:p>
-            <a:pPr indent="0" marL="0">
+            <a:pPr marL="0" indent="0">
               <a:buNone/>
             </a:pPr>
             <a:r>
@@ -17832,6 +17715,7 @@
         <a:solidFill>
           <a:srgbClr val="17132E"/>
         </a:solidFill>
+        <a:effectLst/>
       </p:bgPr>
     </p:bg>
     <p:spTree>
@@ -17891,7 +17775,7 @@
           <a:bodyPr wrap="square" lIns="0" tIns="0" rIns="0" bIns="0" rtlCol="0" anchor="ctr"/>
           <a:lstStyle/>
           <a:p>
-            <a:pPr algn="ctr" indent="0" marL="0">
+            <a:pPr marL="0" indent="0" algn="ctr">
               <a:buNone/>
             </a:pPr>
             <a:r>
@@ -17930,7 +17814,7 @@
           <a:bodyPr wrap="square" lIns="0" tIns="0" rIns="0" bIns="0" rtlCol="0" anchor="ctr"/>
           <a:lstStyle/>
           <a:p>
-            <a:pPr indent="0" marL="0">
+            <a:pPr marL="0" indent="0">
               <a:buNone/>
             </a:pPr>
             <a:r>
@@ -17996,7 +17880,7 @@
           <a:bodyPr wrap="square" lIns="0" tIns="0" rIns="0" bIns="0" rtlCol="0" anchor="ctr"/>
           <a:lstStyle/>
           <a:p>
-            <a:pPr algn="ctr" indent="0" marL="0">
+            <a:pPr marL="0" indent="0" algn="ctr">
               <a:buNone/>
             </a:pPr>
             <a:r>
@@ -18082,7 +17966,7 @@
           <a:bodyPr wrap="square" lIns="0" tIns="0" rIns="0" bIns="0" rtlCol="0" anchor="ctr"/>
           <a:lstStyle/>
           <a:p>
-            <a:pPr algn="ctr" indent="0" marL="0">
+            <a:pPr marL="0" indent="0" algn="ctr">
               <a:buNone/>
             </a:pPr>
             <a:r>
@@ -18121,7 +18005,7 @@
           <a:bodyPr wrap="square" lIns="0" tIns="0" rIns="0" bIns="0" rtlCol="0" anchor="ctr"/>
           <a:lstStyle/>
           <a:p>
-            <a:pPr indent="0" marL="0">
+            <a:pPr marL="0" indent="0">
               <a:buNone/>
             </a:pPr>
             <a:r>
@@ -18160,7 +18044,7 @@
           <a:bodyPr wrap="square" lIns="0" tIns="0" rIns="0" bIns="0" rtlCol="0" anchor="ctr"/>
           <a:lstStyle/>
           <a:p>
-            <a:pPr indent="0" marL="0">
+            <a:pPr marL="0" indent="0">
               <a:buNone/>
             </a:pPr>
             <a:r>
@@ -18199,7 +18083,7 @@
           <a:bodyPr wrap="square" lIns="0" tIns="0" rIns="0" bIns="0" rtlCol="0" anchor="ctr"/>
           <a:lstStyle/>
           <a:p>
-            <a:pPr indent="0" marL="0">
+            <a:pPr marL="0" indent="0">
               <a:buNone/>
             </a:pPr>
             <a:r>
@@ -18265,7 +18149,7 @@
           <a:bodyPr wrap="square" lIns="0" tIns="0" rIns="0" bIns="0" rtlCol="0" anchor="ctr"/>
           <a:lstStyle/>
           <a:p>
-            <a:pPr indent="0" marL="0">
+            <a:pPr marL="0" indent="0">
               <a:lnSpc>
                 <a:spcPct val="110000"/>
               </a:lnSpc>
@@ -18285,7 +18169,7 @@
             <a:endParaRPr lang="en-US" sz="1400" dirty="0"/>
           </a:p>
           <a:p>
-            <a:pPr indent="0" marL="0">
+            <a:pPr marL="0" indent="0">
               <a:lnSpc>
                 <a:spcPct val="110000"/>
               </a:lnSpc>
@@ -18327,7 +18211,7 @@
           <a:bodyPr wrap="square" lIns="0" tIns="0" rIns="0" bIns="0" rtlCol="0" anchor="ctr"/>
           <a:lstStyle/>
           <a:p>
-            <a:pPr indent="0" marL="0">
+            <a:pPr marL="0" indent="0">
               <a:buNone/>
             </a:pPr>
             <a:r>
@@ -18393,7 +18277,7 @@
           <a:bodyPr wrap="square" lIns="0" tIns="0" rIns="0" bIns="0" rtlCol="0" anchor="ctr"/>
           <a:lstStyle/>
           <a:p>
-            <a:pPr indent="0" marL="0">
+            <a:pPr marL="0" indent="0">
               <a:lnSpc>
                 <a:spcPct val="110000"/>
               </a:lnSpc>
@@ -18413,7 +18297,7 @@
             <a:endParaRPr lang="en-US" sz="1400" dirty="0"/>
           </a:p>
           <a:p>
-            <a:pPr indent="0" marL="0">
+            <a:pPr marL="0" indent="0">
               <a:lnSpc>
                 <a:spcPct val="110000"/>
               </a:lnSpc>
@@ -18502,7 +18386,7 @@
           <a:bodyPr wrap="square" lIns="0" tIns="0" rIns="0" bIns="0" rtlCol="0" anchor="ctr"/>
           <a:lstStyle/>
           <a:p>
-            <a:pPr algn="ctr" indent="0" marL="0">
+            <a:pPr marL="0" indent="0" algn="ctr">
               <a:buNone/>
             </a:pPr>
             <a:r>
@@ -18541,7 +18425,7 @@
           <a:bodyPr wrap="square" lIns="0" tIns="0" rIns="0" bIns="0" rtlCol="0" anchor="ctr"/>
           <a:lstStyle/>
           <a:p>
-            <a:pPr indent="0" marL="0">
+            <a:pPr marL="0" indent="0">
               <a:buNone/>
             </a:pPr>
             <a:r>
@@ -18580,7 +18464,7 @@
           <a:bodyPr wrap="square" lIns="0" tIns="0" rIns="0" bIns="0" rtlCol="0" anchor="ctr"/>
           <a:lstStyle/>
           <a:p>
-            <a:pPr indent="0" marL="0">
+            <a:pPr marL="0" indent="0">
               <a:buNone/>
             </a:pPr>
             <a:r>
@@ -18619,7 +18503,7 @@
           <a:bodyPr wrap="square" lIns="0" tIns="0" rIns="0" bIns="0" rtlCol="0" anchor="ctr"/>
           <a:lstStyle/>
           <a:p>
-            <a:pPr indent="0" marL="0">
+            <a:pPr marL="0" indent="0">
               <a:buNone/>
             </a:pPr>
             <a:r>
@@ -18685,7 +18569,7 @@
           <a:bodyPr wrap="square" lIns="0" tIns="0" rIns="0" bIns="0" rtlCol="0" anchor="ctr"/>
           <a:lstStyle/>
           <a:p>
-            <a:pPr indent="0" marL="0">
+            <a:pPr marL="0" indent="0">
               <a:lnSpc>
                 <a:spcPct val="110000"/>
               </a:lnSpc>
@@ -18727,7 +18611,7 @@
           <a:bodyPr wrap="square" lIns="0" tIns="0" rIns="0" bIns="0" rtlCol="0" anchor="ctr"/>
           <a:lstStyle/>
           <a:p>
-            <a:pPr indent="0" marL="0">
+            <a:pPr marL="0" indent="0">
               <a:buNone/>
             </a:pPr>
             <a:r>
@@ -18793,7 +18677,7 @@
           <a:bodyPr wrap="square" lIns="0" tIns="0" rIns="0" bIns="0" rtlCol="0" anchor="ctr"/>
           <a:lstStyle/>
           <a:p>
-            <a:pPr indent="0" marL="0">
+            <a:pPr marL="0" indent="0">
               <a:lnSpc>
                 <a:spcPct val="110000"/>
               </a:lnSpc>
@@ -18813,7 +18697,7 @@
             <a:endParaRPr lang="en-US" sz="1400" dirty="0"/>
           </a:p>
           <a:p>
-            <a:pPr indent="0" marL="0">
+            <a:pPr marL="0" indent="0">
               <a:lnSpc>
                 <a:spcPct val="110000"/>
               </a:lnSpc>
@@ -18902,7 +18786,7 @@
           <a:bodyPr wrap="square" lIns="0" tIns="0" rIns="0" bIns="0" rtlCol="0" anchor="ctr"/>
           <a:lstStyle/>
           <a:p>
-            <a:pPr algn="ctr" indent="0" marL="0">
+            <a:pPr marL="0" indent="0" algn="ctr">
               <a:buNone/>
             </a:pPr>
             <a:r>
@@ -18941,7 +18825,7 @@
           <a:bodyPr wrap="square" lIns="0" tIns="0" rIns="0" bIns="0" rtlCol="0" anchor="ctr"/>
           <a:lstStyle/>
           <a:p>
-            <a:pPr indent="0" marL="0">
+            <a:pPr marL="0" indent="0">
               <a:buNone/>
             </a:pPr>
             <a:r>
@@ -18980,7 +18864,7 @@
           <a:bodyPr wrap="square" lIns="0" tIns="0" rIns="0" bIns="0" rtlCol="0" anchor="ctr"/>
           <a:lstStyle/>
           <a:p>
-            <a:pPr indent="0" marL="0">
+            <a:pPr marL="0" indent="0">
               <a:buNone/>
             </a:pPr>
             <a:r>
@@ -19019,7 +18903,7 @@
           <a:bodyPr wrap="square" lIns="0" tIns="0" rIns="0" bIns="0" rtlCol="0" anchor="ctr"/>
           <a:lstStyle/>
           <a:p>
-            <a:pPr indent="0" marL="0">
+            <a:pPr marL="0" indent="0">
               <a:buNone/>
             </a:pPr>
             <a:r>
@@ -19085,7 +18969,7 @@
           <a:bodyPr wrap="square" lIns="0" tIns="0" rIns="0" bIns="0" rtlCol="0" anchor="ctr"/>
           <a:lstStyle/>
           <a:p>
-            <a:pPr indent="0" marL="0">
+            <a:pPr marL="0" indent="0">
               <a:lnSpc>
                 <a:spcPct val="110000"/>
               </a:lnSpc>
@@ -19105,7 +18989,7 @@
             <a:endParaRPr lang="en-US" sz="1400" dirty="0"/>
           </a:p>
           <a:p>
-            <a:pPr indent="0" marL="0">
+            <a:pPr marL="0" indent="0">
               <a:lnSpc>
                 <a:spcPct val="110000"/>
               </a:lnSpc>
@@ -19147,7 +19031,7 @@
           <a:bodyPr wrap="square" lIns="0" tIns="0" rIns="0" bIns="0" rtlCol="0" anchor="ctr"/>
           <a:lstStyle/>
           <a:p>
-            <a:pPr indent="0" marL="0">
+            <a:pPr marL="0" indent="0">
               <a:buNone/>
             </a:pPr>
             <a:r>
@@ -19213,7 +19097,7 @@
           <a:bodyPr wrap="square" lIns="0" tIns="0" rIns="0" bIns="0" rtlCol="0" anchor="ctr"/>
           <a:lstStyle/>
           <a:p>
-            <a:pPr indent="0" marL="0">
+            <a:pPr marL="0" indent="0">
               <a:lnSpc>
                 <a:spcPct val="110000"/>
               </a:lnSpc>
@@ -19233,7 +19117,7 @@
             <a:endParaRPr lang="en-US" sz="1400" dirty="0"/>
           </a:p>
           <a:p>
-            <a:pPr indent="0" marL="0">
+            <a:pPr marL="0" indent="0">
               <a:lnSpc>
                 <a:spcPct val="110000"/>
               </a:lnSpc>
@@ -19270,6 +19154,7 @@
         <a:solidFill>
           <a:srgbClr val="17132E"/>
         </a:solidFill>
+        <a:effectLst/>
       </p:bgPr>
     </p:bg>
     <p:spTree>
@@ -19329,7 +19214,7 @@
           <a:bodyPr wrap="square" lIns="0" tIns="0" rIns="0" bIns="0" rtlCol="0" anchor="ctr"/>
           <a:lstStyle/>
           <a:p>
-            <a:pPr algn="ctr" indent="0" marL="0">
+            <a:pPr marL="0" indent="0" algn="ctr">
               <a:buNone/>
             </a:pPr>
             <a:r>
@@ -19368,7 +19253,7 @@
           <a:bodyPr wrap="square" lIns="0" tIns="0" rIns="0" bIns="0" rtlCol="0" anchor="ctr"/>
           <a:lstStyle/>
           <a:p>
-            <a:pPr indent="0" marL="0">
+            <a:pPr marL="0" indent="0">
               <a:buNone/>
             </a:pPr>
             <a:r>
@@ -19434,7 +19319,7 @@
           <a:bodyPr wrap="square" lIns="0" tIns="0" rIns="0" bIns="0" rtlCol="0" anchor="ctr"/>
           <a:lstStyle/>
           <a:p>
-            <a:pPr algn="ctr" indent="0" marL="0">
+            <a:pPr marL="0" indent="0" algn="ctr">
               <a:buNone/>
             </a:pPr>
             <a:r>
@@ -19520,7 +19405,7 @@
           <a:bodyPr wrap="square" lIns="0" tIns="0" rIns="0" bIns="0" rtlCol="0" anchor="ctr"/>
           <a:lstStyle/>
           <a:p>
-            <a:pPr algn="ctr" indent="0" marL="0">
+            <a:pPr marL="0" indent="0" algn="ctr">
               <a:buNone/>
             </a:pPr>
             <a:r>
@@ -19559,7 +19444,7 @@
           <a:bodyPr wrap="square" lIns="0" tIns="0" rIns="0" bIns="0" rtlCol="0" anchor="ctr"/>
           <a:lstStyle/>
           <a:p>
-            <a:pPr indent="0" marL="0">
+            <a:pPr marL="0" indent="0">
               <a:buNone/>
             </a:pPr>
             <a:r>
@@ -19625,7 +19510,7 @@
           <a:bodyPr wrap="square" lIns="0" tIns="0" rIns="0" bIns="0" rtlCol="0" anchor="ctr"/>
           <a:lstStyle/>
           <a:p>
-            <a:pPr indent="0" marL="0">
+            <a:pPr marL="0" indent="0">
               <a:lnSpc>
                 <a:spcPct val="110000"/>
               </a:lnSpc>
@@ -19645,7 +19530,7 @@
             <a:endParaRPr lang="en-US" sz="1400" dirty="0"/>
           </a:p>
           <a:p>
-            <a:pPr indent="0" marL="0">
+            <a:pPr marL="0" indent="0">
               <a:lnSpc>
                 <a:spcPct val="110000"/>
               </a:lnSpc>
@@ -19665,7 +19550,7 @@
             <a:endParaRPr lang="en-US" sz="1400" dirty="0"/>
           </a:p>
           <a:p>
-            <a:pPr indent="0" marL="0">
+            <a:pPr marL="0" indent="0">
               <a:lnSpc>
                 <a:spcPct val="110000"/>
               </a:lnSpc>
@@ -19674,7 +19559,7 @@
             <a:endParaRPr lang="en-US" sz="1400" dirty="0"/>
           </a:p>
           <a:p>
-            <a:pPr indent="0" marL="0">
+            <a:pPr marL="0" indent="0">
               <a:lnSpc>
                 <a:spcPct val="110000"/>
               </a:lnSpc>
@@ -19694,7 +19579,7 @@
             <a:endParaRPr lang="en-US" sz="1400" dirty="0"/>
           </a:p>
           <a:p>
-            <a:pPr indent="0" marL="0">
+            <a:pPr marL="0" indent="0">
               <a:lnSpc>
                 <a:spcPct val="110000"/>
               </a:lnSpc>
@@ -19736,7 +19621,7 @@
           <a:bodyPr wrap="square" lIns="0" tIns="0" rIns="0" bIns="0" rtlCol="0" anchor="ctr"/>
           <a:lstStyle/>
           <a:p>
-            <a:pPr indent="0" marL="0">
+            <a:pPr marL="0" indent="0">
               <a:buNone/>
             </a:pPr>
             <a:r>
@@ -19802,7 +19687,7 @@
           <a:bodyPr wrap="square" lIns="0" tIns="0" rIns="0" bIns="0" rtlCol="0" anchor="ctr"/>
           <a:lstStyle/>
           <a:p>
-            <a:pPr indent="0" marL="0">
+            <a:pPr marL="0" indent="0">
               <a:lnSpc>
                 <a:spcPct val="110000"/>
               </a:lnSpc>
@@ -19822,7 +19707,7 @@
             <a:endParaRPr lang="en-US" sz="1400" dirty="0"/>
           </a:p>
           <a:p>
-            <a:pPr indent="0" marL="0">
+            <a:pPr marL="0" indent="0">
               <a:lnSpc>
                 <a:spcPct val="110000"/>
               </a:lnSpc>
@@ -19864,7 +19749,7 @@
           <a:bodyPr wrap="square" lIns="0" tIns="0" rIns="0" bIns="0" rtlCol="0" anchor="ctr"/>
           <a:lstStyle/>
           <a:p>
-            <a:pPr indent="0" marL="0">
+            <a:pPr marL="0" indent="0">
               <a:buNone/>
             </a:pPr>
             <a:r>
@@ -19950,7 +19835,7 @@
           <a:bodyPr wrap="square" lIns="0" tIns="0" rIns="0" bIns="0" rtlCol="0" anchor="ctr"/>
           <a:lstStyle/>
           <a:p>
-            <a:pPr algn="ctr" indent="0" marL="0">
+            <a:pPr marL="0" indent="0" algn="ctr">
               <a:buNone/>
             </a:pPr>
             <a:r>
@@ -19989,7 +19874,7 @@
           <a:bodyPr wrap="square" lIns="0" tIns="0" rIns="0" bIns="0" rtlCol="0" anchor="ctr"/>
           <a:lstStyle/>
           <a:p>
-            <a:pPr indent="0" marL="0">
+            <a:pPr marL="0" indent="0">
               <a:buNone/>
             </a:pPr>
             <a:r>
@@ -20055,7 +19940,7 @@
           <a:bodyPr wrap="square" lIns="0" tIns="0" rIns="0" bIns="0" rtlCol="0" anchor="ctr"/>
           <a:lstStyle/>
           <a:p>
-            <a:pPr indent="0" marL="0">
+            <a:pPr marL="0" indent="0">
               <a:lnSpc>
                 <a:spcPct val="110000"/>
               </a:lnSpc>
@@ -20075,7 +19960,7 @@
             <a:endParaRPr lang="en-US" sz="1400" dirty="0"/>
           </a:p>
           <a:p>
-            <a:pPr indent="0" marL="0">
+            <a:pPr marL="0" indent="0">
               <a:lnSpc>
                 <a:spcPct val="110000"/>
               </a:lnSpc>
@@ -20084,7 +19969,7 @@
             <a:endParaRPr lang="en-US" sz="1400" dirty="0"/>
           </a:p>
           <a:p>
-            <a:pPr indent="0" marL="0">
+            <a:pPr marL="0" indent="0">
               <a:lnSpc>
                 <a:spcPct val="110000"/>
               </a:lnSpc>
@@ -20104,7 +19989,7 @@
             <a:endParaRPr lang="en-US" sz="1400" dirty="0"/>
           </a:p>
           <a:p>
-            <a:pPr indent="0" marL="0">
+            <a:pPr marL="0" indent="0">
               <a:lnSpc>
                 <a:spcPct val="110000"/>
               </a:lnSpc>
@@ -20146,7 +20031,7 @@
           <a:bodyPr wrap="square" lIns="0" tIns="0" rIns="0" bIns="0" rtlCol="0" anchor="ctr"/>
           <a:lstStyle/>
           <a:p>
-            <a:pPr indent="0" marL="0">
+            <a:pPr marL="0" indent="0">
               <a:buNone/>
             </a:pPr>
             <a:r>
@@ -20212,7 +20097,7 @@
           <a:bodyPr wrap="square" lIns="0" tIns="0" rIns="0" bIns="0" rtlCol="0" anchor="ctr"/>
           <a:lstStyle/>
           <a:p>
-            <a:pPr indent="0" marL="0">
+            <a:pPr marL="0" indent="0">
               <a:lnSpc>
                 <a:spcPct val="110000"/>
               </a:lnSpc>
@@ -20232,7 +20117,7 @@
             <a:endParaRPr lang="en-US" sz="1400" dirty="0"/>
           </a:p>
           <a:p>
-            <a:pPr indent="0" marL="0">
+            <a:pPr marL="0" indent="0">
               <a:lnSpc>
                 <a:spcPct val="110000"/>
               </a:lnSpc>
@@ -20274,7 +20159,7 @@
           <a:bodyPr wrap="square" lIns="0" tIns="0" rIns="0" bIns="0" rtlCol="0" anchor="ctr"/>
           <a:lstStyle/>
           <a:p>
-            <a:pPr indent="0" marL="0">
+            <a:pPr marL="0" indent="0">
               <a:buNone/>
             </a:pPr>
             <a:r>
@@ -20360,7 +20245,7 @@
           <a:bodyPr wrap="square" lIns="0" tIns="0" rIns="0" bIns="0" rtlCol="0" anchor="ctr"/>
           <a:lstStyle/>
           <a:p>
-            <a:pPr algn="ctr" indent="0" marL="0">
+            <a:pPr marL="0" indent="0" algn="ctr">
               <a:buNone/>
             </a:pPr>
             <a:r>
@@ -20399,7 +20284,7 @@
           <a:bodyPr wrap="square" lIns="0" tIns="0" rIns="0" bIns="0" rtlCol="0" anchor="ctr"/>
           <a:lstStyle/>
           <a:p>
-            <a:pPr indent="0" marL="0">
+            <a:pPr marL="0" indent="0">
               <a:buNone/>
             </a:pPr>
             <a:r>
@@ -20465,7 +20350,7 @@
           <a:bodyPr wrap="square" lIns="0" tIns="0" rIns="0" bIns="0" rtlCol="0" anchor="ctr"/>
           <a:lstStyle/>
           <a:p>
-            <a:pPr indent="0" marL="0">
+            <a:pPr marL="0" indent="0">
               <a:lnSpc>
                 <a:spcPct val="110000"/>
               </a:lnSpc>
@@ -20485,7 +20370,7 @@
             <a:endParaRPr lang="en-US" sz="1300" dirty="0"/>
           </a:p>
           <a:p>
-            <a:pPr indent="0" marL="0">
+            <a:pPr marL="0" indent="0">
               <a:lnSpc>
                 <a:spcPct val="110000"/>
               </a:lnSpc>
@@ -20505,7 +20390,7 @@
             <a:endParaRPr lang="en-US" sz="1300" dirty="0"/>
           </a:p>
           <a:p>
-            <a:pPr indent="0" marL="0">
+            <a:pPr marL="0" indent="0">
               <a:lnSpc>
                 <a:spcPct val="110000"/>
               </a:lnSpc>
@@ -20514,7 +20399,7 @@
             <a:endParaRPr lang="en-US" sz="1300" dirty="0"/>
           </a:p>
           <a:p>
-            <a:pPr indent="0" marL="0">
+            <a:pPr marL="0" indent="0">
               <a:lnSpc>
                 <a:spcPct val="110000"/>
               </a:lnSpc>
@@ -20534,7 +20419,7 @@
             <a:endParaRPr lang="en-US" sz="1300" dirty="0"/>
           </a:p>
           <a:p>
-            <a:pPr indent="0" marL="0">
+            <a:pPr marL="0" indent="0">
               <a:lnSpc>
                 <a:spcPct val="110000"/>
               </a:lnSpc>
@@ -20576,7 +20461,7 @@
           <a:bodyPr wrap="square" lIns="0" tIns="0" rIns="0" bIns="0" rtlCol="0" anchor="ctr"/>
           <a:lstStyle/>
           <a:p>
-            <a:pPr indent="0" marL="0">
+            <a:pPr marL="0" indent="0">
               <a:buNone/>
             </a:pPr>
             <a:r>
@@ -20642,7 +20527,7 @@
           <a:bodyPr wrap="square" lIns="0" tIns="0" rIns="0" bIns="0" rtlCol="0" anchor="ctr"/>
           <a:lstStyle/>
           <a:p>
-            <a:pPr indent="0" marL="0">
+            <a:pPr marL="0" indent="0">
               <a:lnSpc>
                 <a:spcPct val="110000"/>
               </a:lnSpc>
@@ -20662,7 +20547,7 @@
             <a:endParaRPr lang="en-US" sz="1400" dirty="0"/>
           </a:p>
           <a:p>
-            <a:pPr indent="0" marL="0">
+            <a:pPr marL="0" indent="0">
               <a:lnSpc>
                 <a:spcPct val="110000"/>
               </a:lnSpc>
@@ -20704,7 +20589,7 @@
           <a:bodyPr wrap="square" lIns="0" tIns="0" rIns="0" bIns="0" rtlCol="0" anchor="ctr"/>
           <a:lstStyle/>
           <a:p>
-            <a:pPr indent="0" marL="0">
+            <a:pPr marL="0" indent="0">
               <a:buNone/>
             </a:pPr>
             <a:r>
@@ -20738,6 +20623,7 @@
         <a:solidFill>
           <a:srgbClr val="17132E"/>
         </a:solidFill>
+        <a:effectLst/>
       </p:bgPr>
     </p:bg>
     <p:spTree>
@@ -20797,7 +20683,7 @@
           <a:bodyPr wrap="square" lIns="0" tIns="0" rIns="0" bIns="0" rtlCol="0" anchor="ctr"/>
           <a:lstStyle/>
           <a:p>
-            <a:pPr algn="ctr" indent="0" marL="0">
+            <a:pPr marL="0" indent="0" algn="ctr">
               <a:buNone/>
             </a:pPr>
             <a:r>
@@ -20836,7 +20722,7 @@
           <a:bodyPr wrap="square" lIns="0" tIns="0" rIns="0" bIns="0" rtlCol="0" anchor="ctr"/>
           <a:lstStyle/>
           <a:p>
-            <a:pPr indent="0" marL="0">
+            <a:pPr marL="0" indent="0">
               <a:buNone/>
             </a:pPr>
             <a:r>
@@ -20902,7 +20788,7 @@
           <a:bodyPr wrap="square" lIns="0" tIns="0" rIns="0" bIns="0" rtlCol="0" anchor="ctr"/>
           <a:lstStyle/>
           <a:p>
-            <a:pPr algn="ctr" indent="0" marL="0">
+            <a:pPr marL="0" indent="0" algn="ctr">
               <a:buNone/>
             </a:pPr>
             <a:r>
@@ -20988,7 +20874,7 @@
           <a:bodyPr wrap="square" lIns="0" tIns="0" rIns="0" bIns="0" rtlCol="0" anchor="ctr"/>
           <a:lstStyle/>
           <a:p>
-            <a:pPr algn="ctr" indent="0" marL="0">
+            <a:pPr marL="0" indent="0" algn="ctr">
               <a:buNone/>
             </a:pPr>
             <a:r>
@@ -21027,7 +20913,7 @@
           <a:bodyPr wrap="square" lIns="0" tIns="0" rIns="0" bIns="0" rtlCol="0" anchor="ctr"/>
           <a:lstStyle/>
           <a:p>
-            <a:pPr indent="0" marL="0">
+            <a:pPr marL="0" indent="0">
               <a:buNone/>
             </a:pPr>
             <a:r>
@@ -21066,7 +20952,7 @@
           <a:bodyPr wrap="square" lIns="0" tIns="0" rIns="0" bIns="0" rtlCol="0" anchor="ctr"/>
           <a:lstStyle/>
           <a:p>
-            <a:pPr indent="0" marL="0">
+            <a:pPr marL="0" indent="0">
               <a:buNone/>
             </a:pPr>
             <a:r>
@@ -21105,7 +20991,7 @@
           <a:bodyPr wrap="square" lIns="0" tIns="0" rIns="0" bIns="0" rtlCol="0" anchor="ctr"/>
           <a:lstStyle/>
           <a:p>
-            <a:pPr indent="0" marL="0">
+            <a:pPr marL="0" indent="0">
               <a:buNone/>
             </a:pPr>
             <a:r>
@@ -21171,7 +21057,7 @@
           <a:bodyPr wrap="square" lIns="0" tIns="0" rIns="0" bIns="0" rtlCol="0" anchor="ctr"/>
           <a:lstStyle/>
           <a:p>
-            <a:pPr indent="0" marL="0">
+            <a:pPr marL="0" indent="0">
               <a:lnSpc>
                 <a:spcPct val="110000"/>
               </a:lnSpc>
@@ -21213,7 +21099,7 @@
           <a:bodyPr wrap="square" lIns="0" tIns="0" rIns="0" bIns="0" rtlCol="0" anchor="ctr"/>
           <a:lstStyle/>
           <a:p>
-            <a:pPr indent="0" marL="0">
+            <a:pPr marL="0" indent="0">
               <a:buNone/>
             </a:pPr>
             <a:r>
@@ -21279,7 +21165,7 @@
           <a:bodyPr wrap="square" lIns="0" tIns="0" rIns="0" bIns="0" rtlCol="0" anchor="ctr"/>
           <a:lstStyle/>
           <a:p>
-            <a:pPr indent="0" marL="0">
+            <a:pPr marL="0" indent="0">
               <a:lnSpc>
                 <a:spcPct val="110000"/>
               </a:lnSpc>
@@ -21368,7 +21254,7 @@
           <a:bodyPr wrap="square" lIns="0" tIns="0" rIns="0" bIns="0" rtlCol="0" anchor="ctr"/>
           <a:lstStyle/>
           <a:p>
-            <a:pPr algn="ctr" indent="0" marL="0">
+            <a:pPr marL="0" indent="0" algn="ctr">
               <a:buNone/>
             </a:pPr>
             <a:r>
@@ -21407,7 +21293,7 @@
           <a:bodyPr wrap="square" lIns="0" tIns="0" rIns="0" bIns="0" rtlCol="0" anchor="ctr"/>
           <a:lstStyle/>
           <a:p>
-            <a:pPr indent="0" marL="0">
+            <a:pPr marL="0" indent="0">
               <a:buNone/>
             </a:pPr>
             <a:r>
@@ -21446,7 +21332,7 @@
           <a:bodyPr wrap="square" lIns="0" tIns="0" rIns="0" bIns="0" rtlCol="0" anchor="ctr"/>
           <a:lstStyle/>
           <a:p>
-            <a:pPr indent="0" marL="0">
+            <a:pPr marL="0" indent="0">
               <a:buNone/>
             </a:pPr>
             <a:r>
@@ -21485,7 +21371,7 @@
           <a:bodyPr wrap="square" lIns="0" tIns="0" rIns="0" bIns="0" rtlCol="0" anchor="ctr"/>
           <a:lstStyle/>
           <a:p>
-            <a:pPr indent="0" marL="0">
+            <a:pPr marL="0" indent="0">
               <a:buNone/>
             </a:pPr>
             <a:r>
@@ -21551,7 +21437,7 @@
           <a:bodyPr wrap="square" lIns="0" tIns="0" rIns="0" bIns="0" rtlCol="0" anchor="ctr"/>
           <a:lstStyle/>
           <a:p>
-            <a:pPr indent="0" marL="0">
+            <a:pPr marL="0" indent="0">
               <a:lnSpc>
                 <a:spcPct val="110000"/>
               </a:lnSpc>
@@ -21571,7 +21457,7 @@
             <a:endParaRPr lang="en-US" sz="1400" dirty="0"/>
           </a:p>
           <a:p>
-            <a:pPr indent="0" marL="0">
+            <a:pPr marL="0" indent="0">
               <a:lnSpc>
                 <a:spcPct val="110000"/>
               </a:lnSpc>
@@ -21613,7 +21499,7 @@
           <a:bodyPr wrap="square" lIns="0" tIns="0" rIns="0" bIns="0" rtlCol="0" anchor="ctr"/>
           <a:lstStyle/>
           <a:p>
-            <a:pPr indent="0" marL="0">
+            <a:pPr marL="0" indent="0">
               <a:buNone/>
             </a:pPr>
             <a:r>
@@ -21679,7 +21565,7 @@
           <a:bodyPr wrap="square" lIns="0" tIns="0" rIns="0" bIns="0" rtlCol="0" anchor="ctr"/>
           <a:lstStyle/>
           <a:p>
-            <a:pPr indent="0" marL="0">
+            <a:pPr marL="0" indent="0">
               <a:lnSpc>
                 <a:spcPct val="110000"/>
               </a:lnSpc>
@@ -21699,7 +21585,7 @@
             <a:endParaRPr lang="en-US" sz="1400" dirty="0"/>
           </a:p>
           <a:p>
-            <a:pPr indent="0" marL="0">
+            <a:pPr marL="0" indent="0">
               <a:lnSpc>
                 <a:spcPct val="110000"/>
               </a:lnSpc>
@@ -21719,7 +21605,7 @@
             <a:endParaRPr lang="en-US" sz="1400" dirty="0"/>
           </a:p>
           <a:p>
-            <a:pPr indent="0" marL="0">
+            <a:pPr marL="0" indent="0">
               <a:lnSpc>
                 <a:spcPct val="110000"/>
               </a:lnSpc>
@@ -21739,7 +21625,7 @@
             <a:endParaRPr lang="en-US" sz="1400" dirty="0"/>
           </a:p>
           <a:p>
-            <a:pPr indent="0" marL="0">
+            <a:pPr marL="0" indent="0">
               <a:lnSpc>
                 <a:spcPct val="110000"/>
               </a:lnSpc>
@@ -21828,7 +21714,7 @@
           <a:bodyPr wrap="square" lIns="0" tIns="0" rIns="0" bIns="0" rtlCol="0" anchor="ctr"/>
           <a:lstStyle/>
           <a:p>
-            <a:pPr algn="ctr" indent="0" marL="0">
+            <a:pPr marL="0" indent="0" algn="ctr">
               <a:buNone/>
             </a:pPr>
             <a:r>
@@ -21867,7 +21753,7 @@
           <a:bodyPr wrap="square" lIns="0" tIns="0" rIns="0" bIns="0" rtlCol="0" anchor="ctr"/>
           <a:lstStyle/>
           <a:p>
-            <a:pPr indent="0" marL="0">
+            <a:pPr marL="0" indent="0">
               <a:buNone/>
             </a:pPr>
             <a:r>
@@ -21906,7 +21792,7 @@
           <a:bodyPr wrap="square" lIns="0" tIns="0" rIns="0" bIns="0" rtlCol="0" anchor="ctr"/>
           <a:lstStyle/>
           <a:p>
-            <a:pPr indent="0" marL="0">
+            <a:pPr marL="0" indent="0">
               <a:buNone/>
             </a:pPr>
             <a:r>
@@ -21945,7 +21831,7 @@
           <a:bodyPr wrap="square" lIns="0" tIns="0" rIns="0" bIns="0" rtlCol="0" anchor="ctr"/>
           <a:lstStyle/>
           <a:p>
-            <a:pPr indent="0" marL="0">
+            <a:pPr marL="0" indent="0">
               <a:buNone/>
             </a:pPr>
             <a:r>
@@ -22011,7 +21897,7 @@
           <a:bodyPr wrap="square" lIns="0" tIns="0" rIns="0" bIns="0" rtlCol="0" anchor="ctr"/>
           <a:lstStyle/>
           <a:p>
-            <a:pPr indent="0" marL="0">
+            <a:pPr marL="0" indent="0">
               <a:lnSpc>
                 <a:spcPct val="110000"/>
               </a:lnSpc>
@@ -22031,7 +21917,7 @@
             <a:endParaRPr lang="en-US" sz="1400" dirty="0"/>
           </a:p>
           <a:p>
-            <a:pPr indent="0" marL="0">
+            <a:pPr marL="0" indent="0">
               <a:lnSpc>
                 <a:spcPct val="110000"/>
               </a:lnSpc>
@@ -22073,7 +21959,7 @@
           <a:bodyPr wrap="square" lIns="0" tIns="0" rIns="0" bIns="0" rtlCol="0" anchor="ctr"/>
           <a:lstStyle/>
           <a:p>
-            <a:pPr indent="0" marL="0">
+            <a:pPr marL="0" indent="0">
               <a:buNone/>
             </a:pPr>
             <a:r>
@@ -22139,7 +22025,7 @@
           <a:bodyPr wrap="square" lIns="0" tIns="0" rIns="0" bIns="0" rtlCol="0" anchor="ctr"/>
           <a:lstStyle/>
           <a:p>
-            <a:pPr indent="0" marL="0">
+            <a:pPr marL="0" indent="0">
               <a:lnSpc>
                 <a:spcPct val="110000"/>
               </a:lnSpc>
@@ -22159,7 +22045,7 @@
             <a:endParaRPr lang="en-US" sz="1400" dirty="0"/>
           </a:p>
           <a:p>
-            <a:pPr indent="0" marL="0">
+            <a:pPr marL="0" indent="0">
               <a:lnSpc>
                 <a:spcPct val="110000"/>
               </a:lnSpc>
@@ -22179,7 +22065,7 @@
             <a:endParaRPr lang="en-US" sz="1400" dirty="0"/>
           </a:p>
           <a:p>
-            <a:pPr indent="0" marL="0">
+            <a:pPr marL="0" indent="0">
               <a:lnSpc>
                 <a:spcPct val="110000"/>
               </a:lnSpc>
@@ -22501,4 +22387,319 @@
     </a:ext>
   </a:extLst>
 </a:theme>
+</file>
+
+<file path=ppt/theme/theme2.xml><?xml version="1.0" encoding="utf-8"?>
+<a:theme xmlns:a="http://schemas.openxmlformats.org/drawingml/2006/main" name="Тема Office">
+  <a:themeElements>
+    <a:clrScheme name="Стандартная">
+      <a:dk1>
+        <a:sysClr val="windowText" lastClr="000000"/>
+      </a:dk1>
+      <a:lt1>
+        <a:sysClr val="window" lastClr="FFFFFF"/>
+      </a:lt1>
+      <a:dk2>
+        <a:srgbClr val="0E2841"/>
+      </a:dk2>
+      <a:lt2>
+        <a:srgbClr val="E8E8E8"/>
+      </a:lt2>
+      <a:accent1>
+        <a:srgbClr val="156082"/>
+      </a:accent1>
+      <a:accent2>
+        <a:srgbClr val="E97132"/>
+      </a:accent2>
+      <a:accent3>
+        <a:srgbClr val="196B24"/>
+      </a:accent3>
+      <a:accent4>
+        <a:srgbClr val="0F9ED5"/>
+      </a:accent4>
+      <a:accent5>
+        <a:srgbClr val="A02B93"/>
+      </a:accent5>
+      <a:accent6>
+        <a:srgbClr val="4EA72E"/>
+      </a:accent6>
+      <a:hlink>
+        <a:srgbClr val="467886"/>
+      </a:hlink>
+      <a:folHlink>
+        <a:srgbClr val="96607D"/>
+      </a:folHlink>
+    </a:clrScheme>
+    <a:fontScheme name="Стандартная">
+      <a:majorFont>
+        <a:latin typeface="Aptos Display" panose="02110004020202020204"/>
+        <a:ea typeface=""/>
+        <a:cs typeface=""/>
+        <a:font script="Jpan" typeface="游ゴシック Light"/>
+        <a:font script="Hang" typeface="맑은 고딕"/>
+        <a:font script="Hans" typeface="等线 Light"/>
+        <a:font script="Hant" typeface="新細明體"/>
+        <a:font script="Arab" typeface="Times New Roman"/>
+        <a:font script="Hebr" typeface="Times New Roman"/>
+        <a:font script="Thai" typeface="Angsana New"/>
+        <a:font script="Ethi" typeface="Nyala"/>
+        <a:font script="Beng" typeface="Vrinda"/>
+        <a:font script="Gujr" typeface="Shruti"/>
+        <a:font script="Khmr" typeface="MoolBoran"/>
+        <a:font script="Knda" typeface="Tunga"/>
+        <a:font script="Guru" typeface="Raavi"/>
+        <a:font script="Cans" typeface="Euphemia"/>
+        <a:font script="Cher" typeface="Plantagenet Cherokee"/>
+        <a:font script="Yiii" typeface="Microsoft Yi Baiti"/>
+        <a:font script="Tibt" typeface="Microsoft Himalaya"/>
+        <a:font script="Thaa" typeface="MV Boli"/>
+        <a:font script="Deva" typeface="Mangal"/>
+        <a:font script="Telu" typeface="Gautami"/>
+        <a:font script="Taml" typeface="Latha"/>
+        <a:font script="Syrc" typeface="Estrangelo Edessa"/>
+        <a:font script="Orya" typeface="Kalinga"/>
+        <a:font script="Mlym" typeface="Kartika"/>
+        <a:font script="Laoo" typeface="DokChampa"/>
+        <a:font script="Sinh" typeface="Iskoola Pota"/>
+        <a:font script="Mong" typeface="Mongolian Baiti"/>
+        <a:font script="Viet" typeface="Times New Roman"/>
+        <a:font script="Uigh" typeface="Microsoft Uighur"/>
+        <a:font script="Geor" typeface="Sylfaen"/>
+        <a:font script="Armn" typeface="Arial"/>
+        <a:font script="Bugi" typeface="Leelawadee UI"/>
+        <a:font script="Bopo" typeface="Microsoft JhengHei"/>
+        <a:font script="Java" typeface="Javanese Text"/>
+        <a:font script="Lisu" typeface="Segoe UI"/>
+        <a:font script="Mymr" typeface="Myanmar Text"/>
+        <a:font script="Nkoo" typeface="Ebrima"/>
+        <a:font script="Olck" typeface="Nirmala UI"/>
+        <a:font script="Osma" typeface="Ebrima"/>
+        <a:font script="Phag" typeface="Phagspa"/>
+        <a:font script="Syrn" typeface="Estrangelo Edessa"/>
+        <a:font script="Syrj" typeface="Estrangelo Edessa"/>
+        <a:font script="Syre" typeface="Estrangelo Edessa"/>
+        <a:font script="Sora" typeface="Nirmala UI"/>
+        <a:font script="Tale" typeface="Microsoft Tai Le"/>
+        <a:font script="Talu" typeface="Microsoft New Tai Lue"/>
+        <a:font script="Tfng" typeface="Ebrima"/>
+      </a:majorFont>
+      <a:minorFont>
+        <a:latin typeface="Aptos" panose="02110004020202020204"/>
+        <a:ea typeface=""/>
+        <a:cs typeface=""/>
+        <a:font script="Jpan" typeface="游ゴシック"/>
+        <a:font script="Hang" typeface="맑은 고딕"/>
+        <a:font script="Hans" typeface="等线"/>
+        <a:font script="Hant" typeface="新細明體"/>
+        <a:font script="Arab" typeface="Arial"/>
+        <a:font script="Hebr" typeface="Arial"/>
+        <a:font script="Thai" typeface="Cordia New"/>
+        <a:font script="Ethi" typeface="Nyala"/>
+        <a:font script="Beng" typeface="Vrinda"/>
+        <a:font script="Gujr" typeface="Shruti"/>
+        <a:font script="Khmr" typeface="DaunPenh"/>
+        <a:font script="Knda" typeface="Tunga"/>
+        <a:font script="Guru" typeface="Raavi"/>
+        <a:font script="Cans" typeface="Euphemia"/>
+        <a:font script="Cher" typeface="Plantagenet Cherokee"/>
+        <a:font script="Yiii" typeface="Microsoft Yi Baiti"/>
+        <a:font script="Tibt" typeface="Microsoft Himalaya"/>
+        <a:font script="Thaa" typeface="MV Boli"/>
+        <a:font script="Deva" typeface="Mangal"/>
+        <a:font script="Telu" typeface="Gautami"/>
+        <a:font script="Taml" typeface="Latha"/>
+        <a:font script="Syrc" typeface="Estrangelo Edessa"/>
+        <a:font script="Orya" typeface="Kalinga"/>
+        <a:font script="Mlym" typeface="Kartika"/>
+        <a:font script="Laoo" typeface="DokChampa"/>
+        <a:font script="Sinh" typeface="Iskoola Pota"/>
+        <a:font script="Mong" typeface="Mongolian Baiti"/>
+        <a:font script="Viet" typeface="Arial"/>
+        <a:font script="Uigh" typeface="Microsoft Uighur"/>
+        <a:font script="Geor" typeface="Sylfaen"/>
+        <a:font script="Armn" typeface="Arial"/>
+        <a:font script="Bugi" typeface="Leelawadee UI"/>
+        <a:font script="Bopo" typeface="Microsoft JhengHei"/>
+        <a:font script="Java" typeface="Javanese Text"/>
+        <a:font script="Lisu" typeface="Segoe UI"/>
+        <a:font script="Mymr" typeface="Myanmar Text"/>
+        <a:font script="Nkoo" typeface="Ebrima"/>
+        <a:font script="Olck" typeface="Nirmala UI"/>
+        <a:font script="Osma" typeface="Ebrima"/>
+        <a:font script="Phag" typeface="Phagspa"/>
+        <a:font script="Syrn" typeface="Estrangelo Edessa"/>
+        <a:font script="Syrj" typeface="Estrangelo Edessa"/>
+        <a:font script="Syre" typeface="Estrangelo Edessa"/>
+        <a:font script="Sora" typeface="Nirmala UI"/>
+        <a:font script="Tale" typeface="Microsoft Tai Le"/>
+        <a:font script="Talu" typeface="Microsoft New Tai Lue"/>
+        <a:font script="Tfng" typeface="Ebrima"/>
+      </a:minorFont>
+    </a:fontScheme>
+    <a:fmtScheme name="Стандартная">
+      <a:fillStyleLst>
+        <a:solidFill>
+          <a:schemeClr val="phClr"/>
+        </a:solidFill>
+        <a:gradFill rotWithShape="1">
+          <a:gsLst>
+            <a:gs pos="0">
+              <a:schemeClr val="phClr">
+                <a:lumMod val="110000"/>
+                <a:satMod val="105000"/>
+                <a:tint val="67000"/>
+              </a:schemeClr>
+            </a:gs>
+            <a:gs pos="50000">
+              <a:schemeClr val="phClr">
+                <a:lumMod val="105000"/>
+                <a:satMod val="103000"/>
+                <a:tint val="73000"/>
+              </a:schemeClr>
+            </a:gs>
+            <a:gs pos="100000">
+              <a:schemeClr val="phClr">
+                <a:lumMod val="105000"/>
+                <a:satMod val="109000"/>
+                <a:tint val="81000"/>
+              </a:schemeClr>
+            </a:gs>
+          </a:gsLst>
+          <a:lin ang="5400000" scaled="0"/>
+        </a:gradFill>
+        <a:gradFill rotWithShape="1">
+          <a:gsLst>
+            <a:gs pos="0">
+              <a:schemeClr val="phClr">
+                <a:satMod val="103000"/>
+                <a:lumMod val="102000"/>
+                <a:tint val="94000"/>
+              </a:schemeClr>
+            </a:gs>
+            <a:gs pos="50000">
+              <a:schemeClr val="phClr">
+                <a:satMod val="110000"/>
+                <a:lumMod val="100000"/>
+                <a:shade val="100000"/>
+              </a:schemeClr>
+            </a:gs>
+            <a:gs pos="100000">
+              <a:schemeClr val="phClr">
+                <a:lumMod val="99000"/>
+                <a:satMod val="120000"/>
+                <a:shade val="78000"/>
+              </a:schemeClr>
+            </a:gs>
+          </a:gsLst>
+          <a:lin ang="5400000" scaled="0"/>
+        </a:gradFill>
+      </a:fillStyleLst>
+      <a:lnStyleLst>
+        <a:ln w="12700" cap="flat" cmpd="sng" algn="ctr">
+          <a:solidFill>
+            <a:schemeClr val="phClr"/>
+          </a:solidFill>
+          <a:prstDash val="solid"/>
+          <a:miter lim="800000"/>
+        </a:ln>
+        <a:ln w="19050" cap="flat" cmpd="sng" algn="ctr">
+          <a:solidFill>
+            <a:schemeClr val="phClr"/>
+          </a:solidFill>
+          <a:prstDash val="solid"/>
+          <a:miter lim="800000"/>
+        </a:ln>
+        <a:ln w="25400" cap="flat" cmpd="sng" algn="ctr">
+          <a:solidFill>
+            <a:schemeClr val="phClr"/>
+          </a:solidFill>
+          <a:prstDash val="solid"/>
+          <a:miter lim="800000"/>
+        </a:ln>
+      </a:lnStyleLst>
+      <a:effectStyleLst>
+        <a:effectStyle>
+          <a:effectLst/>
+        </a:effectStyle>
+        <a:effectStyle>
+          <a:effectLst/>
+        </a:effectStyle>
+        <a:effectStyle>
+          <a:effectLst>
+            <a:outerShdw blurRad="57150" dist="19050" dir="5400000" algn="ctr" rotWithShape="0">
+              <a:srgbClr val="000000">
+                <a:alpha val="63000"/>
+              </a:srgbClr>
+            </a:outerShdw>
+          </a:effectLst>
+        </a:effectStyle>
+      </a:effectStyleLst>
+      <a:bgFillStyleLst>
+        <a:solidFill>
+          <a:schemeClr val="phClr"/>
+        </a:solidFill>
+        <a:solidFill>
+          <a:schemeClr val="phClr">
+            <a:tint val="95000"/>
+            <a:satMod val="170000"/>
+          </a:schemeClr>
+        </a:solidFill>
+        <a:gradFill rotWithShape="1">
+          <a:gsLst>
+            <a:gs pos="0">
+              <a:schemeClr val="phClr">
+                <a:tint val="93000"/>
+                <a:satMod val="150000"/>
+                <a:shade val="98000"/>
+                <a:lumMod val="102000"/>
+              </a:schemeClr>
+            </a:gs>
+            <a:gs pos="50000">
+              <a:schemeClr val="phClr">
+                <a:tint val="98000"/>
+                <a:satMod val="130000"/>
+                <a:shade val="90000"/>
+                <a:lumMod val="103000"/>
+              </a:schemeClr>
+            </a:gs>
+            <a:gs pos="100000">
+              <a:schemeClr val="phClr">
+                <a:shade val="63000"/>
+                <a:satMod val="120000"/>
+              </a:schemeClr>
+            </a:gs>
+          </a:gsLst>
+          <a:lin ang="5400000" scaled="0"/>
+        </a:gradFill>
+      </a:bgFillStyleLst>
+    </a:fmtScheme>
+  </a:themeElements>
+  <a:objectDefaults>
+    <a:lnDef>
+      <a:spPr/>
+      <a:bodyPr/>
+      <a:lstStyle/>
+      <a:style>
+        <a:lnRef idx="2">
+          <a:schemeClr val="accent1"/>
+        </a:lnRef>
+        <a:fillRef idx="0">
+          <a:schemeClr val="accent1"/>
+        </a:fillRef>
+        <a:effectRef idx="1">
+          <a:schemeClr val="accent1"/>
+        </a:effectRef>
+        <a:fontRef idx="minor">
+          <a:schemeClr val="tx1"/>
+        </a:fontRef>
+      </a:style>
+    </a:lnDef>
+  </a:objectDefaults>
+  <a:extraClrSchemeLst/>
+  <a:extLst>
+    <a:ext uri="{05A4C25C-085E-4340-85A3-A5531E510DB2}">
+      <thm15:themeFamily xmlns:thm15="http://schemas.microsoft.com/office/thememl/2012/main" name="Office Theme" id="{2E142A2C-CD16-42D6-873A-C26D2A0506FA}" vid="{1BDDFF52-6CD6-40A5-AB3C-68EB2F1E4D0A}"/>
+    </a:ext>
+  </a:extLst>
+</a:theme>
 </file>